--- a/static/ppts/G6_Math_T2_Multiply_Divide_Fractions.pptx
+++ b/static/ppts/G6_Math_T2_Multiply_Divide_Fractions.pptx
@@ -9,9 +9,10 @@
     <p:sldId id="257" r:id="rId3"/>
     <p:sldId id="258" r:id="rId4"/>
     <p:sldId id="259" r:id="rId5"/>
+    <p:sldId id="260" r:id="rId6"/>
   </p:sldIdLst>
   <p:notesMasterIdLst>
-    <p:notesMasterId r:id="rId6"/>
+    <p:notesMasterId r:id="rId7"/>
   </p:notesMasterIdLst>
   <p:sldSz cx="9144000" cy="5143500"/>
   <p:notesSz cx="5143500" cy="9144000"/>
@@ -811,6 +812,94 @@
 </p:notes>
 </file>
 
+<file path=ppt/notesSlides/notesSlide5.xml><?xml version="1.0" encoding="utf-8"?>
+<p:notes xmlns:a="http://schemas.openxmlformats.org/drawingml/2006/main" xmlns:r="http://schemas.openxmlformats.org/officeDocument/2006/relationships" xmlns:p="http://schemas.openxmlformats.org/presentationml/2006/main">
+  <p:cSld>
+    <p:spTree>
+      <p:nvGrpSpPr>
+        <p:cNvPr id="1" name=""/>
+        <p:cNvGrpSpPr/>
+        <p:nvPr/>
+      </p:nvGrpSpPr>
+      <p:grpSpPr>
+        <a:xfrm>
+          <a:off x="0" y="0"/>
+          <a:ext cx="0" cy="0"/>
+          <a:chOff x="0" y="0"/>
+          <a:chExt cx="0" cy="0"/>
+        </a:xfrm>
+      </p:grpSpPr>
+      <p:sp>
+        <p:nvSpPr>
+          <p:cNvPr id="2" name="Slide Image Placeholder 1"/>
+          <p:cNvSpPr>
+            <a:spLocks noGrp="1" noRot="1" noChangeAspect="1"/>
+          </p:cNvSpPr>
+          <p:nvPr>
+            <p:ph type="sldImg"/>
+          </p:nvPr>
+        </p:nvSpPr>
+        <p:spPr/>
+      </p:sp>
+      <p:sp>
+        <p:nvSpPr>
+          <p:cNvPr id="3" name="Notes Placeholder 2"/>
+          <p:cNvSpPr>
+            <a:spLocks noGrp="1"/>
+          </p:cNvSpPr>
+          <p:nvPr>
+            <p:ph type="body" idx="1"/>
+          </p:nvPr>
+        </p:nvSpPr>
+        <p:spPr/>
+        <p:txBody>
+          <a:bodyPr/>
+          <a:lstStyle/>
+          <a:p>
+            <a:r>
+              <a:rPr lang="en-US" dirty="0"/>
+              <a:t/>
+            </a:r>
+            <a:endParaRPr lang="en-US" dirty="0"/>
+          </a:p>
+        </p:txBody>
+      </p:sp>
+      <p:sp>
+        <p:nvSpPr>
+          <p:cNvPr id="4" name="Slide Number Placeholder 3"/>
+          <p:cNvSpPr>
+            <a:spLocks noGrp="1"/>
+          </p:cNvSpPr>
+          <p:nvPr>
+            <p:ph type="sldNum" sz="quarter" idx="10"/>
+          </p:nvPr>
+        </p:nvSpPr>
+        <p:spPr/>
+        <p:txBody>
+          <a:bodyPr/>
+          <a:lstStyle/>
+          <a:p>
+            <a:fld id="{F7021451-1387-4CA6-816F-3879F97B5CBC}" type="slidenum">
+              <a:rPr lang="en-US"/>
+              <a:t>5</a:t>
+            </a:fld>
+            <a:endParaRPr lang="en-US"/>
+          </a:p>
+        </p:txBody>
+      </p:sp>
+    </p:spTree>
+    <p:extLst>
+      <p:ext uri="{BB962C8B-B14F-4D97-AF65-F5344CB8AC3E}">
+        <p14:creationId xmlns:p14="http://schemas.microsoft.com/office/powerpoint/2010/main" val="1024086991"/>
+      </p:ext>
+    </p:extLst>
+  </p:cSld>
+  <p:clrMapOvr>
+    <a:masterClrMapping/>
+  </p:clrMapOvr>
+</p:notes>
+</file>
+
 <file path=ppt/slideLayouts/slideLayout1.xml><?xml version="1.0" encoding="utf-8"?>
 <p:sldLayout xmlns:a="http://schemas.openxmlformats.org/drawingml/2006/main" xmlns:r="http://schemas.openxmlformats.org/officeDocument/2006/relationships" xmlns:p="http://schemas.openxmlformats.org/presentationml/2006/main" preserve="1">
   <p:cSld name="DEFAULT">
@@ -1170,7 +1259,7 @@
         </p:nvSpPr>
         <p:spPr>
           <a:xfrm>
-            <a:off x="731520" y="1280160"/>
+            <a:off x="731520" y="1097280"/>
             <a:ext cx="7772400" cy="1371600"/>
           </a:xfrm>
           <a:prstGeom prst="rect">
@@ -1187,7 +1276,7 @@
               <a:buNone/>
             </a:pPr>
             <a:r>
-              <a:rPr lang="en-US" sz="3600" b="1" dirty="0">
+              <a:rPr lang="en-US" sz="4000" b="1" dirty="0">
                 <a:solidFill>
                   <a:srgbClr val="FFFFFF"/>
                 </a:solidFill>
@@ -1197,7 +1286,7 @@
               </a:rPr>
               <a:t>Multiplying &amp; Dividing Fractions</a:t>
             </a:r>
-            <a:endParaRPr lang="en-US" sz="3600" dirty="0"/>
+            <a:endParaRPr lang="en-US" sz="4000" dirty="0"/>
           </a:p>
         </p:txBody>
       </p:sp>
@@ -1209,7 +1298,7 @@
         </p:nvSpPr>
         <p:spPr>
           <a:xfrm>
-            <a:off x="731520" y="2743200"/>
+            <a:off x="731520" y="2560320"/>
             <a:ext cx="7772400" cy="548640"/>
           </a:xfrm>
           <a:prstGeom prst="rect">
@@ -1228,13 +1317,13 @@
             <a:r>
               <a:rPr lang="en-US" sz="1600" dirty="0">
                 <a:solidFill>
-                  <a:srgbClr val="9B9690"/>
+                  <a:srgbClr val="E9C46A"/>
                 </a:solidFill>
                 <a:latin typeface="Calibri" pitchFamily="34" charset="0"/>
                 <a:ea typeface="Calibri" pitchFamily="34" charset="-122"/>
                 <a:cs typeface="Calibri" pitchFamily="34" charset="-120"/>
               </a:rPr>
-              <a:t>G6 Maths · Fractions &amp; Decimals</a:t>
+              <a:t>Grade 6 Mathematics · Mr Zocchi</a:t>
             </a:r>
             <a:endParaRPr lang="en-US" sz="1600" dirty="0"/>
           </a:p>
@@ -1242,14 +1331,36 @@
       </p:sp>
       <p:sp>
         <p:nvSpPr>
-          <p:cNvPr id="5" name="Text 3"/>
+          <p:cNvPr id="5" name="Shape 3"/>
           <p:cNvSpPr/>
           <p:nvPr/>
         </p:nvSpPr>
         <p:spPr>
           <a:xfrm>
-            <a:off x="731520" y="4389120"/>
-            <a:ext cx="7772400" cy="457200"/>
+            <a:off x="731520" y="3474720"/>
+            <a:ext cx="2011680" cy="411480"/>
+          </a:xfrm>
+          <a:prstGeom prst="roundRect">
+            <a:avLst>
+              <a:gd name="adj" fmla="val 17778"/>
+            </a:avLst>
+          </a:prstGeom>
+          <a:solidFill>
+            <a:srgbClr val="2A9D8F"/>
+          </a:solidFill>
+          <a:ln/>
+        </p:spPr>
+      </p:sp>
+      <p:sp>
+        <p:nvSpPr>
+          <p:cNvPr id="6" name="Text 4"/>
+          <p:cNvSpPr/>
+          <p:nvPr/>
+        </p:nvSpPr>
+        <p:spPr>
+          <a:xfrm>
+            <a:off x="731520" y="3474720"/>
+            <a:ext cx="2011680" cy="411480"/>
           </a:xfrm>
           <a:prstGeom prst="rect">
             <a:avLst/>
@@ -1261,21 +1372,21 @@
           <a:bodyPr wrap="square" rtlCol="0" anchor="ctr"/>
           <a:lstStyle/>
           <a:p>
-            <a:pPr indent="0" marL="0">
+            <a:pPr algn="ctr" indent="0" marL="0">
               <a:buNone/>
             </a:pPr>
             <a:r>
-              <a:rPr lang="en-US" sz="1000" dirty="0">
-                <a:solidFill>
-                  <a:srgbClr val="6B6660"/>
+              <a:rPr lang="en-US" sz="1200" b="1" dirty="0">
+                <a:solidFill>
+                  <a:srgbClr val="FFFFFF"/>
                 </a:solidFill>
                 <a:latin typeface="Calibri" pitchFamily="34" charset="0"/>
                 <a:ea typeface="Calibri" pitchFamily="34" charset="-122"/>
                 <a:cs typeface="Calibri" pitchFamily="34" charset="-120"/>
               </a:rPr>
-              <a:t>Mr Zocchi · mrzocchi.com</a:t>
-            </a:r>
-            <a:endParaRPr lang="en-US" sz="1000" dirty="0"/>
+              <a:t>Term 2 · Fractions &amp; Decimals</a:t>
+            </a:r>
+            <a:endParaRPr lang="en-US" sz="1200" dirty="0"/>
           </a:p>
         </p:txBody>
       </p:sp>
@@ -1293,7 +1404,7 @@
     <p:bg>
       <p:bgPr>
         <a:solidFill>
-          <a:srgbClr val="FFFFFF"/>
+          <a:srgbClr val="FAF8F5"/>
         </a:solidFill>
       </p:bgPr>
     </p:bg>
@@ -1339,8 +1450,8 @@
         </p:nvSpPr>
         <p:spPr>
           <a:xfrm>
-            <a:off x="548640" y="274320"/>
-            <a:ext cx="8046720" cy="640080"/>
+            <a:off x="7772400" y="4709160"/>
+            <a:ext cx="1097280" cy="320040"/>
           </a:xfrm>
           <a:prstGeom prst="rect">
             <a:avLst/>
@@ -1349,14 +1460,105 @@
           <a:ln/>
         </p:spPr>
         <p:txBody>
-          <a:bodyPr wrap="square" lIns="0" tIns="0" rIns="0" bIns="0" rtlCol="0" anchor="ctr"/>
+          <a:bodyPr wrap="square" rtlCol="0" anchor="ctr"/>
+          <a:lstStyle/>
+          <a:p>
+            <a:pPr algn="r" indent="0" marL="0">
+              <a:buNone/>
+            </a:pPr>
+            <a:r>
+              <a:rPr lang="en-US" sz="900" dirty="0">
+                <a:solidFill>
+                  <a:srgbClr val="6B6660"/>
+                </a:solidFill>
+                <a:latin typeface="Calibri" pitchFamily="34" charset="0"/>
+                <a:ea typeface="Calibri" pitchFamily="34" charset="-122"/>
+                <a:cs typeface="Calibri" pitchFamily="34" charset="-120"/>
+              </a:rPr>
+              <a:t>2 / 5</a:t>
+            </a:r>
+            <a:endParaRPr lang="en-US" sz="900" dirty="0"/>
+          </a:p>
+        </p:txBody>
+      </p:sp>
+      <p:sp>
+        <p:nvSpPr>
+          <p:cNvPr id="4" name="Shape 2"/>
+          <p:cNvSpPr/>
+          <p:nvPr/>
+        </p:nvSpPr>
+        <p:spPr>
+          <a:xfrm>
+            <a:off x="1371600" y="914400"/>
+            <a:ext cx="6400800" cy="3200400"/>
+          </a:xfrm>
+          <a:prstGeom prst="rect">
+            <a:avLst/>
+          </a:prstGeom>
+          <a:solidFill>
+            <a:srgbClr val="FFFFFF"/>
+          </a:solidFill>
+          <a:ln w="12700">
+            <a:solidFill>
+              <a:srgbClr val="E5E2DC"/>
+            </a:solidFill>
+            <a:prstDash val="solid"/>
+          </a:ln>
+          <a:effectLst>
+            <a:outerShdw sx="100000" sy="100000" kx="0" ky="0" algn="bl" rotWithShape="0" blurRad="50800" dist="25400" dir="8100000">
+              <a:srgbClr val="000000">
+                <a:alpha val="10000"/>
+              </a:srgbClr>
+            </a:outerShdw>
+          </a:effectLst>
+        </p:spPr>
+      </p:sp>
+      <p:sp>
+        <p:nvSpPr>
+          <p:cNvPr id="5" name="Shape 3"/>
+          <p:cNvSpPr/>
+          <p:nvPr/>
+        </p:nvSpPr>
+        <p:spPr>
+          <a:xfrm>
+            <a:off x="1371600" y="914400"/>
+            <a:ext cx="91440" cy="3200400"/>
+          </a:xfrm>
+          <a:prstGeom prst="rect">
+            <a:avLst/>
+          </a:prstGeom>
+          <a:solidFill>
+            <a:srgbClr val="2A9D8F"/>
+          </a:solidFill>
+          <a:ln/>
+        </p:spPr>
+      </p:sp>
+      <p:sp>
+        <p:nvSpPr>
+          <p:cNvPr id="6" name="Text 4"/>
+          <p:cNvSpPr/>
+          <p:nvPr/>
+        </p:nvSpPr>
+        <p:spPr>
+          <a:xfrm>
+            <a:off x="1828800" y="1097280"/>
+            <a:ext cx="5669280" cy="640080"/>
+          </a:xfrm>
+          <a:prstGeom prst="rect">
+            <a:avLst/>
+          </a:prstGeom>
+          <a:noFill/>
+          <a:ln/>
+        </p:spPr>
+        <p:txBody>
+          <a:bodyPr wrap="square" rtlCol="0" anchor="ctr"/>
           <a:lstStyle/>
           <a:p>
             <a:pPr indent="0" marL="0">
               <a:buNone/>
             </a:pPr>
             <a:r>
-              <a:rPr lang="en-US" sz="2600" b="1" dirty="0">
+              <a:rPr lang="en-US" sz="2400" b="1" dirty="0">
                 <a:solidFill>
                   <a:srgbClr val="1B2A4A"/>
                 </a:solidFill>
@@ -1364,22 +1566,22 @@
                 <a:ea typeface="Georgia" pitchFamily="34" charset="-122"/>
                 <a:cs typeface="Georgia" pitchFamily="34" charset="-120"/>
               </a:rPr>
-              <a:t>Multiplying Fractions</a:t>
-            </a:r>
-            <a:endParaRPr lang="en-US" sz="2600" dirty="0"/>
-          </a:p>
-        </p:txBody>
-      </p:sp>
-      <p:sp>
-        <p:nvSpPr>
-          <p:cNvPr id="4" name="Text 2"/>
+              <a:t>Multiplying and Dividing</a:t>
+            </a:r>
+            <a:endParaRPr lang="en-US" sz="2400" dirty="0"/>
+          </a:p>
+        </p:txBody>
+      </p:sp>
+      <p:sp>
+        <p:nvSpPr>
+          <p:cNvPr id="7" name="Text 5"/>
           <p:cNvSpPr/>
           <p:nvPr/>
         </p:nvSpPr>
         <p:spPr>
           <a:xfrm>
-            <a:off x="548640" y="1097280"/>
-            <a:ext cx="8046720" cy="3474720"/>
+            <a:off x="1828800" y="1828800"/>
+            <a:ext cx="5669280" cy="2011680"/>
           </a:xfrm>
           <a:prstGeom prst="rect">
             <a:avLst/>
@@ -1391,12 +1593,11 @@
           <a:bodyPr wrap="square" rtlCol="0" anchor="t"/>
           <a:lstStyle/>
           <a:p>
-            <a:pPr marL="342900" indent="-342900">
-              <a:spcAft>
-                <a:spcPts val="800"/>
-              </a:spcAft>
-              <a:buSzPct val="100000"/>
-              <a:buChar char="•"/>
+            <a:pPr indent="0" marL="0">
+              <a:lnSpc>
+                <a:spcPct val="130000"/>
+              </a:lnSpc>
+              <a:buNone/>
             </a:pPr>
             <a:r>
               <a:rPr lang="en-US" sz="1500" dirty="0">
@@ -1407,150 +1608,9 @@
                 <a:ea typeface="Calibri" pitchFamily="34" charset="-122"/>
                 <a:cs typeface="Calibri" pitchFamily="34" charset="-120"/>
               </a:rPr>
-              <a:t>Multiply numerator × numerator and denominator × denominator</a:t>
+              <a:t>Multiplying fractions is simpler than adding — just multiply straight across! Dividing fractions uses the 'KFC' trick: Keep the first fraction, Flip the second, Change to multiplication. These are powerful skills used in ratio, proportion, and algebra.</a:t>
             </a:r>
             <a:endParaRPr lang="en-US" sz="1500" dirty="0"/>
-          </a:p>
-          <a:p>
-            <a:pPr marL="342900" indent="-342900">
-              <a:spcAft>
-                <a:spcPts val="800"/>
-              </a:spcAft>
-              <a:buSzPct val="100000"/>
-              <a:buChar char="•"/>
-            </a:pPr>
-            <a:r>
-              <a:rPr lang="en-US" sz="1500" dirty="0">
-                <a:solidFill>
-                  <a:srgbClr val="3D3A36"/>
-                </a:solidFill>
-                <a:latin typeface="Calibri" pitchFamily="34" charset="0"/>
-                <a:ea typeface="Calibri" pitchFamily="34" charset="-122"/>
-                <a:cs typeface="Calibri" pitchFamily="34" charset="-120"/>
-              </a:rPr>
-              <a:t>2/3 × 4/5 = 8/15 (no need for common denominator!)</a:t>
-            </a:r>
-            <a:endParaRPr lang="en-US" sz="1500" dirty="0"/>
-          </a:p>
-          <a:p>
-            <a:pPr marL="342900" indent="-342900">
-              <a:spcAft>
-                <a:spcPts val="800"/>
-              </a:spcAft>
-              <a:buSzPct val="100000"/>
-              <a:buChar char="•"/>
-            </a:pPr>
-            <a:r>
-              <a:rPr lang="en-US" sz="1500" dirty="0">
-                <a:solidFill>
-                  <a:srgbClr val="3D3A36"/>
-                </a:solidFill>
-                <a:latin typeface="Calibri" pitchFamily="34" charset="0"/>
-                <a:ea typeface="Calibri" pitchFamily="34" charset="-122"/>
-                <a:cs typeface="Calibri" pitchFamily="34" charset="-120"/>
-              </a:rPr>
-              <a:t>Multiply by a whole number: put whole number over 1 first</a:t>
-            </a:r>
-            <a:endParaRPr lang="en-US" sz="1500" dirty="0"/>
-          </a:p>
-          <a:p>
-            <a:pPr marL="342900" indent="-342900">
-              <a:spcAft>
-                <a:spcPts val="800"/>
-              </a:spcAft>
-              <a:buSzPct val="100000"/>
-              <a:buChar char="•"/>
-            </a:pPr>
-            <a:r>
-              <a:rPr lang="en-US" sz="1500" dirty="0">
-                <a:solidFill>
-                  <a:srgbClr val="3D3A36"/>
-                </a:solidFill>
-                <a:latin typeface="Calibri" pitchFamily="34" charset="0"/>
-                <a:ea typeface="Calibri" pitchFamily="34" charset="-122"/>
-                <a:cs typeface="Calibri" pitchFamily="34" charset="-120"/>
-              </a:rPr>
-              <a:t>3 × 2/5 = 3/1 × 2/5 = 6/5 = 1 1/5</a:t>
-            </a:r>
-            <a:endParaRPr lang="en-US" sz="1500" dirty="0"/>
-          </a:p>
-          <a:p>
-            <a:pPr marL="342900" indent="-342900">
-              <a:spcAft>
-                <a:spcPts val="800"/>
-              </a:spcAft>
-              <a:buSzPct val="100000"/>
-              <a:buChar char="•"/>
-            </a:pPr>
-            <a:r>
-              <a:rPr lang="en-US" sz="1500" dirty="0">
-                <a:solidFill>
-                  <a:srgbClr val="3D3A36"/>
-                </a:solidFill>
-                <a:latin typeface="Calibri" pitchFamily="34" charset="0"/>
-                <a:ea typeface="Calibri" pitchFamily="34" charset="-122"/>
-                <a:cs typeface="Calibri" pitchFamily="34" charset="-120"/>
-              </a:rPr>
-              <a:t>Simplify before or after multiplying</a:t>
-            </a:r>
-            <a:endParaRPr lang="en-US" sz="1500" dirty="0"/>
-          </a:p>
-          <a:p>
-            <a:pPr marL="342900" indent="-342900">
-              <a:spcAft>
-                <a:spcPts val="800"/>
-              </a:spcAft>
-              <a:buSzPct val="100000"/>
-              <a:buChar char="•"/>
-            </a:pPr>
-            <a:r>
-              <a:rPr lang="en-US" sz="1500" dirty="0">
-                <a:solidFill>
-                  <a:srgbClr val="3D3A36"/>
-                </a:solidFill>
-                <a:latin typeface="Calibri" pitchFamily="34" charset="0"/>
-                <a:ea typeface="Calibri" pitchFamily="34" charset="-122"/>
-                <a:cs typeface="Calibri" pitchFamily="34" charset="-120"/>
-              </a:rPr>
-              <a:t>'Of' means multiply: 1/4 of 20 = 1/4 × 20 = 5</a:t>
-            </a:r>
-            <a:endParaRPr lang="en-US" sz="1500" dirty="0"/>
-          </a:p>
-        </p:txBody>
-      </p:sp>
-      <p:sp>
-        <p:nvSpPr>
-          <p:cNvPr id="5" name="Text 3"/>
-          <p:cNvSpPr/>
-          <p:nvPr/>
-        </p:nvSpPr>
-        <p:spPr>
-          <a:xfrm>
-            <a:off x="548640" y="4800600"/>
-            <a:ext cx="3657600" cy="274320"/>
-          </a:xfrm>
-          <a:prstGeom prst="rect">
-            <a:avLst/>
-          </a:prstGeom>
-          <a:noFill/>
-          <a:ln/>
-        </p:spPr>
-        <p:txBody>
-          <a:bodyPr wrap="square" rtlCol="0" anchor="ctr"/>
-          <a:lstStyle/>
-          <a:p>
-            <a:pPr indent="0" marL="0">
-              <a:buNone/>
-            </a:pPr>
-            <a:r>
-              <a:rPr lang="en-US" sz="800" dirty="0">
-                <a:solidFill>
-                  <a:srgbClr val="9B9690"/>
-                </a:solidFill>
-              </a:rPr>
-              <a:t>mrzocchi.com</a:t>
-            </a:r>
-            <a:endParaRPr lang="en-US" sz="800" dirty="0"/>
           </a:p>
         </p:txBody>
       </p:sp>
@@ -1568,7 +1628,7 @@
     <p:bg>
       <p:bgPr>
         <a:solidFill>
-          <a:srgbClr val="FFFFFF"/>
+          <a:srgbClr val="FAF8F5"/>
         </a:solidFill>
       </p:bgPr>
     </p:bg>
@@ -1614,8 +1674,8 @@
         </p:nvSpPr>
         <p:spPr>
           <a:xfrm>
-            <a:off x="548640" y="274320"/>
-            <a:ext cx="8046720" cy="640080"/>
+            <a:off x="7772400" y="4709160"/>
+            <a:ext cx="1097280" cy="320040"/>
           </a:xfrm>
           <a:prstGeom prst="rect">
             <a:avLst/>
@@ -1624,7 +1684,46 @@
           <a:ln/>
         </p:spPr>
         <p:txBody>
-          <a:bodyPr wrap="square" lIns="0" tIns="0" rIns="0" bIns="0" rtlCol="0" anchor="ctr"/>
+          <a:bodyPr wrap="square" rtlCol="0" anchor="ctr"/>
+          <a:lstStyle/>
+          <a:p>
+            <a:pPr algn="r" indent="0" marL="0">
+              <a:buNone/>
+            </a:pPr>
+            <a:r>
+              <a:rPr lang="en-US" sz="900" dirty="0">
+                <a:solidFill>
+                  <a:srgbClr val="6B6660"/>
+                </a:solidFill>
+                <a:latin typeface="Calibri" pitchFamily="34" charset="0"/>
+                <a:ea typeface="Calibri" pitchFamily="34" charset="-122"/>
+                <a:cs typeface="Calibri" pitchFamily="34" charset="-120"/>
+              </a:rPr>
+              <a:t>3 / 5</a:t>
+            </a:r>
+            <a:endParaRPr lang="en-US" sz="900" dirty="0"/>
+          </a:p>
+        </p:txBody>
+      </p:sp>
+      <p:sp>
+        <p:nvSpPr>
+          <p:cNvPr id="4" name="Text 2"/>
+          <p:cNvSpPr/>
+          <p:nvPr/>
+        </p:nvSpPr>
+        <p:spPr>
+          <a:xfrm>
+            <a:off x="457200" y="274320"/>
+            <a:ext cx="8229600" cy="640080"/>
+          </a:xfrm>
+          <a:prstGeom prst="rect">
+            <a:avLst/>
+          </a:prstGeom>
+          <a:noFill/>
+          <a:ln/>
+        </p:spPr>
+        <p:txBody>
+          <a:bodyPr wrap="square" rtlCol="0" anchor="ctr"/>
           <a:lstStyle/>
           <a:p>
             <a:pPr indent="0" marL="0">
@@ -1639,7 +1738,7 @@
                 <a:ea typeface="Georgia" pitchFamily="34" charset="-122"/>
                 <a:cs typeface="Georgia" pitchFamily="34" charset="-120"/>
               </a:rPr>
-              <a:t>Dividing Fractions</a:t>
+              <a:t>Multiplying Fractions</a:t>
             </a:r>
             <a:endParaRPr lang="en-US" sz="2600" dirty="0"/>
           </a:p>
@@ -1647,14 +1746,14 @@
       </p:sp>
       <p:sp>
         <p:nvSpPr>
-          <p:cNvPr id="4" name="Text 2"/>
+          <p:cNvPr id="5" name="Text 3"/>
           <p:cNvSpPr/>
           <p:nvPr/>
         </p:nvSpPr>
         <p:spPr>
           <a:xfrm>
-            <a:off x="548640" y="1097280"/>
-            <a:ext cx="8046720" cy="3474720"/>
+            <a:off x="457200" y="1188720"/>
+            <a:ext cx="3840480" cy="3474720"/>
           </a:xfrm>
           <a:prstGeom prst="rect">
             <a:avLst/>
@@ -1668,13 +1767,13 @@
           <a:p>
             <a:pPr marL="342900" indent="-342900">
               <a:spcAft>
-                <a:spcPts val="800"/>
+                <a:spcPts val="600"/>
               </a:spcAft>
               <a:buSzPct val="100000"/>
               <a:buChar char="•"/>
             </a:pPr>
             <a:r>
-              <a:rPr lang="en-US" sz="1500" dirty="0">
+              <a:rPr lang="en-US" sz="1400" dirty="0">
                 <a:solidFill>
                   <a:srgbClr val="3D3A36"/>
                 </a:solidFill>
@@ -1682,20 +1781,20 @@
                 <a:ea typeface="Calibri" pitchFamily="34" charset="-122"/>
                 <a:cs typeface="Calibri" pitchFamily="34" charset="-120"/>
               </a:rPr>
-              <a:t>KFC: Keep, Flip, Change (Keep first fraction, Flip second, Change ÷ to ×)</a:t>
-            </a:r>
-            <a:endParaRPr lang="en-US" sz="1500" dirty="0"/>
+              <a:t>Multiply numerators together, multiply denominators together</a:t>
+            </a:r>
+            <a:endParaRPr lang="en-US" sz="1400" dirty="0"/>
           </a:p>
           <a:p>
             <a:pPr marL="342900" indent="-342900">
               <a:spcAft>
-                <a:spcPts val="800"/>
+                <a:spcPts val="600"/>
               </a:spcAft>
               <a:buSzPct val="100000"/>
               <a:buChar char="•"/>
             </a:pPr>
             <a:r>
-              <a:rPr lang="en-US" sz="1500" dirty="0">
+              <a:rPr lang="en-US" sz="1400" dirty="0">
                 <a:solidFill>
                   <a:srgbClr val="3D3A36"/>
                 </a:solidFill>
@@ -1703,20 +1802,20 @@
                 <a:ea typeface="Calibri" pitchFamily="34" charset="-122"/>
                 <a:cs typeface="Calibri" pitchFamily="34" charset="-120"/>
               </a:rPr>
-              <a:t>2/3 ÷ 4/5 → Keep 2/3, Flip 4/5 to 5/4, Change to × → 2/3 × 5/4 = 10/12 = 5/6</a:t>
-            </a:r>
-            <a:endParaRPr lang="en-US" sz="1500" dirty="0"/>
+              <a:t>²⁄₃ × ⁴⁄₅ = ⁸⁄₁₅</a:t>
+            </a:r>
+            <a:endParaRPr lang="en-US" sz="1400" dirty="0"/>
           </a:p>
           <a:p>
             <a:pPr marL="342900" indent="-342900">
               <a:spcAft>
-                <a:spcPts val="800"/>
+                <a:spcPts val="600"/>
               </a:spcAft>
               <a:buSzPct val="100000"/>
               <a:buChar char="•"/>
             </a:pPr>
             <a:r>
-              <a:rPr lang="en-US" sz="1500" dirty="0">
+              <a:rPr lang="en-US" sz="1400" dirty="0">
                 <a:solidFill>
                   <a:srgbClr val="3D3A36"/>
                 </a:solidFill>
@@ -1724,20 +1823,20 @@
                 <a:ea typeface="Calibri" pitchFamily="34" charset="-122"/>
                 <a:cs typeface="Calibri" pitchFamily="34" charset="-120"/>
               </a:rPr>
-              <a:t>The flipped fraction is called the RECIPROCAL</a:t>
-            </a:r>
-            <a:endParaRPr lang="en-US" sz="1500" dirty="0"/>
+              <a:t>Simplify before multiplying if possible (cross-cancel)</a:t>
+            </a:r>
+            <a:endParaRPr lang="en-US" sz="1400" dirty="0"/>
           </a:p>
           <a:p>
             <a:pPr marL="342900" indent="-342900">
               <a:spcAft>
-                <a:spcPts val="800"/>
+                <a:spcPts val="600"/>
               </a:spcAft>
               <a:buSzPct val="100000"/>
               <a:buChar char="•"/>
             </a:pPr>
             <a:r>
-              <a:rPr lang="en-US" sz="1500" dirty="0">
+              <a:rPr lang="en-US" sz="1400" dirty="0">
                 <a:solidFill>
                   <a:srgbClr val="3D3A36"/>
                 </a:solidFill>
@@ -1745,20 +1844,20 @@
                 <a:ea typeface="Calibri" pitchFamily="34" charset="-122"/>
                 <a:cs typeface="Calibri" pitchFamily="34" charset="-120"/>
               </a:rPr>
-              <a:t>Reciprocal of 4/5 = 5/4; reciprocal of 3 = 1/3</a:t>
-            </a:r>
-            <a:endParaRPr lang="en-US" sz="1500" dirty="0"/>
+              <a:t>³⁄₄ × ²⁄₉ → cancel 3 and 9 (÷3) → ¹⁄₄ × ²⁄₃ = ²⁄₁₂ = ¹⁄₆</a:t>
+            </a:r>
+            <a:endParaRPr lang="en-US" sz="1400" dirty="0"/>
           </a:p>
           <a:p>
             <a:pPr marL="342900" indent="-342900">
               <a:spcAft>
-                <a:spcPts val="800"/>
+                <a:spcPts val="600"/>
               </a:spcAft>
               <a:buSzPct val="100000"/>
               <a:buChar char="•"/>
             </a:pPr>
             <a:r>
-              <a:rPr lang="en-US" sz="1500" dirty="0">
+              <a:rPr lang="en-US" sz="1400" dirty="0">
                 <a:solidFill>
                   <a:srgbClr val="3D3A36"/>
                 </a:solidFill>
@@ -1766,22 +1865,74 @@
                 <a:ea typeface="Calibri" pitchFamily="34" charset="-122"/>
                 <a:cs typeface="Calibri" pitchFamily="34" charset="-120"/>
               </a:rPr>
-              <a:t>Always simplify your final answer</a:t>
-            </a:r>
-            <a:endParaRPr lang="en-US" sz="1500" dirty="0"/>
-          </a:p>
-        </p:txBody>
-      </p:sp>
-      <p:sp>
-        <p:nvSpPr>
-          <p:cNvPr id="5" name="Text 3"/>
+              <a:t>Mixed numbers: convert to improper first</a:t>
+            </a:r>
+            <a:endParaRPr lang="en-US" sz="1400" dirty="0"/>
+          </a:p>
+        </p:txBody>
+      </p:sp>
+      <p:sp>
+        <p:nvSpPr>
+          <p:cNvPr id="6" name="Shape 4"/>
           <p:cNvSpPr/>
           <p:nvPr/>
         </p:nvSpPr>
         <p:spPr>
           <a:xfrm>
-            <a:off x="548640" y="4800600"/>
-            <a:ext cx="3657600" cy="274320"/>
+            <a:off x="4846320" y="1188720"/>
+            <a:ext cx="3840480" cy="3474720"/>
+          </a:xfrm>
+          <a:prstGeom prst="rect">
+            <a:avLst/>
+          </a:prstGeom>
+          <a:solidFill>
+            <a:srgbClr val="FFFFFF"/>
+          </a:solidFill>
+          <a:ln w="12700">
+            <a:solidFill>
+              <a:srgbClr val="E5E2DC"/>
+            </a:solidFill>
+            <a:prstDash val="solid"/>
+          </a:ln>
+          <a:effectLst>
+            <a:outerShdw sx="100000" sy="100000" kx="0" ky="0" algn="bl" rotWithShape="0" blurRad="50800" dist="25400" dir="8100000">
+              <a:srgbClr val="000000">
+                <a:alpha val="10000"/>
+              </a:srgbClr>
+            </a:outerShdw>
+          </a:effectLst>
+        </p:spPr>
+      </p:sp>
+      <p:sp>
+        <p:nvSpPr>
+          <p:cNvPr id="7" name="Shape 5"/>
+          <p:cNvSpPr/>
+          <p:nvPr/>
+        </p:nvSpPr>
+        <p:spPr>
+          <a:xfrm>
+            <a:off x="4846320" y="1188720"/>
+            <a:ext cx="3840480" cy="54864"/>
+          </a:xfrm>
+          <a:prstGeom prst="rect">
+            <a:avLst/>
+          </a:prstGeom>
+          <a:solidFill>
+            <a:srgbClr val="2A9D8F"/>
+          </a:solidFill>
+          <a:ln/>
+        </p:spPr>
+      </p:sp>
+      <p:sp>
+        <p:nvSpPr>
+          <p:cNvPr id="8" name="Text 6"/>
+          <p:cNvSpPr/>
+          <p:nvPr/>
+        </p:nvSpPr>
+        <p:spPr>
+          <a:xfrm>
+            <a:off x="5120640" y="1371600"/>
+            <a:ext cx="3291840" cy="3108960"/>
           </a:xfrm>
           <a:prstGeom prst="rect">
             <a:avLst/>
@@ -1790,21 +1941,136 @@
           <a:ln/>
         </p:spPr>
         <p:txBody>
-          <a:bodyPr wrap="square" rtlCol="0" anchor="ctr"/>
+          <a:bodyPr wrap="square" rtlCol="0" anchor="t"/>
           <a:lstStyle/>
           <a:p>
             <a:pPr indent="0" marL="0">
+              <a:spcAft>
+                <a:spcPts val="400"/>
+              </a:spcAft>
               <a:buNone/>
             </a:pPr>
             <a:r>
-              <a:rPr lang="en-US" sz="800" dirty="0">
-                <a:solidFill>
-                  <a:srgbClr val="9B9690"/>
-                </a:solidFill>
-              </a:rPr>
-              <a:t>mrzocchi.com</a:t>
-            </a:r>
-            <a:endParaRPr lang="en-US" sz="800" dirty="0"/>
+              <a:rPr lang="en-US" sz="1600" b="1" dirty="0">
+                <a:solidFill>
+                  <a:srgbClr val="1B2A4A"/>
+                </a:solidFill>
+                <a:latin typeface="Calibri" pitchFamily="34" charset="0"/>
+                <a:ea typeface="Calibri" pitchFamily="34" charset="-122"/>
+                <a:cs typeface="Calibri" pitchFamily="34" charset="-120"/>
+              </a:rPr>
+              <a:t>Dividing Fractions (KFC)</a:t>
+            </a:r>
+            <a:endParaRPr lang="en-US" sz="1600" dirty="0"/>
+          </a:p>
+          <a:p>
+            <a:pPr indent="0" marL="0">
+              <a:spcAft>
+                <a:spcPts val="400"/>
+              </a:spcAft>
+              <a:buNone/>
+            </a:pPr>
+            <a:endParaRPr lang="en-US" sz="1600" dirty="0"/>
+          </a:p>
+          <a:p>
+            <a:pPr indent="0" marL="0">
+              <a:spcAft>
+                <a:spcPts val="400"/>
+              </a:spcAft>
+              <a:buNone/>
+            </a:pPr>
+            <a:r>
+              <a:rPr lang="en-US" sz="1300" dirty="0">
+                <a:solidFill>
+                  <a:srgbClr val="3D3A36"/>
+                </a:solidFill>
+                <a:latin typeface="Calibri" pitchFamily="34" charset="0"/>
+                <a:ea typeface="Calibri" pitchFamily="34" charset="-122"/>
+                <a:cs typeface="Calibri" pitchFamily="34" charset="-120"/>
+              </a:rPr>
+              <a:t>Keep the FIRST fraction as it is</a:t>
+            </a:r>
+            <a:endParaRPr lang="en-US" sz="1600" dirty="0"/>
+          </a:p>
+          <a:p>
+            <a:pPr indent="0" marL="0">
+              <a:spcAft>
+                <a:spcPts val="400"/>
+              </a:spcAft>
+              <a:buNone/>
+            </a:pPr>
+            <a:r>
+              <a:rPr lang="en-US" sz="1300" dirty="0">
+                <a:solidFill>
+                  <a:srgbClr val="3D3A36"/>
+                </a:solidFill>
+                <a:latin typeface="Calibri" pitchFamily="34" charset="0"/>
+                <a:ea typeface="Calibri" pitchFamily="34" charset="-122"/>
+                <a:cs typeface="Calibri" pitchFamily="34" charset="-120"/>
+              </a:rPr>
+              <a:t>Flip the SECOND fraction (reciprocal)</a:t>
+            </a:r>
+            <a:endParaRPr lang="en-US" sz="1600" dirty="0"/>
+          </a:p>
+          <a:p>
+            <a:pPr indent="0" marL="0">
+              <a:spcAft>
+                <a:spcPts val="400"/>
+              </a:spcAft>
+              <a:buNone/>
+            </a:pPr>
+            <a:r>
+              <a:rPr lang="en-US" sz="1300" dirty="0">
+                <a:solidFill>
+                  <a:srgbClr val="3D3A36"/>
+                </a:solidFill>
+                <a:latin typeface="Calibri" pitchFamily="34" charset="0"/>
+                <a:ea typeface="Calibri" pitchFamily="34" charset="-122"/>
+                <a:cs typeface="Calibri" pitchFamily="34" charset="-120"/>
+              </a:rPr>
+              <a:t>Change division to multiplication</a:t>
+            </a:r>
+            <a:endParaRPr lang="en-US" sz="1600" dirty="0"/>
+          </a:p>
+          <a:p>
+            <a:pPr indent="0" marL="0">
+              <a:spcAft>
+                <a:spcPts val="400"/>
+              </a:spcAft>
+              <a:buNone/>
+            </a:pPr>
+            <a:r>
+              <a:rPr lang="en-US" sz="1300" dirty="0">
+                <a:solidFill>
+                  <a:srgbClr val="3D3A36"/>
+                </a:solidFill>
+                <a:latin typeface="Calibri" pitchFamily="34" charset="0"/>
+                <a:ea typeface="Calibri" pitchFamily="34" charset="-122"/>
+                <a:cs typeface="Calibri" pitchFamily="34" charset="-120"/>
+              </a:rPr>
+              <a:t>²⁄₃ ÷ ⁴⁄₅ → ²⁄₃ × ⁵⁄₄ = ¹⁰⁄₁₂ = ⁵⁄₆</a:t>
+            </a:r>
+            <a:endParaRPr lang="en-US" sz="1600" dirty="0"/>
+          </a:p>
+          <a:p>
+            <a:pPr indent="0" marL="0">
+              <a:spcAft>
+                <a:spcPts val="400"/>
+              </a:spcAft>
+              <a:buNone/>
+            </a:pPr>
+            <a:r>
+              <a:rPr lang="en-US" sz="1300" dirty="0">
+                <a:solidFill>
+                  <a:srgbClr val="3D3A36"/>
+                </a:solidFill>
+                <a:latin typeface="Calibri" pitchFamily="34" charset="0"/>
+                <a:ea typeface="Calibri" pitchFamily="34" charset="-122"/>
+                <a:cs typeface="Calibri" pitchFamily="34" charset="-120"/>
+              </a:rPr>
+              <a:t>Then multiply as normal and simplify</a:t>
+            </a:r>
+            <a:endParaRPr lang="en-US" sz="1600" dirty="0"/>
           </a:p>
         </p:txBody>
       </p:sp>
@@ -1819,6 +2085,263 @@
 <file path=ppt/slides/slide4.xml><?xml version="1.0" encoding="utf-8"?>
 <p:sld xmlns:a="http://schemas.openxmlformats.org/drawingml/2006/main" xmlns:r="http://schemas.openxmlformats.org/officeDocument/2006/relationships" xmlns:p="http://schemas.openxmlformats.org/presentationml/2006/main">
   <p:cSld name="Slide 4">
+    <p:bg>
+      <p:bgPr>
+        <a:solidFill>
+          <a:srgbClr val="FAF8F5"/>
+        </a:solidFill>
+      </p:bgPr>
+    </p:bg>
+    <p:spTree>
+      <p:nvGrpSpPr>
+        <p:cNvPr id="1" name=""/>
+        <p:cNvGrpSpPr/>
+        <p:nvPr/>
+      </p:nvGrpSpPr>
+      <p:grpSpPr>
+        <a:xfrm>
+          <a:off x="0" y="0"/>
+          <a:ext cx="0" cy="0"/>
+          <a:chOff x="0" y="0"/>
+          <a:chExt cx="0" cy="0"/>
+        </a:xfrm>
+      </p:grpSpPr>
+      <p:sp>
+        <p:nvSpPr>
+          <p:cNvPr id="2" name="Shape 0"/>
+          <p:cNvSpPr/>
+          <p:nvPr/>
+        </p:nvSpPr>
+        <p:spPr>
+          <a:xfrm>
+            <a:off x="0" y="0"/>
+            <a:ext cx="9144000" cy="54864"/>
+          </a:xfrm>
+          <a:prstGeom prst="rect">
+            <a:avLst/>
+          </a:prstGeom>
+          <a:solidFill>
+            <a:srgbClr val="2A9D8F"/>
+          </a:solidFill>
+          <a:ln/>
+        </p:spPr>
+      </p:sp>
+      <p:sp>
+        <p:nvSpPr>
+          <p:cNvPr id="3" name="Text 1"/>
+          <p:cNvSpPr/>
+          <p:nvPr/>
+        </p:nvSpPr>
+        <p:spPr>
+          <a:xfrm>
+            <a:off x="7772400" y="4709160"/>
+            <a:ext cx="1097280" cy="320040"/>
+          </a:xfrm>
+          <a:prstGeom prst="rect">
+            <a:avLst/>
+          </a:prstGeom>
+          <a:noFill/>
+          <a:ln/>
+        </p:spPr>
+        <p:txBody>
+          <a:bodyPr wrap="square" rtlCol="0" anchor="ctr"/>
+          <a:lstStyle/>
+          <a:p>
+            <a:pPr algn="r" indent="0" marL="0">
+              <a:buNone/>
+            </a:pPr>
+            <a:r>
+              <a:rPr lang="en-US" sz="900" dirty="0">
+                <a:solidFill>
+                  <a:srgbClr val="6B6660"/>
+                </a:solidFill>
+                <a:latin typeface="Calibri" pitchFamily="34" charset="0"/>
+                <a:ea typeface="Calibri" pitchFamily="34" charset="-122"/>
+                <a:cs typeface="Calibri" pitchFamily="34" charset="-120"/>
+              </a:rPr>
+              <a:t>4 / 5</a:t>
+            </a:r>
+            <a:endParaRPr lang="en-US" sz="900" dirty="0"/>
+          </a:p>
+        </p:txBody>
+      </p:sp>
+      <p:sp>
+        <p:nvSpPr>
+          <p:cNvPr id="4" name="Text 2"/>
+          <p:cNvSpPr/>
+          <p:nvPr/>
+        </p:nvSpPr>
+        <p:spPr>
+          <a:xfrm>
+            <a:off x="457200" y="274320"/>
+            <a:ext cx="8229600" cy="640080"/>
+          </a:xfrm>
+          <a:prstGeom prst="rect">
+            <a:avLst/>
+          </a:prstGeom>
+          <a:noFill/>
+          <a:ln/>
+        </p:spPr>
+        <p:txBody>
+          <a:bodyPr wrap="square" rtlCol="0" anchor="ctr"/>
+          <a:lstStyle/>
+          <a:p>
+            <a:pPr indent="0" marL="0">
+              <a:buNone/>
+            </a:pPr>
+            <a:r>
+              <a:rPr lang="en-US" sz="2600" b="1" dirty="0">
+                <a:solidFill>
+                  <a:srgbClr val="1B2A4A"/>
+                </a:solidFill>
+                <a:latin typeface="Georgia" pitchFamily="34" charset="0"/>
+                <a:ea typeface="Georgia" pitchFamily="34" charset="-122"/>
+                <a:cs typeface="Georgia" pitchFamily="34" charset="-120"/>
+              </a:rPr>
+              <a:t>Practice Problems</a:t>
+            </a:r>
+            <a:endParaRPr lang="en-US" sz="2600" dirty="0"/>
+          </a:p>
+        </p:txBody>
+      </p:sp>
+      <p:sp>
+        <p:nvSpPr>
+          <p:cNvPr id="5" name="Text 3"/>
+          <p:cNvSpPr/>
+          <p:nvPr/>
+        </p:nvSpPr>
+        <p:spPr>
+          <a:xfrm>
+            <a:off x="457200" y="1097280"/>
+            <a:ext cx="8229600" cy="3657600"/>
+          </a:xfrm>
+          <a:prstGeom prst="rect">
+            <a:avLst/>
+          </a:prstGeom>
+          <a:noFill/>
+          <a:ln/>
+        </p:spPr>
+        <p:txBody>
+          <a:bodyPr wrap="square" rtlCol="0" anchor="t"/>
+          <a:lstStyle/>
+          <a:p>
+            <a:pPr marL="342900" indent="-342900">
+              <a:spcAft>
+                <a:spcPts val="800"/>
+              </a:spcAft>
+              <a:buSzPct val="100000"/>
+              <a:buChar char="•"/>
+            </a:pPr>
+            <a:r>
+              <a:rPr lang="en-US" sz="1400" dirty="0">
+                <a:solidFill>
+                  <a:srgbClr val="3D3A36"/>
+                </a:solidFill>
+                <a:latin typeface="Calibri" pitchFamily="34" charset="0"/>
+                <a:ea typeface="Calibri" pitchFamily="34" charset="-122"/>
+                <a:cs typeface="Calibri" pitchFamily="34" charset="-120"/>
+              </a:rPr>
+              <a:t>½ × ³⁄₇ = ³⁄₁₄</a:t>
+            </a:r>
+            <a:endParaRPr lang="en-US" sz="1400" dirty="0"/>
+          </a:p>
+          <a:p>
+            <a:pPr marL="342900" indent="-342900">
+              <a:spcAft>
+                <a:spcPts val="800"/>
+              </a:spcAft>
+              <a:buSzPct val="100000"/>
+              <a:buChar char="•"/>
+            </a:pPr>
+            <a:r>
+              <a:rPr lang="en-US" sz="1400" dirty="0">
+                <a:solidFill>
+                  <a:srgbClr val="3D3A36"/>
+                </a:solidFill>
+                <a:latin typeface="Calibri" pitchFamily="34" charset="0"/>
+                <a:ea typeface="Calibri" pitchFamily="34" charset="-122"/>
+                <a:cs typeface="Calibri" pitchFamily="34" charset="-120"/>
+              </a:rPr>
+              <a:t>⁴⁄₅ × ²⁄₃ = ⁸⁄₁₅</a:t>
+            </a:r>
+            <a:endParaRPr lang="en-US" sz="1400" dirty="0"/>
+          </a:p>
+          <a:p>
+            <a:pPr marL="342900" indent="-342900">
+              <a:spcAft>
+                <a:spcPts val="800"/>
+              </a:spcAft>
+              <a:buSzPct val="100000"/>
+              <a:buChar char="•"/>
+            </a:pPr>
+            <a:r>
+              <a:rPr lang="en-US" sz="1400" dirty="0">
+                <a:solidFill>
+                  <a:srgbClr val="3D3A36"/>
+                </a:solidFill>
+                <a:latin typeface="Calibri" pitchFamily="34" charset="0"/>
+                <a:ea typeface="Calibri" pitchFamily="34" charset="-122"/>
+                <a:cs typeface="Calibri" pitchFamily="34" charset="-120"/>
+              </a:rPr>
+              <a:t>²⁄₃ ÷ ½ = ²⁄₃ × ²⁄₁ = ⁴⁄₃ = 1¹⁄₃</a:t>
+            </a:r>
+            <a:endParaRPr lang="en-US" sz="1400" dirty="0"/>
+          </a:p>
+          <a:p>
+            <a:pPr marL="342900" indent="-342900">
+              <a:spcAft>
+                <a:spcPts val="800"/>
+              </a:spcAft>
+              <a:buSzPct val="100000"/>
+              <a:buChar char="•"/>
+            </a:pPr>
+            <a:r>
+              <a:rPr lang="en-US" sz="1400" dirty="0">
+                <a:solidFill>
+                  <a:srgbClr val="3D3A36"/>
+                </a:solidFill>
+                <a:latin typeface="Calibri" pitchFamily="34" charset="0"/>
+                <a:ea typeface="Calibri" pitchFamily="34" charset="-122"/>
+                <a:cs typeface="Calibri" pitchFamily="34" charset="-120"/>
+              </a:rPr>
+              <a:t>³⁄₄ ÷ ³⁄₈ = ³⁄₄ × ⁸⁄₃ = ²⁴⁄₁₂ = 2</a:t>
+            </a:r>
+            <a:endParaRPr lang="en-US" sz="1400" dirty="0"/>
+          </a:p>
+          <a:p>
+            <a:pPr marL="342900" indent="-342900">
+              <a:spcAft>
+                <a:spcPts val="800"/>
+              </a:spcAft>
+              <a:buSzPct val="100000"/>
+              <a:buChar char="•"/>
+            </a:pPr>
+            <a:r>
+              <a:rPr lang="en-US" sz="1400" dirty="0">
+                <a:solidFill>
+                  <a:srgbClr val="3D3A36"/>
+                </a:solidFill>
+                <a:latin typeface="Calibri" pitchFamily="34" charset="0"/>
+                <a:ea typeface="Calibri" pitchFamily="34" charset="-122"/>
+                <a:cs typeface="Calibri" pitchFamily="34" charset="-120"/>
+              </a:rPr>
+              <a:t>1½ × 2²⁄₃ = ³⁄₂ × ⁸⁄₃ = ²⁴⁄₆ = 4</a:t>
+            </a:r>
+            <a:endParaRPr lang="en-US" sz="1400" dirty="0"/>
+          </a:p>
+        </p:txBody>
+      </p:sp>
+    </p:spTree>
+  </p:cSld>
+  <p:clrMapOvr>
+    <a:masterClrMapping/>
+  </p:clrMapOvr>
+</p:sld>
+</file>
+
+<file path=ppt/slides/slide5.xml><?xml version="1.0" encoding="utf-8"?>
+<p:sld xmlns:a="http://schemas.openxmlformats.org/drawingml/2006/main" xmlns:r="http://schemas.openxmlformats.org/officeDocument/2006/relationships" xmlns:p="http://schemas.openxmlformats.org/presentationml/2006/main">
+  <p:cSld name="Slide 5">
     <p:bg>
       <p:bgPr>
         <a:solidFill>
@@ -1849,13 +2372,13 @@
         <p:spPr>
           <a:xfrm>
             <a:off x="0" y="0"/>
-            <a:ext cx="9144000" cy="54864"/>
-          </a:xfrm>
-          <a:prstGeom prst="rect">
-            <a:avLst/>
-          </a:prstGeom>
-          <a:solidFill>
-            <a:srgbClr val="2A9D8F"/>
+            <a:ext cx="109728" cy="5143500"/>
+          </a:xfrm>
+          <a:prstGeom prst="rect">
+            <a:avLst/>
+          </a:prstGeom>
+          <a:solidFill>
+            <a:srgbClr val="E9C46A"/>
           </a:solidFill>
           <a:ln/>
         </p:spPr>
@@ -1868,8 +2391,8 @@
         </p:nvSpPr>
         <p:spPr>
           <a:xfrm>
-            <a:off x="548640" y="457200"/>
-            <a:ext cx="8046720" cy="640080"/>
+            <a:off x="731520" y="457200"/>
+            <a:ext cx="7772400" cy="731520"/>
           </a:xfrm>
           <a:prstGeom prst="rect">
             <a:avLst/>
@@ -1885,7 +2408,7 @@
               <a:buNone/>
             </a:pPr>
             <a:r>
-              <a:rPr lang="en-US" sz="2800" b="1" dirty="0">
+              <a:rPr lang="en-US" sz="3200" b="1" dirty="0">
                 <a:solidFill>
                   <a:srgbClr val="FFFFFF"/>
                 </a:solidFill>
@@ -1895,7 +2418,7 @@
               </a:rPr>
               <a:t>Key Takeaways</a:t>
             </a:r>
-            <a:endParaRPr lang="en-US" sz="2800" dirty="0"/>
+            <a:endParaRPr lang="en-US" sz="3200" dirty="0"/>
           </a:p>
         </p:txBody>
       </p:sp>
@@ -1907,8 +2430,8 @@
         </p:nvSpPr>
         <p:spPr>
           <a:xfrm>
-            <a:off x="731520" y="1371600"/>
-            <a:ext cx="7680960" cy="3200400"/>
+            <a:off x="731520" y="1463040"/>
+            <a:ext cx="7772400" cy="3200400"/>
           </a:xfrm>
           <a:prstGeom prst="rect">
             <a:avLst/>
@@ -1928,7 +2451,7 @@
               <a:buChar char="•"/>
             </a:pPr>
             <a:r>
-              <a:rPr lang="en-US" sz="1600" dirty="0">
+              <a:rPr lang="en-US" sz="1500" dirty="0">
                 <a:solidFill>
                   <a:srgbClr val="CADCFC"/>
                 </a:solidFill>
@@ -1936,9 +2459,9 @@
                 <a:ea typeface="Calibri" pitchFamily="34" charset="-122"/>
                 <a:cs typeface="Calibri" pitchFamily="34" charset="-120"/>
               </a:rPr>
-              <a:t>Multiply: top × top, bottom × bottom</a:t>
-            </a:r>
-            <a:endParaRPr lang="en-US" sz="1600" dirty="0"/>
+              <a:t>Multiply: numerator × numerator, denominator × denominator</a:t>
+            </a:r>
+            <a:endParaRPr lang="en-US" sz="1500" dirty="0"/>
           </a:p>
           <a:p>
             <a:pPr marL="342900" indent="-342900">
@@ -1949,7 +2472,7 @@
               <a:buChar char="•"/>
             </a:pPr>
             <a:r>
-              <a:rPr lang="en-US" sz="1600" dirty="0">
+              <a:rPr lang="en-US" sz="1500" dirty="0">
                 <a:solidFill>
                   <a:srgbClr val="CADCFC"/>
                 </a:solidFill>
@@ -1957,9 +2480,9 @@
                 <a:ea typeface="Calibri" pitchFamily="34" charset="-122"/>
                 <a:cs typeface="Calibri" pitchFamily="34" charset="-120"/>
               </a:rPr>
-              <a:t>Divide: KFC (Keep, Flip, Change) then multiply</a:t>
-            </a:r>
-            <a:endParaRPr lang="en-US" sz="1600" dirty="0"/>
+              <a:t>Cross-cancel before multiplying to simplify</a:t>
+            </a:r>
+            <a:endParaRPr lang="en-US" sz="1500" dirty="0"/>
           </a:p>
           <a:p>
             <a:pPr marL="342900" indent="-342900">
@@ -1970,7 +2493,7 @@
               <a:buChar char="•"/>
             </a:pPr>
             <a:r>
-              <a:rPr lang="en-US" sz="1600" dirty="0">
+              <a:rPr lang="en-US" sz="1500" dirty="0">
                 <a:solidFill>
                   <a:srgbClr val="CADCFC"/>
                 </a:solidFill>
@@ -1978,9 +2501,9 @@
                 <a:ea typeface="Calibri" pitchFamily="34" charset="-122"/>
                 <a:cs typeface="Calibri" pitchFamily="34" charset="-120"/>
               </a:rPr>
-              <a:t>'Of' means multiply</a:t>
-            </a:r>
-            <a:endParaRPr lang="en-US" sz="1600" dirty="0"/>
+              <a:t>Divide: Keep, Flip, Change (KFC) — then multiply</a:t>
+            </a:r>
+            <a:endParaRPr lang="en-US" sz="1500" dirty="0"/>
           </a:p>
           <a:p>
             <a:pPr marL="342900" indent="-342900">
@@ -1991,7 +2514,7 @@
               <a:buChar char="•"/>
             </a:pPr>
             <a:r>
-              <a:rPr lang="en-US" sz="1600" dirty="0">
+              <a:rPr lang="en-US" sz="1500" dirty="0">
                 <a:solidFill>
                   <a:srgbClr val="CADCFC"/>
                 </a:solidFill>
@@ -1999,9 +2522,30 @@
                 <a:ea typeface="Calibri" pitchFamily="34" charset="-122"/>
                 <a:cs typeface="Calibri" pitchFamily="34" charset="-120"/>
               </a:rPr>
-              <a:t>Always simplify — cancel common factors before or after</a:t>
-            </a:r>
-            <a:endParaRPr lang="en-US" sz="1600" dirty="0"/>
+              <a:t>Convert mixed numbers to improper fractions first</a:t>
+            </a:r>
+            <a:endParaRPr lang="en-US" sz="1500" dirty="0"/>
+          </a:p>
+          <a:p>
+            <a:pPr marL="342900" indent="-342900">
+              <a:spcAft>
+                <a:spcPts val="1000"/>
+              </a:spcAft>
+              <a:buSzPct val="100000"/>
+              <a:buChar char="•"/>
+            </a:pPr>
+            <a:r>
+              <a:rPr lang="en-US" sz="1500" dirty="0">
+                <a:solidFill>
+                  <a:srgbClr val="CADCFC"/>
+                </a:solidFill>
+                <a:latin typeface="Calibri" pitchFamily="34" charset="0"/>
+                <a:ea typeface="Calibri" pitchFamily="34" charset="-122"/>
+                <a:cs typeface="Calibri" pitchFamily="34" charset="-120"/>
+              </a:rPr>
+              <a:t>Always simplify your final answer</a:t>
+            </a:r>
+            <a:endParaRPr lang="en-US" sz="1500" dirty="0"/>
           </a:p>
         </p:txBody>
       </p:sp>
@@ -2013,8 +2557,8 @@
         </p:nvSpPr>
         <p:spPr>
           <a:xfrm>
-            <a:off x="548640" y="4572000"/>
-            <a:ext cx="3657600" cy="274320"/>
+            <a:off x="731520" y="4572000"/>
+            <a:ext cx="7772400" cy="365760"/>
           </a:xfrm>
           <a:prstGeom prst="rect">
             <a:avLst/>
@@ -2030,14 +2574,17 @@
               <a:buNone/>
             </a:pPr>
             <a:r>
-              <a:rPr lang="en-US" sz="1000" dirty="0">
-                <a:solidFill>
-                  <a:srgbClr val="6B6660"/>
-                </a:solidFill>
+              <a:rPr lang="en-US" sz="1100" dirty="0">
+                <a:solidFill>
+                  <a:srgbClr val="E9C46A"/>
+                </a:solidFill>
+                <a:latin typeface="Calibri" pitchFamily="34" charset="0"/>
+                <a:ea typeface="Calibri" pitchFamily="34" charset="-122"/>
+                <a:cs typeface="Calibri" pitchFamily="34" charset="-120"/>
               </a:rPr>
               <a:t>mrzocchi.com</a:t>
             </a:r>
-            <a:endParaRPr lang="en-US" sz="1000" dirty="0"/>
+            <a:endParaRPr lang="en-US" sz="1100" dirty="0"/>
           </a:p>
         </p:txBody>
       </p:sp>

--- a/static/ppts/G6_Math_T2_Multiply_Divide_Fractions.pptx
+++ b/static/ppts/G6_Math_T2_Multiply_Divide_Fractions.pptx
@@ -10,9 +10,11 @@
     <p:sldId id="258" r:id="rId4"/>
     <p:sldId id="259" r:id="rId5"/>
     <p:sldId id="260" r:id="rId6"/>
+    <p:sldId id="261" r:id="rId7"/>
+    <p:sldId id="262" r:id="rId8"/>
   </p:sldIdLst>
   <p:notesMasterIdLst>
-    <p:notesMasterId r:id="rId7"/>
+    <p:notesMasterId r:id="rId9"/>
   </p:notesMasterIdLst>
   <p:sldSz cx="9144000" cy="5143500"/>
   <p:notesSz cx="5143500" cy="9144000"/>
@@ -900,6 +902,182 @@
 </p:notes>
 </file>
 
+<file path=ppt/notesSlides/notesSlide6.xml><?xml version="1.0" encoding="utf-8"?>
+<p:notes xmlns:a="http://schemas.openxmlformats.org/drawingml/2006/main" xmlns:r="http://schemas.openxmlformats.org/officeDocument/2006/relationships" xmlns:p="http://schemas.openxmlformats.org/presentationml/2006/main">
+  <p:cSld>
+    <p:spTree>
+      <p:nvGrpSpPr>
+        <p:cNvPr id="1" name=""/>
+        <p:cNvGrpSpPr/>
+        <p:nvPr/>
+      </p:nvGrpSpPr>
+      <p:grpSpPr>
+        <a:xfrm>
+          <a:off x="0" y="0"/>
+          <a:ext cx="0" cy="0"/>
+          <a:chOff x="0" y="0"/>
+          <a:chExt cx="0" cy="0"/>
+        </a:xfrm>
+      </p:grpSpPr>
+      <p:sp>
+        <p:nvSpPr>
+          <p:cNvPr id="2" name="Slide Image Placeholder 1"/>
+          <p:cNvSpPr>
+            <a:spLocks noGrp="1" noRot="1" noChangeAspect="1"/>
+          </p:cNvSpPr>
+          <p:nvPr>
+            <p:ph type="sldImg"/>
+          </p:nvPr>
+        </p:nvSpPr>
+        <p:spPr/>
+      </p:sp>
+      <p:sp>
+        <p:nvSpPr>
+          <p:cNvPr id="3" name="Notes Placeholder 2"/>
+          <p:cNvSpPr>
+            <a:spLocks noGrp="1"/>
+          </p:cNvSpPr>
+          <p:nvPr>
+            <p:ph type="body" idx="1"/>
+          </p:nvPr>
+        </p:nvSpPr>
+        <p:spPr/>
+        <p:txBody>
+          <a:bodyPr/>
+          <a:lstStyle/>
+          <a:p>
+            <a:r>
+              <a:rPr lang="en-US" dirty="0"/>
+              <a:t/>
+            </a:r>
+            <a:endParaRPr lang="en-US" dirty="0"/>
+          </a:p>
+        </p:txBody>
+      </p:sp>
+      <p:sp>
+        <p:nvSpPr>
+          <p:cNvPr id="4" name="Slide Number Placeholder 3"/>
+          <p:cNvSpPr>
+            <a:spLocks noGrp="1"/>
+          </p:cNvSpPr>
+          <p:nvPr>
+            <p:ph type="sldNum" sz="quarter" idx="10"/>
+          </p:nvPr>
+        </p:nvSpPr>
+        <p:spPr/>
+        <p:txBody>
+          <a:bodyPr/>
+          <a:lstStyle/>
+          <a:p>
+            <a:fld id="{F7021451-1387-4CA6-816F-3879F97B5CBC}" type="slidenum">
+              <a:rPr lang="en-US"/>
+              <a:t>6</a:t>
+            </a:fld>
+            <a:endParaRPr lang="en-US"/>
+          </a:p>
+        </p:txBody>
+      </p:sp>
+    </p:spTree>
+    <p:extLst>
+      <p:ext uri="{BB962C8B-B14F-4D97-AF65-F5344CB8AC3E}">
+        <p14:creationId xmlns:p14="http://schemas.microsoft.com/office/powerpoint/2010/main" val="1024086991"/>
+      </p:ext>
+    </p:extLst>
+  </p:cSld>
+  <p:clrMapOvr>
+    <a:masterClrMapping/>
+  </p:clrMapOvr>
+</p:notes>
+</file>
+
+<file path=ppt/notesSlides/notesSlide7.xml><?xml version="1.0" encoding="utf-8"?>
+<p:notes xmlns:a="http://schemas.openxmlformats.org/drawingml/2006/main" xmlns:r="http://schemas.openxmlformats.org/officeDocument/2006/relationships" xmlns:p="http://schemas.openxmlformats.org/presentationml/2006/main">
+  <p:cSld>
+    <p:spTree>
+      <p:nvGrpSpPr>
+        <p:cNvPr id="1" name=""/>
+        <p:cNvGrpSpPr/>
+        <p:nvPr/>
+      </p:nvGrpSpPr>
+      <p:grpSpPr>
+        <a:xfrm>
+          <a:off x="0" y="0"/>
+          <a:ext cx="0" cy="0"/>
+          <a:chOff x="0" y="0"/>
+          <a:chExt cx="0" cy="0"/>
+        </a:xfrm>
+      </p:grpSpPr>
+      <p:sp>
+        <p:nvSpPr>
+          <p:cNvPr id="2" name="Slide Image Placeholder 1"/>
+          <p:cNvSpPr>
+            <a:spLocks noGrp="1" noRot="1" noChangeAspect="1"/>
+          </p:cNvSpPr>
+          <p:nvPr>
+            <p:ph type="sldImg"/>
+          </p:nvPr>
+        </p:nvSpPr>
+        <p:spPr/>
+      </p:sp>
+      <p:sp>
+        <p:nvSpPr>
+          <p:cNvPr id="3" name="Notes Placeholder 2"/>
+          <p:cNvSpPr>
+            <a:spLocks noGrp="1"/>
+          </p:cNvSpPr>
+          <p:nvPr>
+            <p:ph type="body" idx="1"/>
+          </p:nvPr>
+        </p:nvSpPr>
+        <p:spPr/>
+        <p:txBody>
+          <a:bodyPr/>
+          <a:lstStyle/>
+          <a:p>
+            <a:r>
+              <a:rPr lang="en-US" dirty="0"/>
+              <a:t/>
+            </a:r>
+            <a:endParaRPr lang="en-US" dirty="0"/>
+          </a:p>
+        </p:txBody>
+      </p:sp>
+      <p:sp>
+        <p:nvSpPr>
+          <p:cNvPr id="4" name="Slide Number Placeholder 3"/>
+          <p:cNvSpPr>
+            <a:spLocks noGrp="1"/>
+          </p:cNvSpPr>
+          <p:nvPr>
+            <p:ph type="sldNum" sz="quarter" idx="10"/>
+          </p:nvPr>
+        </p:nvSpPr>
+        <p:spPr/>
+        <p:txBody>
+          <a:bodyPr/>
+          <a:lstStyle/>
+          <a:p>
+            <a:fld id="{F7021451-1387-4CA6-816F-3879F97B5CBC}" type="slidenum">
+              <a:rPr lang="en-US"/>
+              <a:t>7</a:t>
+            </a:fld>
+            <a:endParaRPr lang="en-US"/>
+          </a:p>
+        </p:txBody>
+      </p:sp>
+    </p:spTree>
+    <p:extLst>
+      <p:ext uri="{BB962C8B-B14F-4D97-AF65-F5344CB8AC3E}">
+        <p14:creationId xmlns:p14="http://schemas.microsoft.com/office/powerpoint/2010/main" val="1024086991"/>
+      </p:ext>
+    </p:extLst>
+  </p:cSld>
+  <p:clrMapOvr>
+    <a:masterClrMapping/>
+  </p:clrMapOvr>
+</p:notes>
+</file>
+
 <file path=ppt/slideLayouts/slideLayout1.xml><?xml version="1.0" encoding="utf-8"?>
 <p:sldLayout xmlns:a="http://schemas.openxmlformats.org/drawingml/2006/main" xmlns:r="http://schemas.openxmlformats.org/officeDocument/2006/relationships" xmlns:p="http://schemas.openxmlformats.org/presentationml/2006/main" preserve="1">
   <p:cSld name="DEFAULT">
@@ -1210,13 +1388,6 @@
 <file path=ppt/slides/slide1.xml><?xml version="1.0" encoding="utf-8"?>
 <p:sld xmlns:a="http://schemas.openxmlformats.org/drawingml/2006/main" xmlns:r="http://schemas.openxmlformats.org/officeDocument/2006/relationships" xmlns:p="http://schemas.openxmlformats.org/presentationml/2006/main">
   <p:cSld name="Slide 1">
-    <p:bg>
-      <p:bgPr>
-        <a:solidFill>
-          <a:srgbClr val="1B2A4A"/>
-        </a:solidFill>
-      </p:bgPr>
-    </p:bg>
     <p:spTree>
       <p:nvGrpSpPr>
         <p:cNvPr id="1" name=""/>
@@ -1240,7 +1411,27 @@
         <p:spPr>
           <a:xfrm>
             <a:off x="0" y="0"/>
-            <a:ext cx="109728" cy="5143500"/>
+            <a:ext cx="9144000" cy="5143500"/>
+          </a:xfrm>
+          <a:prstGeom prst="rect">
+            <a:avLst/>
+          </a:prstGeom>
+          <a:solidFill>
+            <a:srgbClr val="1B2A4A"/>
+          </a:solidFill>
+          <a:ln/>
+        </p:spPr>
+      </p:sp>
+      <p:sp>
+        <p:nvSpPr>
+          <p:cNvPr id="3" name="Shape 1"/>
+          <p:cNvSpPr/>
+          <p:nvPr/>
+        </p:nvSpPr>
+        <p:spPr>
+          <a:xfrm>
+            <a:off x="0" y="4777740"/>
+            <a:ext cx="9144000" cy="365760"/>
           </a:xfrm>
           <a:prstGeom prst="rect">
             <a:avLst/>
@@ -1253,14 +1444,36 @@
       </p:sp>
       <p:sp>
         <p:nvSpPr>
-          <p:cNvPr id="3" name="Text 1"/>
-          <p:cNvSpPr/>
-          <p:nvPr/>
-        </p:nvSpPr>
-        <p:spPr>
-          <a:xfrm>
-            <a:off x="731520" y="1097280"/>
-            <a:ext cx="7772400" cy="1371600"/>
+          <p:cNvPr id="4" name="Shape 2"/>
+          <p:cNvSpPr/>
+          <p:nvPr/>
+        </p:nvSpPr>
+        <p:spPr>
+          <a:xfrm>
+            <a:off x="6858000" y="-1371600"/>
+            <a:ext cx="4572000" cy="4572000"/>
+          </a:xfrm>
+          <a:prstGeom prst="ellipse">
+            <a:avLst/>
+          </a:prstGeom>
+          <a:solidFill>
+            <a:srgbClr val="2A9D8F">
+              <a:alpha val="12000"/>
+            </a:srgbClr>
+          </a:solidFill>
+          <a:ln/>
+        </p:spPr>
+      </p:sp>
+      <p:sp>
+        <p:nvSpPr>
+          <p:cNvPr id="5" name="Text 3"/>
+          <p:cNvSpPr/>
+          <p:nvPr/>
+        </p:nvSpPr>
+        <p:spPr>
+          <a:xfrm>
+            <a:off x="731520" y="914400"/>
+            <a:ext cx="7680960" cy="457200"/>
           </a:xfrm>
           <a:prstGeom prst="rect">
             <a:avLst/>
@@ -1276,7 +1489,46 @@
               <a:buNone/>
             </a:pPr>
             <a:r>
-              <a:rPr lang="en-US" sz="4000" b="1" dirty="0">
+              <a:rPr lang="en-US" sz="1300" b="1" spc="500" kern="0" dirty="0">
+                <a:solidFill>
+                  <a:srgbClr val="2A9D8F"/>
+                </a:solidFill>
+                <a:latin typeface="Calibri" pitchFamily="34" charset="0"/>
+                <a:ea typeface="Calibri" pitchFamily="34" charset="-122"/>
+                <a:cs typeface="Calibri" pitchFamily="34" charset="-120"/>
+              </a:rPr>
+              <a:t>GRADE 6 MATHEMATICS</a:t>
+            </a:r>
+            <a:endParaRPr lang="en-US" sz="1300" dirty="0"/>
+          </a:p>
+        </p:txBody>
+      </p:sp>
+      <p:sp>
+        <p:nvSpPr>
+          <p:cNvPr id="6" name="Text 4"/>
+          <p:cNvSpPr/>
+          <p:nvPr/>
+        </p:nvSpPr>
+        <p:spPr>
+          <a:xfrm>
+            <a:off x="731520" y="1463040"/>
+            <a:ext cx="6858000" cy="1645920"/>
+          </a:xfrm>
+          <a:prstGeom prst="rect">
+            <a:avLst/>
+          </a:prstGeom>
+          <a:noFill/>
+          <a:ln/>
+        </p:spPr>
+        <p:txBody>
+          <a:bodyPr wrap="square" rtlCol="0" anchor="t"/>
+          <a:lstStyle/>
+          <a:p>
+            <a:pPr indent="0" marL="0">
+              <a:buNone/>
+            </a:pPr>
+            <a:r>
+              <a:rPr lang="en-US" sz="3800" b="1" dirty="0">
                 <a:solidFill>
                   <a:srgbClr val="FFFFFF"/>
                 </a:solidFill>
@@ -1284,46 +1536,63 @@
                 <a:ea typeface="Georgia" pitchFamily="34" charset="-122"/>
                 <a:cs typeface="Georgia" pitchFamily="34" charset="-120"/>
               </a:rPr>
-              <a:t>Multiplying &amp; Dividing Fractions</a:t>
-            </a:r>
-            <a:endParaRPr lang="en-US" sz="4000" dirty="0"/>
-          </a:p>
-        </p:txBody>
-      </p:sp>
-      <p:sp>
-        <p:nvSpPr>
-          <p:cNvPr id="4" name="Text 2"/>
-          <p:cNvSpPr/>
-          <p:nvPr/>
-        </p:nvSpPr>
-        <p:spPr>
-          <a:xfrm>
-            <a:off x="731520" y="2560320"/>
-            <a:ext cx="7772400" cy="548640"/>
-          </a:xfrm>
-          <a:prstGeom prst="rect">
-            <a:avLst/>
-          </a:prstGeom>
-          <a:noFill/>
-          <a:ln/>
-        </p:spPr>
-        <p:txBody>
-          <a:bodyPr wrap="square" rtlCol="0" anchor="ctr"/>
-          <a:lstStyle/>
+              <a:t>Multiplying &amp; Dividing</a:t>
+            </a:r>
+            <a:endParaRPr lang="en-US" sz="3800" dirty="0"/>
+          </a:p>
           <a:p>
             <a:pPr indent="0" marL="0">
               <a:buNone/>
             </a:pPr>
             <a:r>
-              <a:rPr lang="en-US" sz="1600" dirty="0">
-                <a:solidFill>
-                  <a:srgbClr val="E9C46A"/>
+              <a:rPr lang="en-US" sz="3800" b="1" dirty="0">
+                <a:solidFill>
+                  <a:srgbClr val="FFFFFF"/>
+                </a:solidFill>
+                <a:latin typeface="Georgia" pitchFamily="34" charset="0"/>
+                <a:ea typeface="Georgia" pitchFamily="34" charset="-122"/>
+                <a:cs typeface="Georgia" pitchFamily="34" charset="-120"/>
+              </a:rPr>
+              <a:t>Fractions</a:t>
+            </a:r>
+            <a:endParaRPr lang="en-US" sz="3800" dirty="0"/>
+          </a:p>
+        </p:txBody>
+      </p:sp>
+      <p:sp>
+        <p:nvSpPr>
+          <p:cNvPr id="7" name="Text 5"/>
+          <p:cNvSpPr/>
+          <p:nvPr/>
+        </p:nvSpPr>
+        <p:spPr>
+          <a:xfrm>
+            <a:off x="731520" y="3200400"/>
+            <a:ext cx="6400800" cy="548640"/>
+          </a:xfrm>
+          <a:prstGeom prst="rect">
+            <a:avLst/>
+          </a:prstGeom>
+          <a:noFill/>
+          <a:ln/>
+        </p:spPr>
+        <p:txBody>
+          <a:bodyPr wrap="square" rtlCol="0" anchor="ctr"/>
+          <a:lstStyle/>
+          <a:p>
+            <a:pPr indent="0" marL="0">
+              <a:buNone/>
+            </a:pPr>
+            <a:r>
+              <a:rPr lang="en-US" sz="1600" i="1" dirty="0">
+                <a:solidFill>
+                  <a:srgbClr val="9B9690"/>
                 </a:solidFill>
                 <a:latin typeface="Calibri" pitchFamily="34" charset="0"/>
                 <a:ea typeface="Calibri" pitchFamily="34" charset="-122"/>
                 <a:cs typeface="Calibri" pitchFamily="34" charset="-120"/>
               </a:rPr>
-              <a:t>Grade 6 Mathematics · Mr Zocchi</a:t>
+              <a:t>Fraction operations made simple</a:t>
             </a:r>
             <a:endParaRPr lang="en-US" sz="1600" dirty="0"/>
           </a:p>
@@ -1331,36 +1600,14 @@
       </p:sp>
       <p:sp>
         <p:nvSpPr>
-          <p:cNvPr id="5" name="Shape 3"/>
-          <p:cNvSpPr/>
-          <p:nvPr/>
-        </p:nvSpPr>
-        <p:spPr>
-          <a:xfrm>
-            <a:off x="731520" y="3474720"/>
-            <a:ext cx="2011680" cy="411480"/>
-          </a:xfrm>
-          <a:prstGeom prst="roundRect">
-            <a:avLst>
-              <a:gd name="adj" fmla="val 17778"/>
-            </a:avLst>
-          </a:prstGeom>
-          <a:solidFill>
-            <a:srgbClr val="2A9D8F"/>
-          </a:solidFill>
-          <a:ln/>
-        </p:spPr>
-      </p:sp>
-      <p:sp>
-        <p:nvSpPr>
-          <p:cNvPr id="6" name="Text 4"/>
-          <p:cNvSpPr/>
-          <p:nvPr/>
-        </p:nvSpPr>
-        <p:spPr>
-          <a:xfrm>
-            <a:off x="731520" y="3474720"/>
-            <a:ext cx="2011680" cy="411480"/>
+          <p:cNvPr id="8" name="Text 6"/>
+          <p:cNvSpPr/>
+          <p:nvPr/>
+        </p:nvSpPr>
+        <p:spPr>
+          <a:xfrm>
+            <a:off x="731520" y="4297680"/>
+            <a:ext cx="2743200" cy="365760"/>
           </a:xfrm>
           <a:prstGeom prst="rect">
             <a:avLst/>
@@ -1372,21 +1619,21 @@
           <a:bodyPr wrap="square" rtlCol="0" anchor="ctr"/>
           <a:lstStyle/>
           <a:p>
-            <a:pPr algn="ctr" indent="0" marL="0">
+            <a:pPr indent="0" marL="0">
               <a:buNone/>
             </a:pPr>
             <a:r>
-              <a:rPr lang="en-US" sz="1200" b="1" dirty="0">
-                <a:solidFill>
-                  <a:srgbClr val="FFFFFF"/>
+              <a:rPr lang="en-US" sz="1100" dirty="0">
+                <a:solidFill>
+                  <a:srgbClr val="9B9690"/>
                 </a:solidFill>
                 <a:latin typeface="Calibri" pitchFamily="34" charset="0"/>
                 <a:ea typeface="Calibri" pitchFamily="34" charset="-122"/>
                 <a:cs typeface="Calibri" pitchFamily="34" charset="-120"/>
               </a:rPr>
-              <a:t>Term 2 · Fractions &amp; Decimals</a:t>
-            </a:r>
-            <a:endParaRPr lang="en-US" sz="1200" dirty="0"/>
+              <a:t>mrzocchi.com</a:t>
+            </a:r>
+            <a:endParaRPr lang="en-US" sz="1100" dirty="0"/>
           </a:p>
         </p:txBody>
       </p:sp>
@@ -1431,7 +1678,47 @@
         <p:spPr>
           <a:xfrm>
             <a:off x="0" y="0"/>
-            <a:ext cx="9144000" cy="54864"/>
+            <a:ext cx="9144000" cy="822960"/>
+          </a:xfrm>
+          <a:prstGeom prst="rect">
+            <a:avLst/>
+          </a:prstGeom>
+          <a:solidFill>
+            <a:srgbClr val="FFFFFF"/>
+          </a:solidFill>
+          <a:ln/>
+        </p:spPr>
+      </p:sp>
+      <p:sp>
+        <p:nvSpPr>
+          <p:cNvPr id="3" name="Shape 1"/>
+          <p:cNvSpPr/>
+          <p:nvPr/>
+        </p:nvSpPr>
+        <p:spPr>
+          <a:xfrm>
+            <a:off x="0" y="804672"/>
+            <a:ext cx="9144000" cy="27432"/>
+          </a:xfrm>
+          <a:prstGeom prst="rect">
+            <a:avLst/>
+          </a:prstGeom>
+          <a:solidFill>
+            <a:srgbClr val="E5E2DC"/>
+          </a:solidFill>
+          <a:ln/>
+        </p:spPr>
+      </p:sp>
+      <p:sp>
+        <p:nvSpPr>
+          <p:cNvPr id="4" name="Shape 2"/>
+          <p:cNvSpPr/>
+          <p:nvPr/>
+        </p:nvSpPr>
+        <p:spPr>
+          <a:xfrm>
+            <a:off x="548640" y="201168"/>
+            <a:ext cx="54864" cy="420624"/>
           </a:xfrm>
           <a:prstGeom prst="rect">
             <a:avLst/>
@@ -1444,14 +1731,14 @@
       </p:sp>
       <p:sp>
         <p:nvSpPr>
-          <p:cNvPr id="3" name="Text 1"/>
-          <p:cNvSpPr/>
-          <p:nvPr/>
-        </p:nvSpPr>
-        <p:spPr>
-          <a:xfrm>
-            <a:off x="7772400" y="4709160"/>
-            <a:ext cx="1097280" cy="320040"/>
+          <p:cNvPr id="5" name="Text 3"/>
+          <p:cNvSpPr/>
+          <p:nvPr/>
+        </p:nvSpPr>
+        <p:spPr>
+          <a:xfrm>
+            <a:off x="777240" y="137160"/>
+            <a:ext cx="7772400" cy="548640"/>
           </a:xfrm>
           <a:prstGeom prst="rect">
             <a:avLst/>
@@ -1460,37 +1747,37 @@
           <a:ln/>
         </p:spPr>
         <p:txBody>
-          <a:bodyPr wrap="square" rtlCol="0" anchor="ctr"/>
-          <a:lstStyle/>
-          <a:p>
-            <a:pPr algn="r" indent="0" marL="0">
+          <a:bodyPr wrap="square" lIns="0" tIns="0" rIns="0" bIns="0" rtlCol="0" anchor="ctr"/>
+          <a:lstStyle/>
+          <a:p>
+            <a:pPr indent="0" marL="0">
               <a:buNone/>
             </a:pPr>
             <a:r>
-              <a:rPr lang="en-US" sz="900" dirty="0">
-                <a:solidFill>
-                  <a:srgbClr val="6B6660"/>
-                </a:solidFill>
-                <a:latin typeface="Calibri" pitchFamily="34" charset="0"/>
-                <a:ea typeface="Calibri" pitchFamily="34" charset="-122"/>
-                <a:cs typeface="Calibri" pitchFamily="34" charset="-120"/>
-              </a:rPr>
-              <a:t>2 / 5</a:t>
-            </a:r>
-            <a:endParaRPr lang="en-US" sz="900" dirty="0"/>
-          </a:p>
-        </p:txBody>
-      </p:sp>
-      <p:sp>
-        <p:nvSpPr>
-          <p:cNvPr id="4" name="Shape 2"/>
-          <p:cNvSpPr/>
-          <p:nvPr/>
-        </p:nvSpPr>
-        <p:spPr>
-          <a:xfrm>
-            <a:off x="1371600" y="914400"/>
-            <a:ext cx="6400800" cy="3200400"/>
+              <a:rPr lang="en-US" sz="2000" b="1" dirty="0">
+                <a:solidFill>
+                  <a:srgbClr val="1B2A4A"/>
+                </a:solidFill>
+                <a:latin typeface="Georgia" pitchFamily="34" charset="0"/>
+                <a:ea typeface="Georgia" pitchFamily="34" charset="-122"/>
+                <a:cs typeface="Georgia" pitchFamily="34" charset="-120"/>
+              </a:rPr>
+              <a:t>Key Vocabulary</a:t>
+            </a:r>
+            <a:endParaRPr lang="en-US" sz="2000" dirty="0"/>
+          </a:p>
+        </p:txBody>
+      </p:sp>
+      <p:sp>
+        <p:nvSpPr>
+          <p:cNvPr id="6" name="Shape 4"/>
+          <p:cNvSpPr/>
+          <p:nvPr/>
+        </p:nvSpPr>
+        <p:spPr>
+          <a:xfrm>
+            <a:off x="731520" y="1051560"/>
+            <a:ext cx="3657600" cy="658368"/>
           </a:xfrm>
           <a:prstGeom prst="rect">
             <a:avLst/>
@@ -1498,12 +1785,7 @@
           <a:solidFill>
             <a:srgbClr val="FFFFFF"/>
           </a:solidFill>
-          <a:ln w="12700">
-            <a:solidFill>
-              <a:srgbClr val="E5E2DC"/>
-            </a:solidFill>
-            <a:prstDash val="solid"/>
-          </a:ln>
+          <a:ln/>
           <a:effectLst>
             <a:outerShdw sx="100000" sy="100000" kx="0" ky="0" algn="bl" rotWithShape="0" blurRad="50800" dist="25400" dir="8100000">
               <a:srgbClr val="000000">
@@ -1515,14 +1797,14 @@
       </p:sp>
       <p:sp>
         <p:nvSpPr>
-          <p:cNvPr id="5" name="Shape 3"/>
-          <p:cNvSpPr/>
-          <p:nvPr/>
-        </p:nvSpPr>
-        <p:spPr>
-          <a:xfrm>
-            <a:off x="1371600" y="914400"/>
-            <a:ext cx="91440" cy="3200400"/>
+          <p:cNvPr id="7" name="Shape 5"/>
+          <p:cNvSpPr/>
+          <p:nvPr/>
+        </p:nvSpPr>
+        <p:spPr>
+          <a:xfrm>
+            <a:off x="731520" y="1051560"/>
+            <a:ext cx="54864" cy="658368"/>
           </a:xfrm>
           <a:prstGeom prst="rect">
             <a:avLst/>
@@ -1535,14 +1817,14 @@
       </p:sp>
       <p:sp>
         <p:nvSpPr>
-          <p:cNvPr id="6" name="Text 4"/>
-          <p:cNvSpPr/>
-          <p:nvPr/>
-        </p:nvSpPr>
-        <p:spPr>
-          <a:xfrm>
-            <a:off x="1828800" y="1097280"/>
-            <a:ext cx="5669280" cy="640080"/>
+          <p:cNvPr id="8" name="Text 6"/>
+          <p:cNvSpPr/>
+          <p:nvPr/>
+        </p:nvSpPr>
+        <p:spPr>
+          <a:xfrm>
+            <a:off x="914400" y="1051560"/>
+            <a:ext cx="1463040" cy="658368"/>
           </a:xfrm>
           <a:prstGeom prst="rect">
             <a:avLst/>
@@ -1551,14 +1833,14 @@
           <a:ln/>
         </p:spPr>
         <p:txBody>
-          <a:bodyPr wrap="square" rtlCol="0" anchor="ctr"/>
+          <a:bodyPr wrap="square" lIns="0" tIns="0" rIns="0" bIns="0" rtlCol="0" anchor="ctr"/>
           <a:lstStyle/>
           <a:p>
             <a:pPr indent="0" marL="0">
               <a:buNone/>
             </a:pPr>
             <a:r>
-              <a:rPr lang="en-US" sz="2400" b="1" dirty="0">
+              <a:rPr lang="en-US" sz="1300" b="1" dirty="0">
                 <a:solidFill>
                   <a:srgbClr val="1B2A4A"/>
                 </a:solidFill>
@@ -1566,22 +1848,22 @@
                 <a:ea typeface="Georgia" pitchFamily="34" charset="-122"/>
                 <a:cs typeface="Georgia" pitchFamily="34" charset="-120"/>
               </a:rPr>
-              <a:t>Multiplying and Dividing</a:t>
-            </a:r>
-            <a:endParaRPr lang="en-US" sz="2400" dirty="0"/>
-          </a:p>
-        </p:txBody>
-      </p:sp>
-      <p:sp>
-        <p:nvSpPr>
-          <p:cNvPr id="7" name="Text 5"/>
-          <p:cNvSpPr/>
-          <p:nvPr/>
-        </p:nvSpPr>
-        <p:spPr>
-          <a:xfrm>
-            <a:off x="1828800" y="1828800"/>
-            <a:ext cx="5669280" cy="2011680"/>
+              <a:t>Multiply</a:t>
+            </a:r>
+            <a:endParaRPr lang="en-US" sz="1300" dirty="0"/>
+          </a:p>
+        </p:txBody>
+      </p:sp>
+      <p:sp>
+        <p:nvSpPr>
+          <p:cNvPr id="9" name="Text 7"/>
+          <p:cNvSpPr/>
+          <p:nvPr/>
+        </p:nvSpPr>
+        <p:spPr>
+          <a:xfrm>
+            <a:off x="2377440" y="1051560"/>
+            <a:ext cx="1920240" cy="658368"/>
           </a:xfrm>
           <a:prstGeom prst="rect">
             <a:avLst/>
@@ -1590,27 +1872,399 @@
           <a:ln/>
         </p:spPr>
         <p:txBody>
-          <a:bodyPr wrap="square" rtlCol="0" anchor="t"/>
+          <a:bodyPr wrap="square" lIns="0" tIns="0" rIns="0" bIns="0" rtlCol="0" anchor="ctr"/>
           <a:lstStyle/>
           <a:p>
             <a:pPr indent="0" marL="0">
-              <a:lnSpc>
-                <a:spcPct val="130000"/>
-              </a:lnSpc>
               <a:buNone/>
             </a:pPr>
             <a:r>
-              <a:rPr lang="en-US" sz="1500" dirty="0">
-                <a:solidFill>
-                  <a:srgbClr val="3D3A36"/>
+              <a:rPr lang="en-US" sz="1100" dirty="0">
+                <a:solidFill>
+                  <a:srgbClr val="6B6660"/>
                 </a:solidFill>
                 <a:latin typeface="Calibri" pitchFamily="34" charset="0"/>
                 <a:ea typeface="Calibri" pitchFamily="34" charset="-122"/>
                 <a:cs typeface="Calibri" pitchFamily="34" charset="-120"/>
               </a:rPr>
-              <a:t>Multiplying fractions is simpler than adding — just multiply straight across! Dividing fractions uses the 'KFC' trick: Keep the first fraction, Flip the second, Change to multiplication. These are powerful skills used in ratio, proportion, and algebra.</a:t>
-            </a:r>
-            <a:endParaRPr lang="en-US" sz="1500" dirty="0"/>
+              <a:t>× means 'of' with fractions</a:t>
+            </a:r>
+            <a:endParaRPr lang="en-US" sz="1100" dirty="0"/>
+          </a:p>
+        </p:txBody>
+      </p:sp>
+      <p:sp>
+        <p:nvSpPr>
+          <p:cNvPr id="10" name="Shape 8"/>
+          <p:cNvSpPr/>
+          <p:nvPr/>
+        </p:nvSpPr>
+        <p:spPr>
+          <a:xfrm>
+            <a:off x="4754880" y="1051560"/>
+            <a:ext cx="3657600" cy="658368"/>
+          </a:xfrm>
+          <a:prstGeom prst="rect">
+            <a:avLst/>
+          </a:prstGeom>
+          <a:solidFill>
+            <a:srgbClr val="FFFFFF"/>
+          </a:solidFill>
+          <a:ln/>
+          <a:effectLst>
+            <a:outerShdw sx="100000" sy="100000" kx="0" ky="0" algn="bl" rotWithShape="0" blurRad="50800" dist="25400" dir="8100000">
+              <a:srgbClr val="000000">
+                <a:alpha val="10000"/>
+              </a:srgbClr>
+            </a:outerShdw>
+          </a:effectLst>
+        </p:spPr>
+      </p:sp>
+      <p:sp>
+        <p:nvSpPr>
+          <p:cNvPr id="11" name="Shape 9"/>
+          <p:cNvSpPr/>
+          <p:nvPr/>
+        </p:nvSpPr>
+        <p:spPr>
+          <a:xfrm>
+            <a:off x="4754880" y="1051560"/>
+            <a:ext cx="54864" cy="658368"/>
+          </a:xfrm>
+          <a:prstGeom prst="rect">
+            <a:avLst/>
+          </a:prstGeom>
+          <a:solidFill>
+            <a:srgbClr val="2A9D8F"/>
+          </a:solidFill>
+          <a:ln/>
+        </p:spPr>
+      </p:sp>
+      <p:sp>
+        <p:nvSpPr>
+          <p:cNvPr id="12" name="Text 10"/>
+          <p:cNvSpPr/>
+          <p:nvPr/>
+        </p:nvSpPr>
+        <p:spPr>
+          <a:xfrm>
+            <a:off x="4937760" y="1051560"/>
+            <a:ext cx="1463040" cy="658368"/>
+          </a:xfrm>
+          <a:prstGeom prst="rect">
+            <a:avLst/>
+          </a:prstGeom>
+          <a:noFill/>
+          <a:ln/>
+        </p:spPr>
+        <p:txBody>
+          <a:bodyPr wrap="square" lIns="0" tIns="0" rIns="0" bIns="0" rtlCol="0" anchor="ctr"/>
+          <a:lstStyle/>
+          <a:p>
+            <a:pPr indent="0" marL="0">
+              <a:buNone/>
+            </a:pPr>
+            <a:r>
+              <a:rPr lang="en-US" sz="1300" b="1" dirty="0">
+                <a:solidFill>
+                  <a:srgbClr val="1B2A4A"/>
+                </a:solidFill>
+                <a:latin typeface="Georgia" pitchFamily="34" charset="0"/>
+                <a:ea typeface="Georgia" pitchFamily="34" charset="-122"/>
+                <a:cs typeface="Georgia" pitchFamily="34" charset="-120"/>
+              </a:rPr>
+              <a:t>Reciprocal</a:t>
+            </a:r>
+            <a:endParaRPr lang="en-US" sz="1300" dirty="0"/>
+          </a:p>
+        </p:txBody>
+      </p:sp>
+      <p:sp>
+        <p:nvSpPr>
+          <p:cNvPr id="13" name="Text 11"/>
+          <p:cNvSpPr/>
+          <p:nvPr/>
+        </p:nvSpPr>
+        <p:spPr>
+          <a:xfrm>
+            <a:off x="6400800" y="1051560"/>
+            <a:ext cx="1920240" cy="658368"/>
+          </a:xfrm>
+          <a:prstGeom prst="rect">
+            <a:avLst/>
+          </a:prstGeom>
+          <a:noFill/>
+          <a:ln/>
+        </p:spPr>
+        <p:txBody>
+          <a:bodyPr wrap="square" lIns="0" tIns="0" rIns="0" bIns="0" rtlCol="0" anchor="ctr"/>
+          <a:lstStyle/>
+          <a:p>
+            <a:pPr indent="0" marL="0">
+              <a:buNone/>
+            </a:pPr>
+            <a:r>
+              <a:rPr lang="en-US" sz="1100" dirty="0">
+                <a:solidFill>
+                  <a:srgbClr val="6B6660"/>
+                </a:solidFill>
+                <a:latin typeface="Calibri" pitchFamily="34" charset="0"/>
+                <a:ea typeface="Calibri" pitchFamily="34" charset="-122"/>
+                <a:cs typeface="Calibri" pitchFamily="34" charset="-120"/>
+              </a:rPr>
+              <a:t>Flip the fraction upside down</a:t>
+            </a:r>
+            <a:endParaRPr lang="en-US" sz="1100" dirty="0"/>
+          </a:p>
+        </p:txBody>
+      </p:sp>
+      <p:sp>
+        <p:nvSpPr>
+          <p:cNvPr id="14" name="Shape 12"/>
+          <p:cNvSpPr/>
+          <p:nvPr/>
+        </p:nvSpPr>
+        <p:spPr>
+          <a:xfrm>
+            <a:off x="731520" y="1819656"/>
+            <a:ext cx="3657600" cy="658368"/>
+          </a:xfrm>
+          <a:prstGeom prst="rect">
+            <a:avLst/>
+          </a:prstGeom>
+          <a:solidFill>
+            <a:srgbClr val="FFFFFF"/>
+          </a:solidFill>
+          <a:ln/>
+          <a:effectLst>
+            <a:outerShdw sx="100000" sy="100000" kx="0" ky="0" algn="bl" rotWithShape="0" blurRad="50800" dist="25400" dir="8100000">
+              <a:srgbClr val="000000">
+                <a:alpha val="10000"/>
+              </a:srgbClr>
+            </a:outerShdw>
+          </a:effectLst>
+        </p:spPr>
+      </p:sp>
+      <p:sp>
+        <p:nvSpPr>
+          <p:cNvPr id="15" name="Shape 13"/>
+          <p:cNvSpPr/>
+          <p:nvPr/>
+        </p:nvSpPr>
+        <p:spPr>
+          <a:xfrm>
+            <a:off x="731520" y="1819656"/>
+            <a:ext cx="54864" cy="658368"/>
+          </a:xfrm>
+          <a:prstGeom prst="rect">
+            <a:avLst/>
+          </a:prstGeom>
+          <a:solidFill>
+            <a:srgbClr val="2A9D8F"/>
+          </a:solidFill>
+          <a:ln/>
+        </p:spPr>
+      </p:sp>
+      <p:sp>
+        <p:nvSpPr>
+          <p:cNvPr id="16" name="Text 14"/>
+          <p:cNvSpPr/>
+          <p:nvPr/>
+        </p:nvSpPr>
+        <p:spPr>
+          <a:xfrm>
+            <a:off x="914400" y="1819656"/>
+            <a:ext cx="1463040" cy="658368"/>
+          </a:xfrm>
+          <a:prstGeom prst="rect">
+            <a:avLst/>
+          </a:prstGeom>
+          <a:noFill/>
+          <a:ln/>
+        </p:spPr>
+        <p:txBody>
+          <a:bodyPr wrap="square" lIns="0" tIns="0" rIns="0" bIns="0" rtlCol="0" anchor="ctr"/>
+          <a:lstStyle/>
+          <a:p>
+            <a:pPr indent="0" marL="0">
+              <a:buNone/>
+            </a:pPr>
+            <a:r>
+              <a:rPr lang="en-US" sz="1300" b="1" dirty="0">
+                <a:solidFill>
+                  <a:srgbClr val="1B2A4A"/>
+                </a:solidFill>
+                <a:latin typeface="Georgia" pitchFamily="34" charset="0"/>
+                <a:ea typeface="Georgia" pitchFamily="34" charset="-122"/>
+                <a:cs typeface="Georgia" pitchFamily="34" charset="-120"/>
+              </a:rPr>
+              <a:t>Cancel</a:t>
+            </a:r>
+            <a:endParaRPr lang="en-US" sz="1300" dirty="0"/>
+          </a:p>
+        </p:txBody>
+      </p:sp>
+      <p:sp>
+        <p:nvSpPr>
+          <p:cNvPr id="17" name="Text 15"/>
+          <p:cNvSpPr/>
+          <p:nvPr/>
+        </p:nvSpPr>
+        <p:spPr>
+          <a:xfrm>
+            <a:off x="2377440" y="1819656"/>
+            <a:ext cx="1920240" cy="658368"/>
+          </a:xfrm>
+          <a:prstGeom prst="rect">
+            <a:avLst/>
+          </a:prstGeom>
+          <a:noFill/>
+          <a:ln/>
+        </p:spPr>
+        <p:txBody>
+          <a:bodyPr wrap="square" lIns="0" tIns="0" rIns="0" bIns="0" rtlCol="0" anchor="ctr"/>
+          <a:lstStyle/>
+          <a:p>
+            <a:pPr indent="0" marL="0">
+              <a:buNone/>
+            </a:pPr>
+            <a:r>
+              <a:rPr lang="en-US" sz="1100" dirty="0">
+                <a:solidFill>
+                  <a:srgbClr val="6B6660"/>
+                </a:solidFill>
+                <a:latin typeface="Calibri" pitchFamily="34" charset="0"/>
+                <a:ea typeface="Calibri" pitchFamily="34" charset="-122"/>
+                <a:cs typeface="Calibri" pitchFamily="34" charset="-120"/>
+              </a:rPr>
+              <a:t>Simplify before multiplying</a:t>
+            </a:r>
+            <a:endParaRPr lang="en-US" sz="1100" dirty="0"/>
+          </a:p>
+        </p:txBody>
+      </p:sp>
+      <p:sp>
+        <p:nvSpPr>
+          <p:cNvPr id="18" name="Shape 16"/>
+          <p:cNvSpPr/>
+          <p:nvPr/>
+        </p:nvSpPr>
+        <p:spPr>
+          <a:xfrm>
+            <a:off x="4754880" y="1819656"/>
+            <a:ext cx="3657600" cy="658368"/>
+          </a:xfrm>
+          <a:prstGeom prst="rect">
+            <a:avLst/>
+          </a:prstGeom>
+          <a:solidFill>
+            <a:srgbClr val="FFFFFF"/>
+          </a:solidFill>
+          <a:ln/>
+          <a:effectLst>
+            <a:outerShdw sx="100000" sy="100000" kx="0" ky="0" algn="bl" rotWithShape="0" blurRad="50800" dist="25400" dir="8100000">
+              <a:srgbClr val="000000">
+                <a:alpha val="10000"/>
+              </a:srgbClr>
+            </a:outerShdw>
+          </a:effectLst>
+        </p:spPr>
+      </p:sp>
+      <p:sp>
+        <p:nvSpPr>
+          <p:cNvPr id="19" name="Shape 17"/>
+          <p:cNvSpPr/>
+          <p:nvPr/>
+        </p:nvSpPr>
+        <p:spPr>
+          <a:xfrm>
+            <a:off x="4754880" y="1819656"/>
+            <a:ext cx="54864" cy="658368"/>
+          </a:xfrm>
+          <a:prstGeom prst="rect">
+            <a:avLst/>
+          </a:prstGeom>
+          <a:solidFill>
+            <a:srgbClr val="2A9D8F"/>
+          </a:solidFill>
+          <a:ln/>
+        </p:spPr>
+      </p:sp>
+      <p:sp>
+        <p:nvSpPr>
+          <p:cNvPr id="20" name="Text 18"/>
+          <p:cNvSpPr/>
+          <p:nvPr/>
+        </p:nvSpPr>
+        <p:spPr>
+          <a:xfrm>
+            <a:off x="4937760" y="1819656"/>
+            <a:ext cx="1463040" cy="658368"/>
+          </a:xfrm>
+          <a:prstGeom prst="rect">
+            <a:avLst/>
+          </a:prstGeom>
+          <a:noFill/>
+          <a:ln/>
+        </p:spPr>
+        <p:txBody>
+          <a:bodyPr wrap="square" lIns="0" tIns="0" rIns="0" bIns="0" rtlCol="0" anchor="ctr"/>
+          <a:lstStyle/>
+          <a:p>
+            <a:pPr indent="0" marL="0">
+              <a:buNone/>
+            </a:pPr>
+            <a:r>
+              <a:rPr lang="en-US" sz="1300" b="1" dirty="0">
+                <a:solidFill>
+                  <a:srgbClr val="1B2A4A"/>
+                </a:solidFill>
+                <a:latin typeface="Georgia" pitchFamily="34" charset="0"/>
+                <a:ea typeface="Georgia" pitchFamily="34" charset="-122"/>
+                <a:cs typeface="Georgia" pitchFamily="34" charset="-120"/>
+              </a:rPr>
+              <a:t>KFC</a:t>
+            </a:r>
+            <a:endParaRPr lang="en-US" sz="1300" dirty="0"/>
+          </a:p>
+        </p:txBody>
+      </p:sp>
+      <p:sp>
+        <p:nvSpPr>
+          <p:cNvPr id="21" name="Text 19"/>
+          <p:cNvSpPr/>
+          <p:nvPr/>
+        </p:nvSpPr>
+        <p:spPr>
+          <a:xfrm>
+            <a:off x="6400800" y="1819656"/>
+            <a:ext cx="1920240" cy="658368"/>
+          </a:xfrm>
+          <a:prstGeom prst="rect">
+            <a:avLst/>
+          </a:prstGeom>
+          <a:noFill/>
+          <a:ln/>
+        </p:spPr>
+        <p:txBody>
+          <a:bodyPr wrap="square" lIns="0" tIns="0" rIns="0" bIns="0" rtlCol="0" anchor="ctr"/>
+          <a:lstStyle/>
+          <a:p>
+            <a:pPr indent="0" marL="0">
+              <a:buNone/>
+            </a:pPr>
+            <a:r>
+              <a:rPr lang="en-US" sz="1100" dirty="0">
+                <a:solidFill>
+                  <a:srgbClr val="6B6660"/>
+                </a:solidFill>
+                <a:latin typeface="Calibri" pitchFamily="34" charset="0"/>
+                <a:ea typeface="Calibri" pitchFamily="34" charset="-122"/>
+                <a:cs typeface="Calibri" pitchFamily="34" charset="-120"/>
+              </a:rPr>
+              <a:t>Keep, Flip, Change — for division</a:t>
+            </a:r>
+            <a:endParaRPr lang="en-US" sz="1100" dirty="0"/>
           </a:p>
         </p:txBody>
       </p:sp>
@@ -1655,7 +2309,47 @@
         <p:spPr>
           <a:xfrm>
             <a:off x="0" y="0"/>
-            <a:ext cx="9144000" cy="54864"/>
+            <a:ext cx="9144000" cy="822960"/>
+          </a:xfrm>
+          <a:prstGeom prst="rect">
+            <a:avLst/>
+          </a:prstGeom>
+          <a:solidFill>
+            <a:srgbClr val="FFFFFF"/>
+          </a:solidFill>
+          <a:ln/>
+        </p:spPr>
+      </p:sp>
+      <p:sp>
+        <p:nvSpPr>
+          <p:cNvPr id="3" name="Shape 1"/>
+          <p:cNvSpPr/>
+          <p:nvPr/>
+        </p:nvSpPr>
+        <p:spPr>
+          <a:xfrm>
+            <a:off x="0" y="804672"/>
+            <a:ext cx="9144000" cy="27432"/>
+          </a:xfrm>
+          <a:prstGeom prst="rect">
+            <a:avLst/>
+          </a:prstGeom>
+          <a:solidFill>
+            <a:srgbClr val="E5E2DC"/>
+          </a:solidFill>
+          <a:ln/>
+        </p:spPr>
+      </p:sp>
+      <p:sp>
+        <p:nvSpPr>
+          <p:cNvPr id="4" name="Shape 2"/>
+          <p:cNvSpPr/>
+          <p:nvPr/>
+        </p:nvSpPr>
+        <p:spPr>
+          <a:xfrm>
+            <a:off x="548640" y="201168"/>
+            <a:ext cx="54864" cy="420624"/>
           </a:xfrm>
           <a:prstGeom prst="rect">
             <a:avLst/>
@@ -1668,14 +2362,14 @@
       </p:sp>
       <p:sp>
         <p:nvSpPr>
-          <p:cNvPr id="3" name="Text 1"/>
-          <p:cNvSpPr/>
-          <p:nvPr/>
-        </p:nvSpPr>
-        <p:spPr>
-          <a:xfrm>
-            <a:off x="7772400" y="4709160"/>
-            <a:ext cx="1097280" cy="320040"/>
+          <p:cNvPr id="5" name="Text 3"/>
+          <p:cNvSpPr/>
+          <p:nvPr/>
+        </p:nvSpPr>
+        <p:spPr>
+          <a:xfrm>
+            <a:off x="777240" y="137160"/>
+            <a:ext cx="7772400" cy="548640"/>
           </a:xfrm>
           <a:prstGeom prst="rect">
             <a:avLst/>
@@ -1684,53 +2378,14 @@
           <a:ln/>
         </p:spPr>
         <p:txBody>
-          <a:bodyPr wrap="square" rtlCol="0" anchor="ctr"/>
-          <a:lstStyle/>
-          <a:p>
-            <a:pPr algn="r" indent="0" marL="0">
-              <a:buNone/>
-            </a:pPr>
-            <a:r>
-              <a:rPr lang="en-US" sz="900" dirty="0">
-                <a:solidFill>
-                  <a:srgbClr val="6B6660"/>
-                </a:solidFill>
-                <a:latin typeface="Calibri" pitchFamily="34" charset="0"/>
-                <a:ea typeface="Calibri" pitchFamily="34" charset="-122"/>
-                <a:cs typeface="Calibri" pitchFamily="34" charset="-120"/>
-              </a:rPr>
-              <a:t>3 / 5</a:t>
-            </a:r>
-            <a:endParaRPr lang="en-US" sz="900" dirty="0"/>
-          </a:p>
-        </p:txBody>
-      </p:sp>
-      <p:sp>
-        <p:nvSpPr>
-          <p:cNvPr id="4" name="Text 2"/>
-          <p:cNvSpPr/>
-          <p:nvPr/>
-        </p:nvSpPr>
-        <p:spPr>
-          <a:xfrm>
-            <a:off x="457200" y="274320"/>
-            <a:ext cx="8229600" cy="640080"/>
-          </a:xfrm>
-          <a:prstGeom prst="rect">
-            <a:avLst/>
-          </a:prstGeom>
-          <a:noFill/>
-          <a:ln/>
-        </p:spPr>
-        <p:txBody>
-          <a:bodyPr wrap="square" rtlCol="0" anchor="ctr"/>
+          <a:bodyPr wrap="square" lIns="0" tIns="0" rIns="0" bIns="0" rtlCol="0" anchor="ctr"/>
           <a:lstStyle/>
           <a:p>
             <a:pPr indent="0" marL="0">
               <a:buNone/>
             </a:pPr>
             <a:r>
-              <a:rPr lang="en-US" sz="2600" b="1" dirty="0">
+              <a:rPr lang="en-US" sz="2000" b="1" dirty="0">
                 <a:solidFill>
                   <a:srgbClr val="1B2A4A"/>
                 </a:solidFill>
@@ -1738,162 +2393,30 @@
                 <a:ea typeface="Georgia" pitchFamily="34" charset="-122"/>
                 <a:cs typeface="Georgia" pitchFamily="34" charset="-120"/>
               </a:rPr>
-              <a:t>Multiplying Fractions</a:t>
-            </a:r>
-            <a:endParaRPr lang="en-US" sz="2600" dirty="0"/>
-          </a:p>
-        </p:txBody>
-      </p:sp>
-      <p:sp>
-        <p:nvSpPr>
-          <p:cNvPr id="5" name="Text 3"/>
-          <p:cNvSpPr/>
-          <p:nvPr/>
-        </p:nvSpPr>
-        <p:spPr>
-          <a:xfrm>
-            <a:off x="457200" y="1188720"/>
+              <a:t>Multiplying vs Dividing</a:t>
+            </a:r>
+            <a:endParaRPr lang="en-US" sz="2000" dirty="0"/>
+          </a:p>
+        </p:txBody>
+      </p:sp>
+      <p:sp>
+        <p:nvSpPr>
+          <p:cNvPr id="6" name="Shape 4"/>
+          <p:cNvSpPr/>
+          <p:nvPr/>
+        </p:nvSpPr>
+        <p:spPr>
+          <a:xfrm>
+            <a:off x="548640" y="1051560"/>
             <a:ext cx="3840480" cy="3474720"/>
           </a:xfrm>
           <a:prstGeom prst="rect">
             <a:avLst/>
           </a:prstGeom>
-          <a:noFill/>
-          <a:ln/>
-        </p:spPr>
-        <p:txBody>
-          <a:bodyPr wrap="square" rtlCol="0" anchor="t"/>
-          <a:lstStyle/>
-          <a:p>
-            <a:pPr marL="342900" indent="-342900">
-              <a:spcAft>
-                <a:spcPts val="600"/>
-              </a:spcAft>
-              <a:buSzPct val="100000"/>
-              <a:buChar char="•"/>
-            </a:pPr>
-            <a:r>
-              <a:rPr lang="en-US" sz="1400" dirty="0">
-                <a:solidFill>
-                  <a:srgbClr val="3D3A36"/>
-                </a:solidFill>
-                <a:latin typeface="Calibri" pitchFamily="34" charset="0"/>
-                <a:ea typeface="Calibri" pitchFamily="34" charset="-122"/>
-                <a:cs typeface="Calibri" pitchFamily="34" charset="-120"/>
-              </a:rPr>
-              <a:t>Multiply numerators together, multiply denominators together</a:t>
-            </a:r>
-            <a:endParaRPr lang="en-US" sz="1400" dirty="0"/>
-          </a:p>
-          <a:p>
-            <a:pPr marL="342900" indent="-342900">
-              <a:spcAft>
-                <a:spcPts val="600"/>
-              </a:spcAft>
-              <a:buSzPct val="100000"/>
-              <a:buChar char="•"/>
-            </a:pPr>
-            <a:r>
-              <a:rPr lang="en-US" sz="1400" dirty="0">
-                <a:solidFill>
-                  <a:srgbClr val="3D3A36"/>
-                </a:solidFill>
-                <a:latin typeface="Calibri" pitchFamily="34" charset="0"/>
-                <a:ea typeface="Calibri" pitchFamily="34" charset="-122"/>
-                <a:cs typeface="Calibri" pitchFamily="34" charset="-120"/>
-              </a:rPr>
-              <a:t>²⁄₃ × ⁴⁄₅ = ⁸⁄₁₅</a:t>
-            </a:r>
-            <a:endParaRPr lang="en-US" sz="1400" dirty="0"/>
-          </a:p>
-          <a:p>
-            <a:pPr marL="342900" indent="-342900">
-              <a:spcAft>
-                <a:spcPts val="600"/>
-              </a:spcAft>
-              <a:buSzPct val="100000"/>
-              <a:buChar char="•"/>
-            </a:pPr>
-            <a:r>
-              <a:rPr lang="en-US" sz="1400" dirty="0">
-                <a:solidFill>
-                  <a:srgbClr val="3D3A36"/>
-                </a:solidFill>
-                <a:latin typeface="Calibri" pitchFamily="34" charset="0"/>
-                <a:ea typeface="Calibri" pitchFamily="34" charset="-122"/>
-                <a:cs typeface="Calibri" pitchFamily="34" charset="-120"/>
-              </a:rPr>
-              <a:t>Simplify before multiplying if possible (cross-cancel)</a:t>
-            </a:r>
-            <a:endParaRPr lang="en-US" sz="1400" dirty="0"/>
-          </a:p>
-          <a:p>
-            <a:pPr marL="342900" indent="-342900">
-              <a:spcAft>
-                <a:spcPts val="600"/>
-              </a:spcAft>
-              <a:buSzPct val="100000"/>
-              <a:buChar char="•"/>
-            </a:pPr>
-            <a:r>
-              <a:rPr lang="en-US" sz="1400" dirty="0">
-                <a:solidFill>
-                  <a:srgbClr val="3D3A36"/>
-                </a:solidFill>
-                <a:latin typeface="Calibri" pitchFamily="34" charset="0"/>
-                <a:ea typeface="Calibri" pitchFamily="34" charset="-122"/>
-                <a:cs typeface="Calibri" pitchFamily="34" charset="-120"/>
-              </a:rPr>
-              <a:t>³⁄₄ × ²⁄₉ → cancel 3 and 9 (÷3) → ¹⁄₄ × ²⁄₃ = ²⁄₁₂ = ¹⁄₆</a:t>
-            </a:r>
-            <a:endParaRPr lang="en-US" sz="1400" dirty="0"/>
-          </a:p>
-          <a:p>
-            <a:pPr marL="342900" indent="-342900">
-              <a:spcAft>
-                <a:spcPts val="600"/>
-              </a:spcAft>
-              <a:buSzPct val="100000"/>
-              <a:buChar char="•"/>
-            </a:pPr>
-            <a:r>
-              <a:rPr lang="en-US" sz="1400" dirty="0">
-                <a:solidFill>
-                  <a:srgbClr val="3D3A36"/>
-                </a:solidFill>
-                <a:latin typeface="Calibri" pitchFamily="34" charset="0"/>
-                <a:ea typeface="Calibri" pitchFamily="34" charset="-122"/>
-                <a:cs typeface="Calibri" pitchFamily="34" charset="-120"/>
-              </a:rPr>
-              <a:t>Mixed numbers: convert to improper first</a:t>
-            </a:r>
-            <a:endParaRPr lang="en-US" sz="1400" dirty="0"/>
-          </a:p>
-        </p:txBody>
-      </p:sp>
-      <p:sp>
-        <p:nvSpPr>
-          <p:cNvPr id="6" name="Shape 4"/>
-          <p:cNvSpPr/>
-          <p:nvPr/>
-        </p:nvSpPr>
-        <p:spPr>
-          <a:xfrm>
-            <a:off x="4846320" y="1188720"/>
-            <a:ext cx="3840480" cy="3474720"/>
-          </a:xfrm>
-          <a:prstGeom prst="rect">
-            <a:avLst/>
-          </a:prstGeom>
           <a:solidFill>
             <a:srgbClr val="FFFFFF"/>
           </a:solidFill>
-          <a:ln w="12700">
-            <a:solidFill>
-              <a:srgbClr val="E5E2DC"/>
-            </a:solidFill>
-            <a:prstDash val="solid"/>
-          </a:ln>
+          <a:ln/>
           <a:effectLst>
             <a:outerShdw sx="100000" sy="100000" kx="0" ky="0" algn="bl" rotWithShape="0" blurRad="50800" dist="25400" dir="8100000">
               <a:srgbClr val="000000">
@@ -1911,7 +2434,7 @@
         </p:nvSpPr>
         <p:spPr>
           <a:xfrm>
-            <a:off x="4846320" y="1188720"/>
+            <a:off x="548640" y="1051560"/>
             <a:ext cx="3840480" cy="54864"/>
           </a:xfrm>
           <a:prstGeom prst="rect">
@@ -1931,8 +2454,8 @@
         </p:nvSpPr>
         <p:spPr>
           <a:xfrm>
-            <a:off x="5120640" y="1371600"/>
-            <a:ext cx="3291840" cy="3108960"/>
+            <a:off x="777240" y="1188720"/>
+            <a:ext cx="3383280" cy="457200"/>
           </a:xfrm>
           <a:prstGeom prst="rect">
             <a:avLst/>
@@ -1941,43 +2464,75 @@
           <a:ln/>
         </p:spPr>
         <p:txBody>
+          <a:bodyPr wrap="square" lIns="0" tIns="0" rIns="0" bIns="0" rtlCol="0" anchor="ctr"/>
+          <a:lstStyle/>
+          <a:p>
+            <a:pPr indent="0" marL="0">
+              <a:buNone/>
+            </a:pPr>
+            <a:r>
+              <a:rPr lang="en-US" sz="1500" b="1" dirty="0">
+                <a:solidFill>
+                  <a:srgbClr val="1B2A4A"/>
+                </a:solidFill>
+                <a:latin typeface="Georgia" pitchFamily="34" charset="0"/>
+                <a:ea typeface="Georgia" pitchFamily="34" charset="-122"/>
+                <a:cs typeface="Georgia" pitchFamily="34" charset="-120"/>
+              </a:rPr>
+              <a:t>Multiplying Fractions</a:t>
+            </a:r>
+            <a:endParaRPr lang="en-US" sz="1500" dirty="0"/>
+          </a:p>
+        </p:txBody>
+      </p:sp>
+      <p:sp>
+        <p:nvSpPr>
+          <p:cNvPr id="9" name="Text 7"/>
+          <p:cNvSpPr/>
+          <p:nvPr/>
+        </p:nvSpPr>
+        <p:spPr>
+          <a:xfrm>
+            <a:off x="777240" y="1691640"/>
+            <a:ext cx="3383280" cy="2651760"/>
+          </a:xfrm>
+          <a:prstGeom prst="rect">
+            <a:avLst/>
+          </a:prstGeom>
+          <a:noFill/>
+          <a:ln/>
+        </p:spPr>
+        <p:txBody>
           <a:bodyPr wrap="square" rtlCol="0" anchor="t"/>
           <a:lstStyle/>
           <a:p>
-            <a:pPr indent="0" marL="0">
+            <a:pPr marL="342900" indent="-342900">
               <a:spcAft>
-                <a:spcPts val="400"/>
+                <a:spcPts val="600"/>
               </a:spcAft>
-              <a:buNone/>
-            </a:pPr>
-            <a:r>
-              <a:rPr lang="en-US" sz="1600" b="1" dirty="0">
-                <a:solidFill>
-                  <a:srgbClr val="1B2A4A"/>
+              <a:buSzPct val="100000"/>
+              <a:buChar char="•"/>
+            </a:pPr>
+            <a:r>
+              <a:rPr lang="en-US" sz="1300" dirty="0">
+                <a:solidFill>
+                  <a:srgbClr val="3D3A36"/>
                 </a:solidFill>
                 <a:latin typeface="Calibri" pitchFamily="34" charset="0"/>
                 <a:ea typeface="Calibri" pitchFamily="34" charset="-122"/>
                 <a:cs typeface="Calibri" pitchFamily="34" charset="-120"/>
               </a:rPr>
-              <a:t>Dividing Fractions (KFC)</a:t>
-            </a:r>
-            <a:endParaRPr lang="en-US" sz="1600" dirty="0"/>
-          </a:p>
-          <a:p>
-            <a:pPr indent="0" marL="0">
+              <a:t>Multiply numerators together</a:t>
+            </a:r>
+            <a:endParaRPr lang="en-US" sz="1300" dirty="0"/>
+          </a:p>
+          <a:p>
+            <a:pPr marL="342900" indent="-342900">
               <a:spcAft>
-                <a:spcPts val="400"/>
+                <a:spcPts val="600"/>
               </a:spcAft>
-              <a:buNone/>
-            </a:pPr>
-            <a:endParaRPr lang="en-US" sz="1600" dirty="0"/>
-          </a:p>
-          <a:p>
-            <a:pPr indent="0" marL="0">
-              <a:spcAft>
-                <a:spcPts val="400"/>
-              </a:spcAft>
-              <a:buNone/>
+              <a:buSzPct val="100000"/>
+              <a:buChar char="•"/>
             </a:pPr>
             <a:r>
               <a:rPr lang="en-US" sz="1300" dirty="0">
@@ -1988,16 +2543,17 @@
                 <a:ea typeface="Calibri" pitchFamily="34" charset="-122"/>
                 <a:cs typeface="Calibri" pitchFamily="34" charset="-120"/>
               </a:rPr>
-              <a:t>Keep the FIRST fraction as it is</a:t>
-            </a:r>
-            <a:endParaRPr lang="en-US" sz="1600" dirty="0"/>
-          </a:p>
-          <a:p>
-            <a:pPr indent="0" marL="0">
+              <a:t>Multiply denominators together</a:t>
+            </a:r>
+            <a:endParaRPr lang="en-US" sz="1300" dirty="0"/>
+          </a:p>
+          <a:p>
+            <a:pPr marL="342900" indent="-342900">
               <a:spcAft>
-                <a:spcPts val="400"/>
+                <a:spcPts val="600"/>
               </a:spcAft>
-              <a:buNone/>
+              <a:buSzPct val="100000"/>
+              <a:buChar char="•"/>
             </a:pPr>
             <a:r>
               <a:rPr lang="en-US" sz="1300" dirty="0">
@@ -2008,16 +2564,17 @@
                 <a:ea typeface="Calibri" pitchFamily="34" charset="-122"/>
                 <a:cs typeface="Calibri" pitchFamily="34" charset="-120"/>
               </a:rPr>
-              <a:t>Flip the SECOND fraction (reciprocal)</a:t>
-            </a:r>
-            <a:endParaRPr lang="en-US" sz="1600" dirty="0"/>
-          </a:p>
-          <a:p>
-            <a:pPr indent="0" marL="0">
+              <a:t>Simplify the answer</a:t>
+            </a:r>
+            <a:endParaRPr lang="en-US" sz="1300" dirty="0"/>
+          </a:p>
+          <a:p>
+            <a:pPr marL="342900" indent="-342900">
               <a:spcAft>
-                <a:spcPts val="400"/>
+                <a:spcPts val="600"/>
               </a:spcAft>
-              <a:buNone/>
+              <a:buSzPct val="100000"/>
+              <a:buChar char="•"/>
             </a:pPr>
             <a:r>
               <a:rPr lang="en-US" sz="1300" dirty="0">
@@ -2028,16 +2585,17 @@
                 <a:ea typeface="Calibri" pitchFamily="34" charset="-122"/>
                 <a:cs typeface="Calibri" pitchFamily="34" charset="-120"/>
               </a:rPr>
-              <a:t>Change division to multiplication</a:t>
-            </a:r>
-            <a:endParaRPr lang="en-US" sz="1600" dirty="0"/>
-          </a:p>
-          <a:p>
-            <a:pPr indent="0" marL="0">
+              <a:t>Example: ¾ × ⅖ = 6/20 = 3/10</a:t>
+            </a:r>
+            <a:endParaRPr lang="en-US" sz="1300" dirty="0"/>
+          </a:p>
+          <a:p>
+            <a:pPr marL="342900" indent="-342900">
               <a:spcAft>
-                <a:spcPts val="400"/>
+                <a:spcPts val="600"/>
               </a:spcAft>
-              <a:buNone/>
+              <a:buSzPct val="100000"/>
+              <a:buChar char="•"/>
             </a:pPr>
             <a:r>
               <a:rPr lang="en-US" sz="1300" dirty="0">
@@ -2048,16 +2606,125 @@
                 <a:ea typeface="Calibri" pitchFamily="34" charset="-122"/>
                 <a:cs typeface="Calibri" pitchFamily="34" charset="-120"/>
               </a:rPr>
-              <a:t>²⁄₃ ÷ ⁴⁄₅ → ²⁄₃ × ⁵⁄₄ = ¹⁰⁄₁₂ = ⁵⁄₆</a:t>
-            </a:r>
-            <a:endParaRPr lang="en-US" sz="1600" dirty="0"/>
-          </a:p>
+              <a:t>No need for common denominator!</a:t>
+            </a:r>
+            <a:endParaRPr lang="en-US" sz="1300" dirty="0"/>
+          </a:p>
+        </p:txBody>
+      </p:sp>
+      <p:sp>
+        <p:nvSpPr>
+          <p:cNvPr id="10" name="Shape 8"/>
+          <p:cNvSpPr/>
+          <p:nvPr/>
+        </p:nvSpPr>
+        <p:spPr>
+          <a:xfrm>
+            <a:off x="4754880" y="1051560"/>
+            <a:ext cx="3840480" cy="3474720"/>
+          </a:xfrm>
+          <a:prstGeom prst="rect">
+            <a:avLst/>
+          </a:prstGeom>
+          <a:solidFill>
+            <a:srgbClr val="FFFFFF"/>
+          </a:solidFill>
+          <a:ln/>
+          <a:effectLst>
+            <a:outerShdw sx="100000" sy="100000" kx="0" ky="0" algn="bl" rotWithShape="0" blurRad="50800" dist="25400" dir="8100000">
+              <a:srgbClr val="000000">
+                <a:alpha val="10000"/>
+              </a:srgbClr>
+            </a:outerShdw>
+          </a:effectLst>
+        </p:spPr>
+      </p:sp>
+      <p:sp>
+        <p:nvSpPr>
+          <p:cNvPr id="11" name="Shape 9"/>
+          <p:cNvSpPr/>
+          <p:nvPr/>
+        </p:nvSpPr>
+        <p:spPr>
+          <a:xfrm>
+            <a:off x="4754880" y="1051560"/>
+            <a:ext cx="3840480" cy="54864"/>
+          </a:xfrm>
+          <a:prstGeom prst="rect">
+            <a:avLst/>
+          </a:prstGeom>
+          <a:solidFill>
+            <a:srgbClr val="E9C46A"/>
+          </a:solidFill>
+          <a:ln/>
+        </p:spPr>
+      </p:sp>
+      <p:sp>
+        <p:nvSpPr>
+          <p:cNvPr id="12" name="Text 10"/>
+          <p:cNvSpPr/>
+          <p:nvPr/>
+        </p:nvSpPr>
+        <p:spPr>
+          <a:xfrm>
+            <a:off x="4983480" y="1188720"/>
+            <a:ext cx="3383280" cy="457200"/>
+          </a:xfrm>
+          <a:prstGeom prst="rect">
+            <a:avLst/>
+          </a:prstGeom>
+          <a:noFill/>
+          <a:ln/>
+        </p:spPr>
+        <p:txBody>
+          <a:bodyPr wrap="square" lIns="0" tIns="0" rIns="0" bIns="0" rtlCol="0" anchor="ctr"/>
+          <a:lstStyle/>
           <a:p>
             <a:pPr indent="0" marL="0">
+              <a:buNone/>
+            </a:pPr>
+            <a:r>
+              <a:rPr lang="en-US" sz="1500" b="1" dirty="0">
+                <a:solidFill>
+                  <a:srgbClr val="1B2A4A"/>
+                </a:solidFill>
+                <a:latin typeface="Georgia" pitchFamily="34" charset="0"/>
+                <a:ea typeface="Georgia" pitchFamily="34" charset="-122"/>
+                <a:cs typeface="Georgia" pitchFamily="34" charset="-120"/>
+              </a:rPr>
+              <a:t>Dividing Fractions (KFC)</a:t>
+            </a:r>
+            <a:endParaRPr lang="en-US" sz="1500" dirty="0"/>
+          </a:p>
+        </p:txBody>
+      </p:sp>
+      <p:sp>
+        <p:nvSpPr>
+          <p:cNvPr id="13" name="Text 11"/>
+          <p:cNvSpPr/>
+          <p:nvPr/>
+        </p:nvSpPr>
+        <p:spPr>
+          <a:xfrm>
+            <a:off x="4983480" y="1691640"/>
+            <a:ext cx="3383280" cy="2651760"/>
+          </a:xfrm>
+          <a:prstGeom prst="rect">
+            <a:avLst/>
+          </a:prstGeom>
+          <a:noFill/>
+          <a:ln/>
+        </p:spPr>
+        <p:txBody>
+          <a:bodyPr wrap="square" rtlCol="0" anchor="t"/>
+          <a:lstStyle/>
+          <a:p>
+            <a:pPr marL="342900" indent="-342900">
               <a:spcAft>
-                <a:spcPts val="400"/>
+                <a:spcPts val="600"/>
               </a:spcAft>
-              <a:buNone/>
+              <a:buSzPct val="100000"/>
+              <a:buChar char="•"/>
             </a:pPr>
             <a:r>
               <a:rPr lang="en-US" sz="1300" dirty="0">
@@ -2068,9 +2735,93 @@
                 <a:ea typeface="Calibri" pitchFamily="34" charset="-122"/>
                 <a:cs typeface="Calibri" pitchFamily="34" charset="-120"/>
               </a:rPr>
-              <a:t>Then multiply as normal and simplify</a:t>
-            </a:r>
-            <a:endParaRPr lang="en-US" sz="1600" dirty="0"/>
+              <a:t>KEEP the first fraction</a:t>
+            </a:r>
+            <a:endParaRPr lang="en-US" sz="1300" dirty="0"/>
+          </a:p>
+          <a:p>
+            <a:pPr marL="342900" indent="-342900">
+              <a:spcAft>
+                <a:spcPts val="600"/>
+              </a:spcAft>
+              <a:buSzPct val="100000"/>
+              <a:buChar char="•"/>
+            </a:pPr>
+            <a:r>
+              <a:rPr lang="en-US" sz="1300" dirty="0">
+                <a:solidFill>
+                  <a:srgbClr val="3D3A36"/>
+                </a:solidFill>
+                <a:latin typeface="Calibri" pitchFamily="34" charset="0"/>
+                <a:ea typeface="Calibri" pitchFamily="34" charset="-122"/>
+                <a:cs typeface="Calibri" pitchFamily="34" charset="-120"/>
+              </a:rPr>
+              <a:t>FLIP the second fraction (reciprocal)</a:t>
+            </a:r>
+            <a:endParaRPr lang="en-US" sz="1300" dirty="0"/>
+          </a:p>
+          <a:p>
+            <a:pPr marL="342900" indent="-342900">
+              <a:spcAft>
+                <a:spcPts val="600"/>
+              </a:spcAft>
+              <a:buSzPct val="100000"/>
+              <a:buChar char="•"/>
+            </a:pPr>
+            <a:r>
+              <a:rPr lang="en-US" sz="1300" dirty="0">
+                <a:solidFill>
+                  <a:srgbClr val="3D3A36"/>
+                </a:solidFill>
+                <a:latin typeface="Calibri" pitchFamily="34" charset="0"/>
+                <a:ea typeface="Calibri" pitchFamily="34" charset="-122"/>
+                <a:cs typeface="Calibri" pitchFamily="34" charset="-120"/>
+              </a:rPr>
+              <a:t>CHANGE ÷ to ×</a:t>
+            </a:r>
+            <a:endParaRPr lang="en-US" sz="1300" dirty="0"/>
+          </a:p>
+          <a:p>
+            <a:pPr marL="342900" indent="-342900">
+              <a:spcAft>
+                <a:spcPts val="600"/>
+              </a:spcAft>
+              <a:buSzPct val="100000"/>
+              <a:buChar char="•"/>
+            </a:pPr>
+            <a:r>
+              <a:rPr lang="en-US" sz="1300" dirty="0">
+                <a:solidFill>
+                  <a:srgbClr val="3D3A36"/>
+                </a:solidFill>
+                <a:latin typeface="Calibri" pitchFamily="34" charset="0"/>
+                <a:ea typeface="Calibri" pitchFamily="34" charset="-122"/>
+                <a:cs typeface="Calibri" pitchFamily="34" charset="-120"/>
+              </a:rPr>
+              <a:t>Example: ¾ ÷ ⅖ = ¾ × 5/2 = 15/8 = 1⅞</a:t>
+            </a:r>
+            <a:endParaRPr lang="en-US" sz="1300" dirty="0"/>
+          </a:p>
+          <a:p>
+            <a:pPr marL="342900" indent="-342900">
+              <a:spcAft>
+                <a:spcPts val="600"/>
+              </a:spcAft>
+              <a:buSzPct val="100000"/>
+              <a:buChar char="•"/>
+            </a:pPr>
+            <a:r>
+              <a:rPr lang="en-US" sz="1300" dirty="0">
+                <a:solidFill>
+                  <a:srgbClr val="3D3A36"/>
+                </a:solidFill>
+                <a:latin typeface="Calibri" pitchFamily="34" charset="0"/>
+                <a:ea typeface="Calibri" pitchFamily="34" charset="-122"/>
+                <a:cs typeface="Calibri" pitchFamily="34" charset="-120"/>
+              </a:rPr>
+              <a:t>Then multiply as normal</a:t>
+            </a:r>
+            <a:endParaRPr lang="en-US" sz="1300" dirty="0"/>
           </a:p>
         </p:txBody>
       </p:sp>
@@ -2115,7 +2866,47 @@
         <p:spPr>
           <a:xfrm>
             <a:off x="0" y="0"/>
-            <a:ext cx="9144000" cy="54864"/>
+            <a:ext cx="9144000" cy="822960"/>
+          </a:xfrm>
+          <a:prstGeom prst="rect">
+            <a:avLst/>
+          </a:prstGeom>
+          <a:solidFill>
+            <a:srgbClr val="FFFFFF"/>
+          </a:solidFill>
+          <a:ln/>
+        </p:spPr>
+      </p:sp>
+      <p:sp>
+        <p:nvSpPr>
+          <p:cNvPr id="3" name="Shape 1"/>
+          <p:cNvSpPr/>
+          <p:nvPr/>
+        </p:nvSpPr>
+        <p:spPr>
+          <a:xfrm>
+            <a:off x="0" y="804672"/>
+            <a:ext cx="9144000" cy="27432"/>
+          </a:xfrm>
+          <a:prstGeom prst="rect">
+            <a:avLst/>
+          </a:prstGeom>
+          <a:solidFill>
+            <a:srgbClr val="E5E2DC"/>
+          </a:solidFill>
+          <a:ln/>
+        </p:spPr>
+      </p:sp>
+      <p:sp>
+        <p:nvSpPr>
+          <p:cNvPr id="4" name="Shape 2"/>
+          <p:cNvSpPr/>
+          <p:nvPr/>
+        </p:nvSpPr>
+        <p:spPr>
+          <a:xfrm>
+            <a:off x="548640" y="201168"/>
+            <a:ext cx="54864" cy="420624"/>
           </a:xfrm>
           <a:prstGeom prst="rect">
             <a:avLst/>
@@ -2128,14 +2919,14 @@
       </p:sp>
       <p:sp>
         <p:nvSpPr>
-          <p:cNvPr id="3" name="Text 1"/>
-          <p:cNvSpPr/>
-          <p:nvPr/>
-        </p:nvSpPr>
-        <p:spPr>
-          <a:xfrm>
-            <a:off x="7772400" y="4709160"/>
-            <a:ext cx="1097280" cy="320040"/>
+          <p:cNvPr id="5" name="Text 3"/>
+          <p:cNvSpPr/>
+          <p:nvPr/>
+        </p:nvSpPr>
+        <p:spPr>
+          <a:xfrm>
+            <a:off x="777240" y="137160"/>
+            <a:ext cx="7772400" cy="548640"/>
           </a:xfrm>
           <a:prstGeom prst="rect">
             <a:avLst/>
@@ -2144,53 +2935,14 @@
           <a:ln/>
         </p:spPr>
         <p:txBody>
-          <a:bodyPr wrap="square" rtlCol="0" anchor="ctr"/>
-          <a:lstStyle/>
-          <a:p>
-            <a:pPr algn="r" indent="0" marL="0">
-              <a:buNone/>
-            </a:pPr>
-            <a:r>
-              <a:rPr lang="en-US" sz="900" dirty="0">
-                <a:solidFill>
-                  <a:srgbClr val="6B6660"/>
-                </a:solidFill>
-                <a:latin typeface="Calibri" pitchFamily="34" charset="0"/>
-                <a:ea typeface="Calibri" pitchFamily="34" charset="-122"/>
-                <a:cs typeface="Calibri" pitchFamily="34" charset="-120"/>
-              </a:rPr>
-              <a:t>4 / 5</a:t>
-            </a:r>
-            <a:endParaRPr lang="en-US" sz="900" dirty="0"/>
-          </a:p>
-        </p:txBody>
-      </p:sp>
-      <p:sp>
-        <p:nvSpPr>
-          <p:cNvPr id="4" name="Text 2"/>
-          <p:cNvSpPr/>
-          <p:nvPr/>
-        </p:nvSpPr>
-        <p:spPr>
-          <a:xfrm>
-            <a:off x="457200" y="274320"/>
-            <a:ext cx="8229600" cy="640080"/>
-          </a:xfrm>
-          <a:prstGeom prst="rect">
-            <a:avLst/>
-          </a:prstGeom>
-          <a:noFill/>
-          <a:ln/>
-        </p:spPr>
-        <p:txBody>
-          <a:bodyPr wrap="square" rtlCol="0" anchor="ctr"/>
+          <a:bodyPr wrap="square" lIns="0" tIns="0" rIns="0" bIns="0" rtlCol="0" anchor="ctr"/>
           <a:lstStyle/>
           <a:p>
             <a:pPr indent="0" marL="0">
               <a:buNone/>
             </a:pPr>
             <a:r>
-              <a:rPr lang="en-US" sz="2600" b="1" dirty="0">
+              <a:rPr lang="en-US" sz="2000" b="1" dirty="0">
                 <a:solidFill>
                   <a:srgbClr val="1B2A4A"/>
                 </a:solidFill>
@@ -2198,22 +2950,22 @@
                 <a:ea typeface="Georgia" pitchFamily="34" charset="-122"/>
                 <a:cs typeface="Georgia" pitchFamily="34" charset="-120"/>
               </a:rPr>
-              <a:t>Practice Problems</a:t>
-            </a:r>
-            <a:endParaRPr lang="en-US" sz="2600" dirty="0"/>
-          </a:p>
-        </p:txBody>
-      </p:sp>
-      <p:sp>
-        <p:nvSpPr>
-          <p:cNvPr id="5" name="Text 3"/>
-          <p:cNvSpPr/>
-          <p:nvPr/>
-        </p:nvSpPr>
-        <p:spPr>
-          <a:xfrm>
-            <a:off x="457200" y="1097280"/>
-            <a:ext cx="8229600" cy="3657600"/>
+              <a:t>Cross-Cancelling (Shortcut)</a:t>
+            </a:r>
+            <a:endParaRPr lang="en-US" sz="2000" dirty="0"/>
+          </a:p>
+        </p:txBody>
+      </p:sp>
+      <p:sp>
+        <p:nvSpPr>
+          <p:cNvPr id="6" name="Text 4"/>
+          <p:cNvSpPr/>
+          <p:nvPr/>
+        </p:nvSpPr>
+        <p:spPr>
+          <a:xfrm>
+            <a:off x="731520" y="1051560"/>
+            <a:ext cx="7680960" cy="3108960"/>
           </a:xfrm>
           <a:prstGeom prst="rect">
             <a:avLst/>
@@ -2233,7 +2985,7 @@
               <a:buChar char="•"/>
             </a:pPr>
             <a:r>
-              <a:rPr lang="en-US" sz="1400" dirty="0">
+              <a:rPr lang="en-US" sz="1500" dirty="0">
                 <a:solidFill>
                   <a:srgbClr val="3D3A36"/>
                 </a:solidFill>
@@ -2241,9 +2993,9 @@
                 <a:ea typeface="Calibri" pitchFamily="34" charset="-122"/>
                 <a:cs typeface="Calibri" pitchFamily="34" charset="-120"/>
               </a:rPr>
-              <a:t>½ × ³⁄₇ = ³⁄₁₄</a:t>
-            </a:r>
-            <a:endParaRPr lang="en-US" sz="1400" dirty="0"/>
+              <a:t>Before multiplying, you can cancel diagonally.</a:t>
+            </a:r>
+            <a:endParaRPr lang="en-US" sz="1500" dirty="0"/>
           </a:p>
           <a:p>
             <a:pPr marL="342900" indent="-342900">
@@ -2254,7 +3006,7 @@
               <a:buChar char="•"/>
             </a:pPr>
             <a:r>
-              <a:rPr lang="en-US" sz="1400" dirty="0">
+              <a:rPr lang="en-US" sz="1500" dirty="0">
                 <a:solidFill>
                   <a:srgbClr val="3D3A36"/>
                 </a:solidFill>
@@ -2262,9 +3014,9 @@
                 <a:ea typeface="Calibri" pitchFamily="34" charset="-122"/>
                 <a:cs typeface="Calibri" pitchFamily="34" charset="-120"/>
               </a:rPr>
-              <a:t>⁴⁄₅ × ²⁄₃ = ⁸⁄₁₅</a:t>
-            </a:r>
-            <a:endParaRPr lang="en-US" sz="1400" dirty="0"/>
+              <a:t>If a numerator and a denominator share a common factor, divide both.</a:t>
+            </a:r>
+            <a:endParaRPr lang="en-US" sz="1500" dirty="0"/>
           </a:p>
           <a:p>
             <a:pPr marL="342900" indent="-342900">
@@ -2275,7 +3027,7 @@
               <a:buChar char="•"/>
             </a:pPr>
             <a:r>
-              <a:rPr lang="en-US" sz="1400" dirty="0">
+              <a:rPr lang="en-US" sz="1500" dirty="0">
                 <a:solidFill>
                   <a:srgbClr val="3D3A36"/>
                 </a:solidFill>
@@ -2283,9 +3035,9 @@
                 <a:ea typeface="Calibri" pitchFamily="34" charset="-122"/>
                 <a:cs typeface="Calibri" pitchFamily="34" charset="-120"/>
               </a:rPr>
-              <a:t>²⁄₃ ÷ ½ = ²⁄₃ × ²⁄₁ = ⁴⁄₃ = 1¹⁄₃</a:t>
-            </a:r>
-            <a:endParaRPr lang="en-US" sz="1400" dirty="0"/>
+              <a:t>This makes the numbers smaller BEFORE you multiply.</a:t>
+            </a:r>
+            <a:endParaRPr lang="en-US" sz="1500" dirty="0"/>
           </a:p>
           <a:p>
             <a:pPr marL="342900" indent="-342900">
@@ -2296,7 +3048,7 @@
               <a:buChar char="•"/>
             </a:pPr>
             <a:r>
-              <a:rPr lang="en-US" sz="1400" dirty="0">
+              <a:rPr lang="en-US" sz="1500" dirty="0">
                 <a:solidFill>
                   <a:srgbClr val="3D3A36"/>
                 </a:solidFill>
@@ -2304,9 +3056,9 @@
                 <a:ea typeface="Calibri" pitchFamily="34" charset="-122"/>
                 <a:cs typeface="Calibri" pitchFamily="34" charset="-120"/>
               </a:rPr>
-              <a:t>³⁄₄ ÷ ³⁄₈ = ³⁄₄ × ⁸⁄₃ = ²⁴⁄₁₂ = 2</a:t>
-            </a:r>
-            <a:endParaRPr lang="en-US" sz="1400" dirty="0"/>
+              <a:t>Example: 4/9 × 3/8 → cancel 4 and 8 (÷4) and 3 and 9 (÷3) → 1/3 × 1/2 = 1/6.</a:t>
+            </a:r>
+            <a:endParaRPr lang="en-US" sz="1500" dirty="0"/>
           </a:p>
           <a:p>
             <a:pPr marL="342900" indent="-342900">
@@ -2317,7 +3069,7 @@
               <a:buChar char="•"/>
             </a:pPr>
             <a:r>
-              <a:rPr lang="en-US" sz="1400" dirty="0">
+              <a:rPr lang="en-US" sz="1500" dirty="0">
                 <a:solidFill>
                   <a:srgbClr val="3D3A36"/>
                 </a:solidFill>
@@ -2325,9 +3077,89 @@
                 <a:ea typeface="Calibri" pitchFamily="34" charset="-122"/>
                 <a:cs typeface="Calibri" pitchFamily="34" charset="-120"/>
               </a:rPr>
-              <a:t>1½ × 2²⁄₃ = ³⁄₂ × ⁸⁄₃ = ²⁴⁄₆ = 4</a:t>
-            </a:r>
-            <a:endParaRPr lang="en-US" sz="1400" dirty="0"/>
+              <a:t>Cross-cancelling gives the same answer but avoids big numbers.</a:t>
+            </a:r>
+            <a:endParaRPr lang="en-US" sz="1500" dirty="0"/>
+          </a:p>
+        </p:txBody>
+      </p:sp>
+      <p:sp>
+        <p:nvSpPr>
+          <p:cNvPr id="7" name="Shape 5"/>
+          <p:cNvSpPr/>
+          <p:nvPr/>
+        </p:nvSpPr>
+        <p:spPr>
+          <a:xfrm>
+            <a:off x="731520" y="4206240"/>
+            <a:ext cx="7680960" cy="640080"/>
+          </a:xfrm>
+          <a:prstGeom prst="rect">
+            <a:avLst/>
+          </a:prstGeom>
+          <a:solidFill>
+            <a:srgbClr val="E8F5F3"/>
+          </a:solidFill>
+          <a:ln/>
+          <a:effectLst>
+            <a:outerShdw sx="100000" sy="100000" kx="0" ky="0" algn="bl" rotWithShape="0" blurRad="50800" dist="25400" dir="8100000">
+              <a:srgbClr val="000000">
+                <a:alpha val="10000"/>
+              </a:srgbClr>
+            </a:outerShdw>
+          </a:effectLst>
+        </p:spPr>
+      </p:sp>
+      <p:sp>
+        <p:nvSpPr>
+          <p:cNvPr id="8" name="Text 6"/>
+          <p:cNvSpPr/>
+          <p:nvPr/>
+        </p:nvSpPr>
+        <p:spPr>
+          <a:xfrm>
+            <a:off x="914400" y="4251960"/>
+            <a:ext cx="7315200" cy="548640"/>
+          </a:xfrm>
+          <a:prstGeom prst="rect">
+            <a:avLst/>
+          </a:prstGeom>
+          <a:noFill/>
+          <a:ln/>
+        </p:spPr>
+        <p:txBody>
+          <a:bodyPr wrap="square" rtlCol="0" anchor="ctr"/>
+          <a:lstStyle/>
+          <a:p>
+            <a:pPr indent="0" marL="0">
+              <a:buNone/>
+            </a:pPr>
+            <a:r>
+              <a:rPr lang="en-US" sz="1200" b="1" dirty="0">
+                <a:solidFill>
+                  <a:srgbClr val="2A9D8F"/>
+                </a:solidFill>
+                <a:latin typeface="Calibri" pitchFamily="34" charset="0"/>
+                <a:ea typeface="Calibri" pitchFamily="34" charset="-122"/>
+                <a:cs typeface="Calibri" pitchFamily="34" charset="-120"/>
+              </a:rPr>
+              <a:t>Key Idea: </a:t>
+            </a:r>
+            <a:pPr indent="0" marL="0">
+              <a:buNone/>
+            </a:pPr>
+            <a:r>
+              <a:rPr lang="en-US" sz="1200" i="1" dirty="0">
+                <a:solidFill>
+                  <a:srgbClr val="3D3A36"/>
+                </a:solidFill>
+                <a:latin typeface="Calibri" pitchFamily="34" charset="0"/>
+                <a:ea typeface="Calibri" pitchFamily="34" charset="-122"/>
+                <a:cs typeface="Calibri" pitchFamily="34" charset="-120"/>
+              </a:rPr>
+              <a:t>Cross-cancel first, then multiply — easier numbers, less simplifying at the end.</a:t>
+            </a:r>
+            <a:endParaRPr lang="en-US" sz="1200" dirty="0"/>
           </a:p>
         </p:txBody>
       </p:sp>
@@ -2345,7 +3177,7 @@
     <p:bg>
       <p:bgPr>
         <a:solidFill>
-          <a:srgbClr val="1B2A4A"/>
+          <a:srgbClr val="FAF8F5"/>
         </a:solidFill>
       </p:bgPr>
     </p:bg>
@@ -2372,27 +3204,67 @@
         <p:spPr>
           <a:xfrm>
             <a:off x="0" y="0"/>
-            <a:ext cx="109728" cy="5143500"/>
-          </a:xfrm>
-          <a:prstGeom prst="rect">
-            <a:avLst/>
-          </a:prstGeom>
-          <a:solidFill>
-            <a:srgbClr val="E9C46A"/>
-          </a:solidFill>
-          <a:ln/>
-        </p:spPr>
-      </p:sp>
-      <p:sp>
-        <p:nvSpPr>
-          <p:cNvPr id="3" name="Text 1"/>
-          <p:cNvSpPr/>
-          <p:nvPr/>
-        </p:nvSpPr>
-        <p:spPr>
-          <a:xfrm>
-            <a:off x="731520" y="457200"/>
-            <a:ext cx="7772400" cy="731520"/>
+            <a:ext cx="9144000" cy="822960"/>
+          </a:xfrm>
+          <a:prstGeom prst="rect">
+            <a:avLst/>
+          </a:prstGeom>
+          <a:solidFill>
+            <a:srgbClr val="FFFFFF"/>
+          </a:solidFill>
+          <a:ln/>
+        </p:spPr>
+      </p:sp>
+      <p:sp>
+        <p:nvSpPr>
+          <p:cNvPr id="3" name="Shape 1"/>
+          <p:cNvSpPr/>
+          <p:nvPr/>
+        </p:nvSpPr>
+        <p:spPr>
+          <a:xfrm>
+            <a:off x="0" y="804672"/>
+            <a:ext cx="9144000" cy="27432"/>
+          </a:xfrm>
+          <a:prstGeom prst="rect">
+            <a:avLst/>
+          </a:prstGeom>
+          <a:solidFill>
+            <a:srgbClr val="E5E2DC"/>
+          </a:solidFill>
+          <a:ln/>
+        </p:spPr>
+      </p:sp>
+      <p:sp>
+        <p:nvSpPr>
+          <p:cNvPr id="4" name="Shape 2"/>
+          <p:cNvSpPr/>
+          <p:nvPr/>
+        </p:nvSpPr>
+        <p:spPr>
+          <a:xfrm>
+            <a:off x="548640" y="201168"/>
+            <a:ext cx="54864" cy="420624"/>
+          </a:xfrm>
+          <a:prstGeom prst="rect">
+            <a:avLst/>
+          </a:prstGeom>
+          <a:solidFill>
+            <a:srgbClr val="2A9D8F"/>
+          </a:solidFill>
+          <a:ln/>
+        </p:spPr>
+      </p:sp>
+      <p:sp>
+        <p:nvSpPr>
+          <p:cNvPr id="5" name="Text 3"/>
+          <p:cNvSpPr/>
+          <p:nvPr/>
+        </p:nvSpPr>
+        <p:spPr>
+          <a:xfrm>
+            <a:off x="777240" y="137160"/>
+            <a:ext cx="7772400" cy="548640"/>
           </a:xfrm>
           <a:prstGeom prst="rect">
             <a:avLst/>
@@ -2401,37 +3273,37 @@
           <a:ln/>
         </p:spPr>
         <p:txBody>
-          <a:bodyPr wrap="square" rtlCol="0" anchor="ctr"/>
+          <a:bodyPr wrap="square" lIns="0" tIns="0" rIns="0" bIns="0" rtlCol="0" anchor="ctr"/>
           <a:lstStyle/>
           <a:p>
             <a:pPr indent="0" marL="0">
               <a:buNone/>
             </a:pPr>
             <a:r>
-              <a:rPr lang="en-US" sz="3200" b="1" dirty="0">
-                <a:solidFill>
-                  <a:srgbClr val="FFFFFF"/>
+              <a:rPr lang="en-US" sz="2000" b="1" dirty="0">
+                <a:solidFill>
+                  <a:srgbClr val="1B2A4A"/>
                 </a:solidFill>
                 <a:latin typeface="Georgia" pitchFamily="34" charset="0"/>
                 <a:ea typeface="Georgia" pitchFamily="34" charset="-122"/>
                 <a:cs typeface="Georgia" pitchFamily="34" charset="-120"/>
               </a:rPr>
-              <a:t>Key Takeaways</a:t>
-            </a:r>
-            <a:endParaRPr lang="en-US" sz="3200" dirty="0"/>
-          </a:p>
-        </p:txBody>
-      </p:sp>
-      <p:sp>
-        <p:nvSpPr>
-          <p:cNvPr id="4" name="Text 2"/>
-          <p:cNvSpPr/>
-          <p:nvPr/>
-        </p:nvSpPr>
-        <p:spPr>
-          <a:xfrm>
-            <a:off x="731520" y="1463040"/>
-            <a:ext cx="7772400" cy="3200400"/>
+              <a:t>Multiplying &amp; Dividing Mixed Numbers</a:t>
+            </a:r>
+            <a:endParaRPr lang="en-US" sz="2000" dirty="0"/>
+          </a:p>
+        </p:txBody>
+      </p:sp>
+      <p:sp>
+        <p:nvSpPr>
+          <p:cNvPr id="6" name="Text 4"/>
+          <p:cNvSpPr/>
+          <p:nvPr/>
+        </p:nvSpPr>
+        <p:spPr>
+          <a:xfrm>
+            <a:off x="731520" y="1051560"/>
+            <a:ext cx="7680960" cy="3108960"/>
           </a:xfrm>
           <a:prstGeom prst="rect">
             <a:avLst/>
@@ -2445,7 +3317,7 @@
           <a:p>
             <a:pPr marL="342900" indent="-342900">
               <a:spcAft>
-                <a:spcPts val="1000"/>
+                <a:spcPts val="800"/>
               </a:spcAft>
               <a:buSzPct val="100000"/>
               <a:buChar char="•"/>
@@ -2453,20 +3325,20 @@
             <a:r>
               <a:rPr lang="en-US" sz="1500" dirty="0">
                 <a:solidFill>
-                  <a:srgbClr val="CADCFC"/>
+                  <a:srgbClr val="3D3A36"/>
                 </a:solidFill>
                 <a:latin typeface="Calibri" pitchFamily="34" charset="0"/>
                 <a:ea typeface="Calibri" pitchFamily="34" charset="-122"/>
                 <a:cs typeface="Calibri" pitchFamily="34" charset="-120"/>
               </a:rPr>
-              <a:t>Multiply: numerator × numerator, denominator × denominator</a:t>
+              <a:t>Step 1: Convert mixed numbers to IMPROPER fractions.</a:t>
             </a:r>
             <a:endParaRPr lang="en-US" sz="1500" dirty="0"/>
           </a:p>
           <a:p>
             <a:pPr marL="342900" indent="-342900">
               <a:spcAft>
-                <a:spcPts val="1000"/>
+                <a:spcPts val="800"/>
               </a:spcAft>
               <a:buSzPct val="100000"/>
               <a:buChar char="•"/>
@@ -2474,20 +3346,20 @@
             <a:r>
               <a:rPr lang="en-US" sz="1500" dirty="0">
                 <a:solidFill>
-                  <a:srgbClr val="CADCFC"/>
+                  <a:srgbClr val="3D3A36"/>
                 </a:solidFill>
                 <a:latin typeface="Calibri" pitchFamily="34" charset="0"/>
                 <a:ea typeface="Calibri" pitchFamily="34" charset="-122"/>
                 <a:cs typeface="Calibri" pitchFamily="34" charset="-120"/>
               </a:rPr>
-              <a:t>Cross-cancel before multiplying to simplify</a:t>
+              <a:t>Step 2: Multiply or divide as normal (KFC for division).</a:t>
             </a:r>
             <a:endParaRPr lang="en-US" sz="1500" dirty="0"/>
           </a:p>
           <a:p>
             <a:pPr marL="342900" indent="-342900">
               <a:spcAft>
-                <a:spcPts val="1000"/>
+                <a:spcPts val="800"/>
               </a:spcAft>
               <a:buSzPct val="100000"/>
               <a:buChar char="•"/>
@@ -2495,20 +3367,20 @@
             <a:r>
               <a:rPr lang="en-US" sz="1500" dirty="0">
                 <a:solidFill>
-                  <a:srgbClr val="CADCFC"/>
+                  <a:srgbClr val="3D3A36"/>
                 </a:solidFill>
                 <a:latin typeface="Calibri" pitchFamily="34" charset="0"/>
                 <a:ea typeface="Calibri" pitchFamily="34" charset="-122"/>
                 <a:cs typeface="Calibri" pitchFamily="34" charset="-120"/>
               </a:rPr>
-              <a:t>Divide: Keep, Flip, Change (KFC) — then multiply</a:t>
+              <a:t>Step 3: Simplify and convert back to a mixed number.</a:t>
             </a:r>
             <a:endParaRPr lang="en-US" sz="1500" dirty="0"/>
           </a:p>
           <a:p>
             <a:pPr marL="342900" indent="-342900">
               <a:spcAft>
-                <a:spcPts val="1000"/>
+                <a:spcPts val="800"/>
               </a:spcAft>
               <a:buSzPct val="100000"/>
               <a:buChar char="•"/>
@@ -2516,20 +3388,20 @@
             <a:r>
               <a:rPr lang="en-US" sz="1500" dirty="0">
                 <a:solidFill>
-                  <a:srgbClr val="CADCFC"/>
+                  <a:srgbClr val="3D3A36"/>
                 </a:solidFill>
                 <a:latin typeface="Calibri" pitchFamily="34" charset="0"/>
                 <a:ea typeface="Calibri" pitchFamily="34" charset="-122"/>
                 <a:cs typeface="Calibri" pitchFamily="34" charset="-120"/>
               </a:rPr>
-              <a:t>Convert mixed numbers to improper fractions first</a:t>
+              <a:t>Example: 2½ × 1⅓ = 5/2 × 4/3 = 20/6 = 10/3 = 3⅓.</a:t>
             </a:r>
             <a:endParaRPr lang="en-US" sz="1500" dirty="0"/>
           </a:p>
           <a:p>
             <a:pPr marL="342900" indent="-342900">
               <a:spcAft>
-                <a:spcPts val="1000"/>
+                <a:spcPts val="800"/>
               </a:spcAft>
               <a:buSzPct val="100000"/>
               <a:buChar char="•"/>
@@ -2537,18 +3409,110 @@
             <a:r>
               <a:rPr lang="en-US" sz="1500" dirty="0">
                 <a:solidFill>
-                  <a:srgbClr val="CADCFC"/>
+                  <a:srgbClr val="3D3A36"/>
                 </a:solidFill>
                 <a:latin typeface="Calibri" pitchFamily="34" charset="0"/>
                 <a:ea typeface="Calibri" pitchFamily="34" charset="-122"/>
                 <a:cs typeface="Calibri" pitchFamily="34" charset="-120"/>
               </a:rPr>
-              <a:t>Always simplify your final answer</a:t>
+              <a:t>NEVER try to multiply whole numbers and fractions separately — convert first.</a:t>
             </a:r>
             <a:endParaRPr lang="en-US" sz="1500" dirty="0"/>
           </a:p>
         </p:txBody>
       </p:sp>
+    </p:spTree>
+  </p:cSld>
+  <p:clrMapOvr>
+    <a:masterClrMapping/>
+  </p:clrMapOvr>
+</p:sld>
+</file>
+
+<file path=ppt/slides/slide6.xml><?xml version="1.0" encoding="utf-8"?>
+<p:sld xmlns:a="http://schemas.openxmlformats.org/drawingml/2006/main" xmlns:r="http://schemas.openxmlformats.org/officeDocument/2006/relationships" xmlns:p="http://schemas.openxmlformats.org/presentationml/2006/main">
+  <p:cSld name="Slide 6">
+    <p:bg>
+      <p:bgPr>
+        <a:solidFill>
+          <a:srgbClr val="FAF8F5"/>
+        </a:solidFill>
+      </p:bgPr>
+    </p:bg>
+    <p:spTree>
+      <p:nvGrpSpPr>
+        <p:cNvPr id="1" name=""/>
+        <p:cNvGrpSpPr/>
+        <p:nvPr/>
+      </p:nvGrpSpPr>
+      <p:grpSpPr>
+        <a:xfrm>
+          <a:off x="0" y="0"/>
+          <a:ext cx="0" cy="0"/>
+          <a:chOff x="0" y="0"/>
+          <a:chExt cx="0" cy="0"/>
+        </a:xfrm>
+      </p:grpSpPr>
+      <p:sp>
+        <p:nvSpPr>
+          <p:cNvPr id="2" name="Shape 0"/>
+          <p:cNvSpPr/>
+          <p:nvPr/>
+        </p:nvSpPr>
+        <p:spPr>
+          <a:xfrm>
+            <a:off x="0" y="0"/>
+            <a:ext cx="9144000" cy="822960"/>
+          </a:xfrm>
+          <a:prstGeom prst="rect">
+            <a:avLst/>
+          </a:prstGeom>
+          <a:solidFill>
+            <a:srgbClr val="FFFFFF"/>
+          </a:solidFill>
+          <a:ln/>
+        </p:spPr>
+      </p:sp>
+      <p:sp>
+        <p:nvSpPr>
+          <p:cNvPr id="3" name="Shape 1"/>
+          <p:cNvSpPr/>
+          <p:nvPr/>
+        </p:nvSpPr>
+        <p:spPr>
+          <a:xfrm>
+            <a:off x="0" y="804672"/>
+            <a:ext cx="9144000" cy="27432"/>
+          </a:xfrm>
+          <a:prstGeom prst="rect">
+            <a:avLst/>
+          </a:prstGeom>
+          <a:solidFill>
+            <a:srgbClr val="E5E2DC"/>
+          </a:solidFill>
+          <a:ln/>
+        </p:spPr>
+      </p:sp>
+      <p:sp>
+        <p:nvSpPr>
+          <p:cNvPr id="4" name="Shape 2"/>
+          <p:cNvSpPr/>
+          <p:nvPr/>
+        </p:nvSpPr>
+        <p:spPr>
+          <a:xfrm>
+            <a:off x="548640" y="201168"/>
+            <a:ext cx="54864" cy="420624"/>
+          </a:xfrm>
+          <a:prstGeom prst="rect">
+            <a:avLst/>
+          </a:prstGeom>
+          <a:solidFill>
+            <a:srgbClr val="2A9D8F"/>
+          </a:solidFill>
+          <a:ln/>
+        </p:spPr>
+      </p:sp>
       <p:sp>
         <p:nvSpPr>
           <p:cNvPr id="5" name="Text 3"/>
@@ -2557,8 +3521,8 @@
         </p:nvSpPr>
         <p:spPr>
           <a:xfrm>
-            <a:off x="731520" y="4572000"/>
-            <a:ext cx="7772400" cy="365760"/>
+            <a:off x="777240" y="137160"/>
+            <a:ext cx="7772400" cy="548640"/>
           </a:xfrm>
           <a:prstGeom prst="rect">
             <a:avLst/>
@@ -2567,24 +3531,783 @@
           <a:ln/>
         </p:spPr>
         <p:txBody>
-          <a:bodyPr wrap="square" rtlCol="0" anchor="ctr"/>
+          <a:bodyPr wrap="square" lIns="0" tIns="0" rIns="0" bIns="0" rtlCol="0" anchor="ctr"/>
           <a:lstStyle/>
           <a:p>
             <a:pPr indent="0" marL="0">
               <a:buNone/>
             </a:pPr>
             <a:r>
-              <a:rPr lang="en-US" sz="1100" dirty="0">
-                <a:solidFill>
-                  <a:srgbClr val="E9C46A"/>
+              <a:rPr lang="en-US" sz="2000" b="1" dirty="0">
+                <a:solidFill>
+                  <a:srgbClr val="1B2A4A"/>
+                </a:solidFill>
+                <a:latin typeface="Georgia" pitchFamily="34" charset="0"/>
+                <a:ea typeface="Georgia" pitchFamily="34" charset="-122"/>
+                <a:cs typeface="Georgia" pitchFamily="34" charset="-120"/>
+              </a:rPr>
+              <a:t>Check Your Understanding</a:t>
+            </a:r>
+            <a:endParaRPr lang="en-US" sz="2000" dirty="0"/>
+          </a:p>
+        </p:txBody>
+      </p:sp>
+      <p:sp>
+        <p:nvSpPr>
+          <p:cNvPr id="6" name="Shape 4"/>
+          <p:cNvSpPr/>
+          <p:nvPr/>
+        </p:nvSpPr>
+        <p:spPr>
+          <a:xfrm>
+            <a:off x="731520" y="1051560"/>
+            <a:ext cx="7680960" cy="438912"/>
+          </a:xfrm>
+          <a:prstGeom prst="rect">
+            <a:avLst/>
+          </a:prstGeom>
+          <a:solidFill>
+            <a:srgbClr val="FFFFFF"/>
+          </a:solidFill>
+          <a:ln/>
+        </p:spPr>
+      </p:sp>
+      <p:sp>
+        <p:nvSpPr>
+          <p:cNvPr id="7" name="Text 5"/>
+          <p:cNvSpPr/>
+          <p:nvPr/>
+        </p:nvSpPr>
+        <p:spPr>
+          <a:xfrm>
+            <a:off x="868680" y="1051560"/>
+            <a:ext cx="320040" cy="438912"/>
+          </a:xfrm>
+          <a:prstGeom prst="rect">
+            <a:avLst/>
+          </a:prstGeom>
+          <a:noFill/>
+          <a:ln/>
+        </p:spPr>
+        <p:txBody>
+          <a:bodyPr wrap="square" rtlCol="0" anchor="ctr"/>
+          <a:lstStyle/>
+          <a:p>
+            <a:pPr indent="0" marL="0">
+              <a:buNone/>
+            </a:pPr>
+            <a:r>
+              <a:rPr lang="en-US" sz="1400" dirty="0">
+                <a:solidFill>
+                  <a:srgbClr val="2A9D8F"/>
+                </a:solidFill>
+              </a:rPr>
+              <a:t>☐</a:t>
+            </a:r>
+            <a:endParaRPr lang="en-US" sz="1400" dirty="0"/>
+          </a:p>
+        </p:txBody>
+      </p:sp>
+      <p:sp>
+        <p:nvSpPr>
+          <p:cNvPr id="8" name="Text 6"/>
+          <p:cNvSpPr/>
+          <p:nvPr/>
+        </p:nvSpPr>
+        <p:spPr>
+          <a:xfrm>
+            <a:off x="1234440" y="1051560"/>
+            <a:ext cx="6949440" cy="438912"/>
+          </a:xfrm>
+          <a:prstGeom prst="rect">
+            <a:avLst/>
+          </a:prstGeom>
+          <a:noFill/>
+          <a:ln/>
+        </p:spPr>
+        <p:txBody>
+          <a:bodyPr wrap="square" rtlCol="0" anchor="ctr"/>
+          <a:lstStyle/>
+          <a:p>
+            <a:pPr indent="0" marL="0">
+              <a:buNone/>
+            </a:pPr>
+            <a:r>
+              <a:rPr lang="en-US" sz="1300" dirty="0">
+                <a:solidFill>
+                  <a:srgbClr val="3D3A36"/>
                 </a:solidFill>
                 <a:latin typeface="Calibri" pitchFamily="34" charset="0"/>
                 <a:ea typeface="Calibri" pitchFamily="34" charset="-122"/>
                 <a:cs typeface="Calibri" pitchFamily="34" charset="-120"/>
               </a:rPr>
+              <a:t>I can multiply fractions (multiply tops, multiply bottoms)</a:t>
+            </a:r>
+            <a:endParaRPr lang="en-US" sz="1300" dirty="0"/>
+          </a:p>
+        </p:txBody>
+      </p:sp>
+      <p:sp>
+        <p:nvSpPr>
+          <p:cNvPr id="9" name="Shape 7"/>
+          <p:cNvSpPr/>
+          <p:nvPr/>
+        </p:nvSpPr>
+        <p:spPr>
+          <a:xfrm>
+            <a:off x="731520" y="1554480"/>
+            <a:ext cx="7680960" cy="438912"/>
+          </a:xfrm>
+          <a:prstGeom prst="rect">
+            <a:avLst/>
+          </a:prstGeom>
+          <a:solidFill>
+            <a:srgbClr val="F8F6F3"/>
+          </a:solidFill>
+          <a:ln/>
+        </p:spPr>
+      </p:sp>
+      <p:sp>
+        <p:nvSpPr>
+          <p:cNvPr id="10" name="Text 8"/>
+          <p:cNvSpPr/>
+          <p:nvPr/>
+        </p:nvSpPr>
+        <p:spPr>
+          <a:xfrm>
+            <a:off x="868680" y="1554480"/>
+            <a:ext cx="320040" cy="438912"/>
+          </a:xfrm>
+          <a:prstGeom prst="rect">
+            <a:avLst/>
+          </a:prstGeom>
+          <a:noFill/>
+          <a:ln/>
+        </p:spPr>
+        <p:txBody>
+          <a:bodyPr wrap="square" rtlCol="0" anchor="ctr"/>
+          <a:lstStyle/>
+          <a:p>
+            <a:pPr indent="0" marL="0">
+              <a:buNone/>
+            </a:pPr>
+            <a:r>
+              <a:rPr lang="en-US" sz="1400" dirty="0">
+                <a:solidFill>
+                  <a:srgbClr val="2A9D8F"/>
+                </a:solidFill>
+              </a:rPr>
+              <a:t>☐</a:t>
+            </a:r>
+            <a:endParaRPr lang="en-US" sz="1400" dirty="0"/>
+          </a:p>
+        </p:txBody>
+      </p:sp>
+      <p:sp>
+        <p:nvSpPr>
+          <p:cNvPr id="11" name="Text 9"/>
+          <p:cNvSpPr/>
+          <p:nvPr/>
+        </p:nvSpPr>
+        <p:spPr>
+          <a:xfrm>
+            <a:off x="1234440" y="1554480"/>
+            <a:ext cx="6949440" cy="438912"/>
+          </a:xfrm>
+          <a:prstGeom prst="rect">
+            <a:avLst/>
+          </a:prstGeom>
+          <a:noFill/>
+          <a:ln/>
+        </p:spPr>
+        <p:txBody>
+          <a:bodyPr wrap="square" rtlCol="0" anchor="ctr"/>
+          <a:lstStyle/>
+          <a:p>
+            <a:pPr indent="0" marL="0">
+              <a:buNone/>
+            </a:pPr>
+            <a:r>
+              <a:rPr lang="en-US" sz="1300" dirty="0">
+                <a:solidFill>
+                  <a:srgbClr val="3D3A36"/>
+                </a:solidFill>
+                <a:latin typeface="Calibri" pitchFamily="34" charset="0"/>
+                <a:ea typeface="Calibri" pitchFamily="34" charset="-122"/>
+                <a:cs typeface="Calibri" pitchFamily="34" charset="-120"/>
+              </a:rPr>
+              <a:t>I can divide fractions using KFC (Keep, Flip, Change)</a:t>
+            </a:r>
+            <a:endParaRPr lang="en-US" sz="1300" dirty="0"/>
+          </a:p>
+        </p:txBody>
+      </p:sp>
+      <p:sp>
+        <p:nvSpPr>
+          <p:cNvPr id="12" name="Shape 10"/>
+          <p:cNvSpPr/>
+          <p:nvPr/>
+        </p:nvSpPr>
+        <p:spPr>
+          <a:xfrm>
+            <a:off x="731520" y="2057400"/>
+            <a:ext cx="7680960" cy="438912"/>
+          </a:xfrm>
+          <a:prstGeom prst="rect">
+            <a:avLst/>
+          </a:prstGeom>
+          <a:solidFill>
+            <a:srgbClr val="FFFFFF"/>
+          </a:solidFill>
+          <a:ln/>
+        </p:spPr>
+      </p:sp>
+      <p:sp>
+        <p:nvSpPr>
+          <p:cNvPr id="13" name="Text 11"/>
+          <p:cNvSpPr/>
+          <p:nvPr/>
+        </p:nvSpPr>
+        <p:spPr>
+          <a:xfrm>
+            <a:off x="868680" y="2057400"/>
+            <a:ext cx="320040" cy="438912"/>
+          </a:xfrm>
+          <a:prstGeom prst="rect">
+            <a:avLst/>
+          </a:prstGeom>
+          <a:noFill/>
+          <a:ln/>
+        </p:spPr>
+        <p:txBody>
+          <a:bodyPr wrap="square" rtlCol="0" anchor="ctr"/>
+          <a:lstStyle/>
+          <a:p>
+            <a:pPr indent="0" marL="0">
+              <a:buNone/>
+            </a:pPr>
+            <a:r>
+              <a:rPr lang="en-US" sz="1400" dirty="0">
+                <a:solidFill>
+                  <a:srgbClr val="2A9D8F"/>
+                </a:solidFill>
+              </a:rPr>
+              <a:t>☐</a:t>
+            </a:r>
+            <a:endParaRPr lang="en-US" sz="1400" dirty="0"/>
+          </a:p>
+        </p:txBody>
+      </p:sp>
+      <p:sp>
+        <p:nvSpPr>
+          <p:cNvPr id="14" name="Text 12"/>
+          <p:cNvSpPr/>
+          <p:nvPr/>
+        </p:nvSpPr>
+        <p:spPr>
+          <a:xfrm>
+            <a:off x="1234440" y="2057400"/>
+            <a:ext cx="6949440" cy="438912"/>
+          </a:xfrm>
+          <a:prstGeom prst="rect">
+            <a:avLst/>
+          </a:prstGeom>
+          <a:noFill/>
+          <a:ln/>
+        </p:spPr>
+        <p:txBody>
+          <a:bodyPr wrap="square" rtlCol="0" anchor="ctr"/>
+          <a:lstStyle/>
+          <a:p>
+            <a:pPr indent="0" marL="0">
+              <a:buNone/>
+            </a:pPr>
+            <a:r>
+              <a:rPr lang="en-US" sz="1300" dirty="0">
+                <a:solidFill>
+                  <a:srgbClr val="3D3A36"/>
+                </a:solidFill>
+                <a:latin typeface="Calibri" pitchFamily="34" charset="0"/>
+                <a:ea typeface="Calibri" pitchFamily="34" charset="-122"/>
+                <a:cs typeface="Calibri" pitchFamily="34" charset="-120"/>
+              </a:rPr>
+              <a:t>I can use cross-cancelling to simplify before multiplying</a:t>
+            </a:r>
+            <a:endParaRPr lang="en-US" sz="1300" dirty="0"/>
+          </a:p>
+        </p:txBody>
+      </p:sp>
+      <p:sp>
+        <p:nvSpPr>
+          <p:cNvPr id="15" name="Shape 13"/>
+          <p:cNvSpPr/>
+          <p:nvPr/>
+        </p:nvSpPr>
+        <p:spPr>
+          <a:xfrm>
+            <a:off x="731520" y="2560320"/>
+            <a:ext cx="7680960" cy="438912"/>
+          </a:xfrm>
+          <a:prstGeom prst="rect">
+            <a:avLst/>
+          </a:prstGeom>
+          <a:solidFill>
+            <a:srgbClr val="F8F6F3"/>
+          </a:solidFill>
+          <a:ln/>
+        </p:spPr>
+      </p:sp>
+      <p:sp>
+        <p:nvSpPr>
+          <p:cNvPr id="16" name="Text 14"/>
+          <p:cNvSpPr/>
+          <p:nvPr/>
+        </p:nvSpPr>
+        <p:spPr>
+          <a:xfrm>
+            <a:off x="868680" y="2560320"/>
+            <a:ext cx="320040" cy="438912"/>
+          </a:xfrm>
+          <a:prstGeom prst="rect">
+            <a:avLst/>
+          </a:prstGeom>
+          <a:noFill/>
+          <a:ln/>
+        </p:spPr>
+        <p:txBody>
+          <a:bodyPr wrap="square" rtlCol="0" anchor="ctr"/>
+          <a:lstStyle/>
+          <a:p>
+            <a:pPr indent="0" marL="0">
+              <a:buNone/>
+            </a:pPr>
+            <a:r>
+              <a:rPr lang="en-US" sz="1400" dirty="0">
+                <a:solidFill>
+                  <a:srgbClr val="2A9D8F"/>
+                </a:solidFill>
+              </a:rPr>
+              <a:t>☐</a:t>
+            </a:r>
+            <a:endParaRPr lang="en-US" sz="1400" dirty="0"/>
+          </a:p>
+        </p:txBody>
+      </p:sp>
+      <p:sp>
+        <p:nvSpPr>
+          <p:cNvPr id="17" name="Text 15"/>
+          <p:cNvSpPr/>
+          <p:nvPr/>
+        </p:nvSpPr>
+        <p:spPr>
+          <a:xfrm>
+            <a:off x="1234440" y="2560320"/>
+            <a:ext cx="6949440" cy="438912"/>
+          </a:xfrm>
+          <a:prstGeom prst="rect">
+            <a:avLst/>
+          </a:prstGeom>
+          <a:noFill/>
+          <a:ln/>
+        </p:spPr>
+        <p:txBody>
+          <a:bodyPr wrap="square" rtlCol="0" anchor="ctr"/>
+          <a:lstStyle/>
+          <a:p>
+            <a:pPr indent="0" marL="0">
+              <a:buNone/>
+            </a:pPr>
+            <a:r>
+              <a:rPr lang="en-US" sz="1300" dirty="0">
+                <a:solidFill>
+                  <a:srgbClr val="3D3A36"/>
+                </a:solidFill>
+                <a:latin typeface="Calibri" pitchFamily="34" charset="0"/>
+                <a:ea typeface="Calibri" pitchFamily="34" charset="-122"/>
+                <a:cs typeface="Calibri" pitchFamily="34" charset="-120"/>
+              </a:rPr>
+              <a:t>I can multiply and divide mixed numbers</a:t>
+            </a:r>
+            <a:endParaRPr lang="en-US" sz="1300" dirty="0"/>
+          </a:p>
+        </p:txBody>
+      </p:sp>
+      <p:sp>
+        <p:nvSpPr>
+          <p:cNvPr id="18" name="Shape 16"/>
+          <p:cNvSpPr/>
+          <p:nvPr/>
+        </p:nvSpPr>
+        <p:spPr>
+          <a:xfrm>
+            <a:off x="731520" y="3063240"/>
+            <a:ext cx="7680960" cy="438912"/>
+          </a:xfrm>
+          <a:prstGeom prst="rect">
+            <a:avLst/>
+          </a:prstGeom>
+          <a:solidFill>
+            <a:srgbClr val="FFFFFF"/>
+          </a:solidFill>
+          <a:ln/>
+        </p:spPr>
+      </p:sp>
+      <p:sp>
+        <p:nvSpPr>
+          <p:cNvPr id="19" name="Text 17"/>
+          <p:cNvSpPr/>
+          <p:nvPr/>
+        </p:nvSpPr>
+        <p:spPr>
+          <a:xfrm>
+            <a:off x="868680" y="3063240"/>
+            <a:ext cx="320040" cy="438912"/>
+          </a:xfrm>
+          <a:prstGeom prst="rect">
+            <a:avLst/>
+          </a:prstGeom>
+          <a:noFill/>
+          <a:ln/>
+        </p:spPr>
+        <p:txBody>
+          <a:bodyPr wrap="square" rtlCol="0" anchor="ctr"/>
+          <a:lstStyle/>
+          <a:p>
+            <a:pPr indent="0" marL="0">
+              <a:buNone/>
+            </a:pPr>
+            <a:r>
+              <a:rPr lang="en-US" sz="1400" dirty="0">
+                <a:solidFill>
+                  <a:srgbClr val="2A9D8F"/>
+                </a:solidFill>
+              </a:rPr>
+              <a:t>☐</a:t>
+            </a:r>
+            <a:endParaRPr lang="en-US" sz="1400" dirty="0"/>
+          </a:p>
+        </p:txBody>
+      </p:sp>
+      <p:sp>
+        <p:nvSpPr>
+          <p:cNvPr id="20" name="Text 18"/>
+          <p:cNvSpPr/>
+          <p:nvPr/>
+        </p:nvSpPr>
+        <p:spPr>
+          <a:xfrm>
+            <a:off x="1234440" y="3063240"/>
+            <a:ext cx="6949440" cy="438912"/>
+          </a:xfrm>
+          <a:prstGeom prst="rect">
+            <a:avLst/>
+          </a:prstGeom>
+          <a:noFill/>
+          <a:ln/>
+        </p:spPr>
+        <p:txBody>
+          <a:bodyPr wrap="square" rtlCol="0" anchor="ctr"/>
+          <a:lstStyle/>
+          <a:p>
+            <a:pPr indent="0" marL="0">
+              <a:buNone/>
+            </a:pPr>
+            <a:r>
+              <a:rPr lang="en-US" sz="1300" dirty="0">
+                <a:solidFill>
+                  <a:srgbClr val="3D3A36"/>
+                </a:solidFill>
+                <a:latin typeface="Calibri" pitchFamily="34" charset="0"/>
+                <a:ea typeface="Calibri" pitchFamily="34" charset="-122"/>
+                <a:cs typeface="Calibri" pitchFamily="34" charset="-120"/>
+              </a:rPr>
+              <a:t>I always simplify my final answer</a:t>
+            </a:r>
+            <a:endParaRPr lang="en-US" sz="1300" dirty="0"/>
+          </a:p>
+        </p:txBody>
+      </p:sp>
+      <p:sp>
+        <p:nvSpPr>
+          <p:cNvPr id="21" name="Shape 19"/>
+          <p:cNvSpPr/>
+          <p:nvPr/>
+        </p:nvSpPr>
+        <p:spPr>
+          <a:xfrm>
+            <a:off x="731520" y="3749040"/>
+            <a:ext cx="7680960" cy="594360"/>
+          </a:xfrm>
+          <a:prstGeom prst="rect">
+            <a:avLst/>
+          </a:prstGeom>
+          <a:solidFill>
+            <a:srgbClr val="E8F5F3"/>
+          </a:solidFill>
+          <a:ln/>
+          <a:effectLst>
+            <a:outerShdw sx="100000" sy="100000" kx="0" ky="0" algn="bl" rotWithShape="0" blurRad="50800" dist="25400" dir="8100000">
+              <a:srgbClr val="000000">
+                <a:alpha val="10000"/>
+              </a:srgbClr>
+            </a:outerShdw>
+          </a:effectLst>
+        </p:spPr>
+      </p:sp>
+      <p:sp>
+        <p:nvSpPr>
+          <p:cNvPr id="22" name="Text 20"/>
+          <p:cNvSpPr/>
+          <p:nvPr/>
+        </p:nvSpPr>
+        <p:spPr>
+          <a:xfrm>
+            <a:off x="914400" y="3749040"/>
+            <a:ext cx="7315200" cy="594360"/>
+          </a:xfrm>
+          <a:prstGeom prst="rect">
+            <a:avLst/>
+          </a:prstGeom>
+          <a:noFill/>
+          <a:ln/>
+        </p:spPr>
+        <p:txBody>
+          <a:bodyPr wrap="square" rtlCol="0" anchor="ctr"/>
+          <a:lstStyle/>
+          <a:p>
+            <a:pPr indent="0" marL="0">
+              <a:buNone/>
+            </a:pPr>
+            <a:r>
+              <a:rPr lang="en-US" sz="1200" b="1" dirty="0">
+                <a:solidFill>
+                  <a:srgbClr val="2A9D8F"/>
+                </a:solidFill>
+                <a:latin typeface="Calibri" pitchFamily="34" charset="0"/>
+                <a:ea typeface="Calibri" pitchFamily="34" charset="-122"/>
+                <a:cs typeface="Calibri" pitchFamily="34" charset="-120"/>
+              </a:rPr>
+              <a:t>Key Idea: </a:t>
+            </a:r>
+            <a:pPr indent="0" marL="0">
+              <a:buNone/>
+            </a:pPr>
+            <a:r>
+              <a:rPr lang="en-US" sz="1200" i="1" dirty="0">
+                <a:solidFill>
+                  <a:srgbClr val="3D3A36"/>
+                </a:solidFill>
+                <a:latin typeface="Calibri" pitchFamily="34" charset="0"/>
+                <a:ea typeface="Calibri" pitchFamily="34" charset="-122"/>
+                <a:cs typeface="Calibri" pitchFamily="34" charset="-120"/>
+              </a:rPr>
+              <a:t>To multiply: tops × tops, bottoms × bottoms. To divide: Keep, Flip, Change!</a:t>
+            </a:r>
+            <a:endParaRPr lang="en-US" sz="1200" dirty="0"/>
+          </a:p>
+        </p:txBody>
+      </p:sp>
+    </p:spTree>
+  </p:cSld>
+  <p:clrMapOvr>
+    <a:masterClrMapping/>
+  </p:clrMapOvr>
+</p:sld>
+</file>
+
+<file path=ppt/slides/slide7.xml><?xml version="1.0" encoding="utf-8"?>
+<p:sld xmlns:a="http://schemas.openxmlformats.org/drawingml/2006/main" xmlns:r="http://schemas.openxmlformats.org/officeDocument/2006/relationships" xmlns:p="http://schemas.openxmlformats.org/presentationml/2006/main">
+  <p:cSld name="Slide 7">
+    <p:spTree>
+      <p:nvGrpSpPr>
+        <p:cNvPr id="1" name=""/>
+        <p:cNvGrpSpPr/>
+        <p:nvPr/>
+      </p:nvGrpSpPr>
+      <p:grpSpPr>
+        <a:xfrm>
+          <a:off x="0" y="0"/>
+          <a:ext cx="0" cy="0"/>
+          <a:chOff x="0" y="0"/>
+          <a:chExt cx="0" cy="0"/>
+        </a:xfrm>
+      </p:grpSpPr>
+      <p:sp>
+        <p:nvSpPr>
+          <p:cNvPr id="2" name="Shape 0"/>
+          <p:cNvSpPr/>
+          <p:nvPr/>
+        </p:nvSpPr>
+        <p:spPr>
+          <a:xfrm>
+            <a:off x="0" y="0"/>
+            <a:ext cx="9144000" cy="5143500"/>
+          </a:xfrm>
+          <a:prstGeom prst="rect">
+            <a:avLst/>
+          </a:prstGeom>
+          <a:solidFill>
+            <a:srgbClr val="1B2A4A"/>
+          </a:solidFill>
+          <a:ln/>
+        </p:spPr>
+      </p:sp>
+      <p:sp>
+        <p:nvSpPr>
+          <p:cNvPr id="3" name="Shape 1"/>
+          <p:cNvSpPr/>
+          <p:nvPr/>
+        </p:nvSpPr>
+        <p:spPr>
+          <a:xfrm>
+            <a:off x="0" y="4777740"/>
+            <a:ext cx="9144000" cy="365760"/>
+          </a:xfrm>
+          <a:prstGeom prst="rect">
+            <a:avLst/>
+          </a:prstGeom>
+          <a:solidFill>
+            <a:srgbClr val="2A9D8F"/>
+          </a:solidFill>
+          <a:ln/>
+        </p:spPr>
+      </p:sp>
+      <p:sp>
+        <p:nvSpPr>
+          <p:cNvPr id="4" name="Shape 2"/>
+          <p:cNvSpPr/>
+          <p:nvPr/>
+        </p:nvSpPr>
+        <p:spPr>
+          <a:xfrm>
+            <a:off x="-914400" y="-914400"/>
+            <a:ext cx="3657600" cy="3657600"/>
+          </a:xfrm>
+          <a:prstGeom prst="ellipse">
+            <a:avLst/>
+          </a:prstGeom>
+          <a:solidFill>
+            <a:srgbClr val="2A9D8F">
+              <a:alpha val="10000"/>
+            </a:srgbClr>
+          </a:solidFill>
+          <a:ln/>
+        </p:spPr>
+      </p:sp>
+      <p:sp>
+        <p:nvSpPr>
+          <p:cNvPr id="5" name="Text 3"/>
+          <p:cNvSpPr/>
+          <p:nvPr/>
+        </p:nvSpPr>
+        <p:spPr>
+          <a:xfrm>
+            <a:off x="731520" y="1463040"/>
+            <a:ext cx="7680960" cy="822960"/>
+          </a:xfrm>
+          <a:prstGeom prst="rect">
+            <a:avLst/>
+          </a:prstGeom>
+          <a:noFill/>
+          <a:ln/>
+        </p:spPr>
+        <p:txBody>
+          <a:bodyPr wrap="square" rtlCol="0" anchor="ctr"/>
+          <a:lstStyle/>
+          <a:p>
+            <a:pPr algn="ctr" indent="0" marL="0">
+              <a:buNone/>
+            </a:pPr>
+            <a:r>
+              <a:rPr lang="en-US" sz="3400" b="1" dirty="0">
+                <a:solidFill>
+                  <a:srgbClr val="FFFFFF"/>
+                </a:solidFill>
+                <a:latin typeface="Georgia" pitchFamily="34" charset="0"/>
+                <a:ea typeface="Georgia" pitchFamily="34" charset="-122"/>
+                <a:cs typeface="Georgia" pitchFamily="34" charset="-120"/>
+              </a:rPr>
+              <a:t>Review &amp; Practise</a:t>
+            </a:r>
+            <a:endParaRPr lang="en-US" sz="3400" dirty="0"/>
+          </a:p>
+        </p:txBody>
+      </p:sp>
+      <p:sp>
+        <p:nvSpPr>
+          <p:cNvPr id="6" name="Text 4"/>
+          <p:cNvSpPr/>
+          <p:nvPr/>
+        </p:nvSpPr>
+        <p:spPr>
+          <a:xfrm>
+            <a:off x="731520" y="2468880"/>
+            <a:ext cx="7680960" cy="457200"/>
+          </a:xfrm>
+          <a:prstGeom prst="rect">
+            <a:avLst/>
+          </a:prstGeom>
+          <a:noFill/>
+          <a:ln/>
+        </p:spPr>
+        <p:txBody>
+          <a:bodyPr wrap="square" rtlCol="0" anchor="ctr"/>
+          <a:lstStyle/>
+          <a:p>
+            <a:pPr algn="ctr" indent="0" marL="0">
+              <a:buNone/>
+            </a:pPr>
+            <a:r>
+              <a:rPr lang="en-US" sz="1800" dirty="0">
+                <a:solidFill>
+                  <a:srgbClr val="2A9D8F"/>
+                </a:solidFill>
+                <a:latin typeface="Calibri" pitchFamily="34" charset="0"/>
+                <a:ea typeface="Calibri" pitchFamily="34" charset="-122"/>
+                <a:cs typeface="Calibri" pitchFamily="34" charset="-120"/>
+              </a:rPr>
               <a:t>mrzocchi.com</a:t>
             </a:r>
-            <a:endParaRPr lang="en-US" sz="1100" dirty="0"/>
+            <a:endParaRPr lang="en-US" sz="1800" dirty="0"/>
+          </a:p>
+        </p:txBody>
+      </p:sp>
+      <p:sp>
+        <p:nvSpPr>
+          <p:cNvPr id="7" name="Text 5"/>
+          <p:cNvSpPr/>
+          <p:nvPr/>
+        </p:nvSpPr>
+        <p:spPr>
+          <a:xfrm>
+            <a:off x="731520" y="3108960"/>
+            <a:ext cx="7680960" cy="457200"/>
+          </a:xfrm>
+          <a:prstGeom prst="rect">
+            <a:avLst/>
+          </a:prstGeom>
+          <a:noFill/>
+          <a:ln/>
+        </p:spPr>
+        <p:txBody>
+          <a:bodyPr wrap="square" rtlCol="0" anchor="ctr"/>
+          <a:lstStyle/>
+          <a:p>
+            <a:pPr algn="ctr" indent="0" marL="0">
+              <a:buNone/>
+            </a:pPr>
+            <a:r>
+              <a:rPr lang="en-US" sz="1300" dirty="0">
+                <a:solidFill>
+                  <a:srgbClr val="9B9690"/>
+                </a:solidFill>
+                <a:latin typeface="Calibri" pitchFamily="34" charset="0"/>
+                <a:ea typeface="Calibri" pitchFamily="34" charset="-122"/>
+                <a:cs typeface="Calibri" pitchFamily="34" charset="-120"/>
+              </a:rPr>
+              <a:t>Use the Self-Quiz, Review Games, and Practice Builder to test yourself.</a:t>
+            </a:r>
+            <a:endParaRPr lang="en-US" sz="1300" dirty="0"/>
           </a:p>
         </p:txBody>
       </p:sp>

--- a/static/ppts/G6_Math_T2_Multiply_Divide_Fractions.pptx
+++ b/static/ppts/G6_Math_T2_Multiply_Divide_Fractions.pptx
@@ -16,8 +16,8 @@
   <p:notesMasterIdLst>
     <p:notesMasterId r:id="rId9"/>
   </p:notesMasterIdLst>
-  <p:sldSz cx="9144000" cy="5143500"/>
-  <p:notesSz cx="5143500" cy="9144000"/>
+  <p:sldSz cx="12192000" cy="6858000"/>
+  <p:notesSz cx="6858000" cy="12192000"/>
   <p:defaultTextStyle>
     <a:lvl1pPr marL="0" algn="l" defTabSz="914400" rtl="0" eaLnBrk="1" latinLnBrk="0" hangingPunct="1">
       <a:defRPr sz="1800" kern="1200">
@@ -1388,6 +1388,13 @@
 <file path=ppt/slides/slide1.xml><?xml version="1.0" encoding="utf-8"?>
 <p:sld xmlns:a="http://schemas.openxmlformats.org/drawingml/2006/main" xmlns:r="http://schemas.openxmlformats.org/officeDocument/2006/relationships" xmlns:p="http://schemas.openxmlformats.org/presentationml/2006/main">
   <p:cSld name="Slide 1">
+    <p:bg>
+      <p:bgPr>
+        <a:solidFill>
+          <a:srgbClr val="2A9D8F"/>
+        </a:solidFill>
+      </p:bgPr>
+    </p:bg>
     <p:spTree>
       <p:nvGrpSpPr>
         <p:cNvPr id="1" name=""/>
@@ -1410,55 +1417,15 @@
         </p:nvSpPr>
         <p:spPr>
           <a:xfrm>
-            <a:off x="0" y="0"/>
-            <a:ext cx="9144000" cy="5143500"/>
-          </a:xfrm>
-          <a:prstGeom prst="rect">
+            <a:off x="7772400" y="-914400"/>
+            <a:ext cx="3657600" cy="3657600"/>
+          </a:xfrm>
+          <a:prstGeom prst="ellipse">
             <a:avLst/>
           </a:prstGeom>
           <a:solidFill>
-            <a:srgbClr val="1B2A4A"/>
-          </a:solidFill>
-          <a:ln/>
-        </p:spPr>
-      </p:sp>
-      <p:sp>
-        <p:nvSpPr>
-          <p:cNvPr id="3" name="Shape 1"/>
-          <p:cNvSpPr/>
-          <p:nvPr/>
-        </p:nvSpPr>
-        <p:spPr>
-          <a:xfrm>
-            <a:off x="0" y="4777740"/>
-            <a:ext cx="9144000" cy="365760"/>
-          </a:xfrm>
-          <a:prstGeom prst="rect">
-            <a:avLst/>
-          </a:prstGeom>
-          <a:solidFill>
-            <a:srgbClr val="2A9D8F"/>
-          </a:solidFill>
-          <a:ln/>
-        </p:spPr>
-      </p:sp>
-      <p:sp>
-        <p:nvSpPr>
-          <p:cNvPr id="4" name="Shape 2"/>
-          <p:cNvSpPr/>
-          <p:nvPr/>
-        </p:nvSpPr>
-        <p:spPr>
-          <a:xfrm>
-            <a:off x="6858000" y="-1371600"/>
-            <a:ext cx="4572000" cy="4572000"/>
-          </a:xfrm>
-          <a:prstGeom prst="ellipse">
-            <a:avLst/>
-          </a:prstGeom>
-          <a:solidFill>
-            <a:srgbClr val="2A9D8F">
-              <a:alpha val="12000"/>
+            <a:srgbClr val="FFFFFF">
+              <a:alpha val="8000"/>
             </a:srgbClr>
           </a:solidFill>
           <a:ln/>
@@ -1466,14 +1433,14 @@
       </p:sp>
       <p:sp>
         <p:nvSpPr>
-          <p:cNvPr id="5" name="Text 3"/>
-          <p:cNvSpPr/>
-          <p:nvPr/>
-        </p:nvSpPr>
-        <p:spPr>
-          <a:xfrm>
-            <a:off x="731520" y="914400"/>
-            <a:ext cx="7680960" cy="457200"/>
+          <p:cNvPr id="3" name="Text 1"/>
+          <p:cNvSpPr/>
+          <p:nvPr/>
+        </p:nvSpPr>
+        <p:spPr>
+          <a:xfrm>
+            <a:off x="731520" y="548640"/>
+            <a:ext cx="7315200" cy="365760"/>
           </a:xfrm>
           <a:prstGeom prst="rect">
             <a:avLst/>
@@ -1489,30 +1456,30 @@
               <a:buNone/>
             </a:pPr>
             <a:r>
-              <a:rPr lang="en-US" sz="1300" b="1" spc="500" kern="0" dirty="0">
-                <a:solidFill>
-                  <a:srgbClr val="2A9D8F"/>
-                </a:solidFill>
-                <a:latin typeface="Calibri" pitchFamily="34" charset="0"/>
-                <a:ea typeface="Calibri" pitchFamily="34" charset="-122"/>
-                <a:cs typeface="Calibri" pitchFamily="34" charset="-120"/>
+              <a:rPr lang="en-US" sz="1100" b="1" dirty="0">
+                <a:solidFill>
+                  <a:srgbClr val="F2D68A"/>
+                </a:solidFill>
+                <a:latin typeface="Arial" pitchFamily="34" charset="0"/>
+                <a:ea typeface="Arial" pitchFamily="34" charset="-122"/>
+                <a:cs typeface="Arial" pitchFamily="34" charset="-120"/>
               </a:rPr>
               <a:t>GRADE 6 MATHEMATICS</a:t>
             </a:r>
-            <a:endParaRPr lang="en-US" sz="1300" dirty="0"/>
-          </a:p>
-        </p:txBody>
-      </p:sp>
-      <p:sp>
-        <p:nvSpPr>
-          <p:cNvPr id="6" name="Text 4"/>
-          <p:cNvSpPr/>
-          <p:nvPr/>
-        </p:nvSpPr>
-        <p:spPr>
-          <a:xfrm>
-            <a:off x="731520" y="1463040"/>
-            <a:ext cx="6858000" cy="1645920"/>
+            <a:endParaRPr lang="en-US" sz="1100" dirty="0"/>
+          </a:p>
+        </p:txBody>
+      </p:sp>
+      <p:sp>
+        <p:nvSpPr>
+          <p:cNvPr id="4" name="Text 2"/>
+          <p:cNvSpPr/>
+          <p:nvPr/>
+        </p:nvSpPr>
+        <p:spPr>
+          <a:xfrm>
+            <a:off x="731520" y="1371600"/>
+            <a:ext cx="9144000" cy="1645920"/>
           </a:xfrm>
           <a:prstGeom prst="rect">
             <a:avLst/>
@@ -1521,14 +1488,17 @@
           <a:ln/>
         </p:spPr>
         <p:txBody>
-          <a:bodyPr wrap="square" rtlCol="0" anchor="t"/>
+          <a:bodyPr wrap="square" rtlCol="0" anchor="ctr"/>
           <a:lstStyle/>
           <a:p>
             <a:pPr indent="0" marL="0">
+              <a:lnSpc>
+                <a:spcPct val="110000"/>
+              </a:lnSpc>
               <a:buNone/>
             </a:pPr>
             <a:r>
-              <a:rPr lang="en-US" sz="3800" b="1" dirty="0">
+              <a:rPr lang="en-US" sz="3600" b="1" dirty="0">
                 <a:solidFill>
                   <a:srgbClr val="FFFFFF"/>
                 </a:solidFill>
@@ -1536,39 +1506,63 @@
                 <a:ea typeface="Georgia" pitchFamily="34" charset="-122"/>
                 <a:cs typeface="Georgia" pitchFamily="34" charset="-120"/>
               </a:rPr>
-              <a:t>Multiplying &amp; Dividing</a:t>
-            </a:r>
-            <a:endParaRPr lang="en-US" sz="3800" dirty="0"/>
-          </a:p>
+              <a:t>Multiplying &amp; Dividing Fractions</a:t>
+            </a:r>
+            <a:endParaRPr lang="en-US" sz="3600" dirty="0"/>
+          </a:p>
+        </p:txBody>
+      </p:sp>
+      <p:sp>
+        <p:nvSpPr>
+          <p:cNvPr id="5" name="Text 3"/>
+          <p:cNvSpPr/>
+          <p:nvPr/>
+        </p:nvSpPr>
+        <p:spPr>
+          <a:xfrm>
+            <a:off x="731520" y="3200400"/>
+            <a:ext cx="7315200" cy="548640"/>
+          </a:xfrm>
+          <a:prstGeom prst="rect">
+            <a:avLst/>
+          </a:prstGeom>
+          <a:noFill/>
+          <a:ln/>
+        </p:spPr>
+        <p:txBody>
+          <a:bodyPr wrap="square" rtlCol="0" anchor="ctr"/>
+          <a:lstStyle/>
           <a:p>
             <a:pPr indent="0" marL="0">
               <a:buNone/>
             </a:pPr>
             <a:r>
-              <a:rPr lang="en-US" sz="3800" b="1" dirty="0">
-                <a:solidFill>
-                  <a:srgbClr val="FFFFFF"/>
-                </a:solidFill>
-                <a:latin typeface="Georgia" pitchFamily="34" charset="0"/>
-                <a:ea typeface="Georgia" pitchFamily="34" charset="-122"/>
-                <a:cs typeface="Georgia" pitchFamily="34" charset="-120"/>
-              </a:rPr>
-              <a:t>Fractions</a:t>
-            </a:r>
-            <a:endParaRPr lang="en-US" sz="3800" dirty="0"/>
-          </a:p>
-        </p:txBody>
-      </p:sp>
-      <p:sp>
-        <p:nvSpPr>
-          <p:cNvPr id="7" name="Text 5"/>
-          <p:cNvSpPr/>
-          <p:nvPr/>
-        </p:nvSpPr>
-        <p:spPr>
-          <a:xfrm>
-            <a:off x="731520" y="3200400"/>
-            <a:ext cx="6400800" cy="548640"/>
+              <a:rPr lang="en-US" sz="1600" dirty="0">
+                <a:solidFill>
+                  <a:srgbClr val="FFFFFF">
+                    <a:alpha val="65000"/>
+                  </a:srgbClr>
+                </a:solidFill>
+                <a:latin typeface="Arial" pitchFamily="34" charset="0"/>
+                <a:ea typeface="Arial" pitchFamily="34" charset="-122"/>
+                <a:cs typeface="Arial" pitchFamily="34" charset="-120"/>
+              </a:rPr>
+              <a:t>Fraction operations</a:t>
+            </a:r>
+            <a:endParaRPr lang="en-US" sz="1600" dirty="0"/>
+          </a:p>
+        </p:txBody>
+      </p:sp>
+      <p:sp>
+        <p:nvSpPr>
+          <p:cNvPr id="6" name="Text 4"/>
+          <p:cNvSpPr/>
+          <p:nvPr/>
+        </p:nvSpPr>
+        <p:spPr>
+          <a:xfrm>
+            <a:off x="731520" y="4389120"/>
+            <a:ext cx="2743200" cy="320040"/>
           </a:xfrm>
           <a:prstGeom prst="rect">
             <a:avLst/>
@@ -1584,56 +1578,19 @@
               <a:buNone/>
             </a:pPr>
             <a:r>
-              <a:rPr lang="en-US" sz="1600" i="1" dirty="0">
-                <a:solidFill>
-                  <a:srgbClr val="9B9690"/>
-                </a:solidFill>
-                <a:latin typeface="Calibri" pitchFamily="34" charset="0"/>
-                <a:ea typeface="Calibri" pitchFamily="34" charset="-122"/>
-                <a:cs typeface="Calibri" pitchFamily="34" charset="-120"/>
-              </a:rPr>
-              <a:t>Fraction operations made simple</a:t>
-            </a:r>
-            <a:endParaRPr lang="en-US" sz="1600" dirty="0"/>
-          </a:p>
-        </p:txBody>
-      </p:sp>
-      <p:sp>
-        <p:nvSpPr>
-          <p:cNvPr id="8" name="Text 6"/>
-          <p:cNvSpPr/>
-          <p:nvPr/>
-        </p:nvSpPr>
-        <p:spPr>
-          <a:xfrm>
-            <a:off x="731520" y="4297680"/>
-            <a:ext cx="2743200" cy="365760"/>
-          </a:xfrm>
-          <a:prstGeom prst="rect">
-            <a:avLst/>
-          </a:prstGeom>
-          <a:noFill/>
-          <a:ln/>
-        </p:spPr>
-        <p:txBody>
-          <a:bodyPr wrap="square" rtlCol="0" anchor="ctr"/>
-          <a:lstStyle/>
-          <a:p>
-            <a:pPr indent="0" marL="0">
-              <a:buNone/>
-            </a:pPr>
-            <a:r>
-              <a:rPr lang="en-US" sz="1100" dirty="0">
-                <a:solidFill>
-                  <a:srgbClr val="9B9690"/>
-                </a:solidFill>
-                <a:latin typeface="Calibri" pitchFamily="34" charset="0"/>
-                <a:ea typeface="Calibri" pitchFamily="34" charset="-122"/>
-                <a:cs typeface="Calibri" pitchFamily="34" charset="-120"/>
+              <a:rPr lang="en-US" sz="1000" dirty="0">
+                <a:solidFill>
+                  <a:srgbClr val="FFFFFF">
+                    <a:alpha val="40000"/>
+                  </a:srgbClr>
+                </a:solidFill>
+                <a:latin typeface="Arial" pitchFamily="34" charset="0"/>
+                <a:ea typeface="Arial" pitchFamily="34" charset="-122"/>
+                <a:cs typeface="Arial" pitchFamily="34" charset="-120"/>
               </a:rPr>
               <a:t>mrzocchi.com</a:t>
             </a:r>
-            <a:endParaRPr lang="en-US" sz="1100" dirty="0"/>
+            <a:endParaRPr lang="en-US" sz="1000" dirty="0"/>
           </a:p>
         </p:txBody>
       </p:sp>
@@ -1678,47 +1635,7 @@
         <p:spPr>
           <a:xfrm>
             <a:off x="0" y="0"/>
-            <a:ext cx="9144000" cy="822960"/>
-          </a:xfrm>
-          <a:prstGeom prst="rect">
-            <a:avLst/>
-          </a:prstGeom>
-          <a:solidFill>
-            <a:srgbClr val="FFFFFF"/>
-          </a:solidFill>
-          <a:ln/>
-        </p:spPr>
-      </p:sp>
-      <p:sp>
-        <p:nvSpPr>
-          <p:cNvPr id="3" name="Shape 1"/>
-          <p:cNvSpPr/>
-          <p:nvPr/>
-        </p:nvSpPr>
-        <p:spPr>
-          <a:xfrm>
-            <a:off x="0" y="804672"/>
-            <a:ext cx="9144000" cy="27432"/>
-          </a:xfrm>
-          <a:prstGeom prst="rect">
-            <a:avLst/>
-          </a:prstGeom>
-          <a:solidFill>
-            <a:srgbClr val="E5E2DC"/>
-          </a:solidFill>
-          <a:ln/>
-        </p:spPr>
-      </p:sp>
-      <p:sp>
-        <p:nvSpPr>
-          <p:cNvPr id="4" name="Shape 2"/>
-          <p:cNvSpPr/>
-          <p:nvPr/>
-        </p:nvSpPr>
-        <p:spPr>
-          <a:xfrm>
-            <a:off x="548640" y="201168"/>
-            <a:ext cx="54864" cy="420624"/>
+            <a:ext cx="73152" cy="5148072"/>
           </a:xfrm>
           <a:prstGeom prst="rect">
             <a:avLst/>
@@ -1731,14 +1648,14 @@
       </p:sp>
       <p:sp>
         <p:nvSpPr>
-          <p:cNvPr id="5" name="Text 3"/>
-          <p:cNvSpPr/>
-          <p:nvPr/>
-        </p:nvSpPr>
-        <p:spPr>
-          <a:xfrm>
-            <a:off x="777240" y="137160"/>
-            <a:ext cx="7772400" cy="548640"/>
+          <p:cNvPr id="3" name="Text 1"/>
+          <p:cNvSpPr/>
+          <p:nvPr/>
+        </p:nvSpPr>
+        <p:spPr>
+          <a:xfrm>
+            <a:off x="548640" y="274320"/>
+            <a:ext cx="9144000" cy="640080"/>
           </a:xfrm>
           <a:prstGeom prst="rect">
             <a:avLst/>
@@ -1747,14 +1664,14 @@
           <a:ln/>
         </p:spPr>
         <p:txBody>
-          <a:bodyPr wrap="square" lIns="0" tIns="0" rIns="0" bIns="0" rtlCol="0" anchor="ctr"/>
+          <a:bodyPr wrap="square" rtlCol="0" anchor="ctr"/>
           <a:lstStyle/>
           <a:p>
             <a:pPr indent="0" marL="0">
               <a:buNone/>
             </a:pPr>
             <a:r>
-              <a:rPr lang="en-US" sz="2000" b="1" dirty="0">
+              <a:rPr lang="en-US" sz="2400" b="1" dirty="0">
                 <a:solidFill>
                   <a:srgbClr val="1B2A4A"/>
                 </a:solidFill>
@@ -1762,49 +1679,22 @@
                 <a:ea typeface="Georgia" pitchFamily="34" charset="-122"/>
                 <a:cs typeface="Georgia" pitchFamily="34" charset="-120"/>
               </a:rPr>
-              <a:t>Key Vocabulary</a:t>
-            </a:r>
-            <a:endParaRPr lang="en-US" sz="2000" dirty="0"/>
-          </a:p>
-        </p:txBody>
-      </p:sp>
-      <p:sp>
-        <p:nvSpPr>
-          <p:cNvPr id="6" name="Shape 4"/>
-          <p:cNvSpPr/>
-          <p:nvPr/>
-        </p:nvSpPr>
-        <p:spPr>
-          <a:xfrm>
-            <a:off x="731520" y="1051560"/>
-            <a:ext cx="3657600" cy="658368"/>
-          </a:xfrm>
-          <a:prstGeom prst="rect">
-            <a:avLst/>
-          </a:prstGeom>
-          <a:solidFill>
-            <a:srgbClr val="FFFFFF"/>
-          </a:solidFill>
-          <a:ln/>
-          <a:effectLst>
-            <a:outerShdw sx="100000" sy="100000" kx="0" ky="0" algn="bl" rotWithShape="0" blurRad="50800" dist="25400" dir="8100000">
-              <a:srgbClr val="000000">
-                <a:alpha val="10000"/>
-              </a:srgbClr>
-            </a:outerShdw>
-          </a:effectLst>
-        </p:spPr>
-      </p:sp>
-      <p:sp>
-        <p:nvSpPr>
-          <p:cNvPr id="7" name="Shape 5"/>
-          <p:cNvSpPr/>
-          <p:nvPr/>
-        </p:nvSpPr>
-        <p:spPr>
-          <a:xfrm>
-            <a:off x="731520" y="1051560"/>
-            <a:ext cx="54864" cy="658368"/>
+              <a:t>Multiplying Fractions</a:t>
+            </a:r>
+            <a:endParaRPr lang="en-US" sz="2400" dirty="0"/>
+          </a:p>
+        </p:txBody>
+      </p:sp>
+      <p:sp>
+        <p:nvSpPr>
+          <p:cNvPr id="4" name="Shape 2"/>
+          <p:cNvSpPr/>
+          <p:nvPr/>
+        </p:nvSpPr>
+        <p:spPr>
+          <a:xfrm>
+            <a:off x="548640" y="960120"/>
+            <a:ext cx="2286000" cy="36576"/>
           </a:xfrm>
           <a:prstGeom prst="rect">
             <a:avLst/>
@@ -1817,14 +1707,14 @@
       </p:sp>
       <p:sp>
         <p:nvSpPr>
-          <p:cNvPr id="8" name="Text 6"/>
-          <p:cNvSpPr/>
-          <p:nvPr/>
-        </p:nvSpPr>
-        <p:spPr>
-          <a:xfrm>
-            <a:off x="914400" y="1051560"/>
-            <a:ext cx="1463040" cy="658368"/>
+          <p:cNvPr id="5" name="Text 3"/>
+          <p:cNvSpPr/>
+          <p:nvPr/>
+        </p:nvSpPr>
+        <p:spPr>
+          <a:xfrm>
+            <a:off x="548640" y="1188720"/>
+            <a:ext cx="10058400" cy="3474720"/>
           </a:xfrm>
           <a:prstGeom prst="rect">
             <a:avLst/>
@@ -1833,438 +1723,117 @@
           <a:ln/>
         </p:spPr>
         <p:txBody>
-          <a:bodyPr wrap="square" lIns="0" tIns="0" rIns="0" bIns="0" rtlCol="0" anchor="ctr"/>
-          <a:lstStyle/>
-          <a:p>
-            <a:pPr indent="0" marL="0">
-              <a:buNone/>
-            </a:pPr>
-            <a:r>
-              <a:rPr lang="en-US" sz="1300" b="1" dirty="0">
-                <a:solidFill>
-                  <a:srgbClr val="1B2A4A"/>
-                </a:solidFill>
-                <a:latin typeface="Georgia" pitchFamily="34" charset="0"/>
-                <a:ea typeface="Georgia" pitchFamily="34" charset="-122"/>
-                <a:cs typeface="Georgia" pitchFamily="34" charset="-120"/>
-              </a:rPr>
-              <a:t>Multiply</a:t>
-            </a:r>
-            <a:endParaRPr lang="en-US" sz="1300" dirty="0"/>
-          </a:p>
-        </p:txBody>
-      </p:sp>
-      <p:sp>
-        <p:nvSpPr>
-          <p:cNvPr id="9" name="Text 7"/>
-          <p:cNvSpPr/>
-          <p:nvPr/>
-        </p:nvSpPr>
-        <p:spPr>
-          <a:xfrm>
-            <a:off x="2377440" y="1051560"/>
-            <a:ext cx="1920240" cy="658368"/>
-          </a:xfrm>
-          <a:prstGeom prst="rect">
-            <a:avLst/>
-          </a:prstGeom>
-          <a:noFill/>
-          <a:ln/>
-        </p:spPr>
-        <p:txBody>
-          <a:bodyPr wrap="square" lIns="0" tIns="0" rIns="0" bIns="0" rtlCol="0" anchor="ctr"/>
-          <a:lstStyle/>
-          <a:p>
-            <a:pPr indent="0" marL="0">
-              <a:buNone/>
-            </a:pPr>
-            <a:r>
-              <a:rPr lang="en-US" sz="1100" dirty="0">
-                <a:solidFill>
-                  <a:srgbClr val="6B6660"/>
-                </a:solidFill>
-                <a:latin typeface="Calibri" pitchFamily="34" charset="0"/>
-                <a:ea typeface="Calibri" pitchFamily="34" charset="-122"/>
-                <a:cs typeface="Calibri" pitchFamily="34" charset="-120"/>
-              </a:rPr>
-              <a:t>× means 'of' with fractions</a:t>
-            </a:r>
-            <a:endParaRPr lang="en-US" sz="1100" dirty="0"/>
-          </a:p>
-        </p:txBody>
-      </p:sp>
-      <p:sp>
-        <p:nvSpPr>
-          <p:cNvPr id="10" name="Shape 8"/>
-          <p:cNvSpPr/>
-          <p:nvPr/>
-        </p:nvSpPr>
-        <p:spPr>
-          <a:xfrm>
-            <a:off x="4754880" y="1051560"/>
-            <a:ext cx="3657600" cy="658368"/>
-          </a:xfrm>
-          <a:prstGeom prst="rect">
-            <a:avLst/>
-          </a:prstGeom>
-          <a:solidFill>
-            <a:srgbClr val="FFFFFF"/>
-          </a:solidFill>
-          <a:ln/>
-          <a:effectLst>
-            <a:outerShdw sx="100000" sy="100000" kx="0" ky="0" algn="bl" rotWithShape="0" blurRad="50800" dist="25400" dir="8100000">
-              <a:srgbClr val="000000">
-                <a:alpha val="10000"/>
-              </a:srgbClr>
-            </a:outerShdw>
-          </a:effectLst>
-        </p:spPr>
-      </p:sp>
-      <p:sp>
-        <p:nvSpPr>
-          <p:cNvPr id="11" name="Shape 9"/>
-          <p:cNvSpPr/>
-          <p:nvPr/>
-        </p:nvSpPr>
-        <p:spPr>
-          <a:xfrm>
-            <a:off x="4754880" y="1051560"/>
-            <a:ext cx="54864" cy="658368"/>
-          </a:xfrm>
-          <a:prstGeom prst="rect">
-            <a:avLst/>
-          </a:prstGeom>
-          <a:solidFill>
-            <a:srgbClr val="2A9D8F"/>
-          </a:solidFill>
-          <a:ln/>
-        </p:spPr>
-      </p:sp>
-      <p:sp>
-        <p:nvSpPr>
-          <p:cNvPr id="12" name="Text 10"/>
-          <p:cNvSpPr/>
-          <p:nvPr/>
-        </p:nvSpPr>
-        <p:spPr>
-          <a:xfrm>
-            <a:off x="4937760" y="1051560"/>
-            <a:ext cx="1463040" cy="658368"/>
-          </a:xfrm>
-          <a:prstGeom prst="rect">
-            <a:avLst/>
-          </a:prstGeom>
-          <a:noFill/>
-          <a:ln/>
-        </p:spPr>
-        <p:txBody>
-          <a:bodyPr wrap="square" lIns="0" tIns="0" rIns="0" bIns="0" rtlCol="0" anchor="ctr"/>
-          <a:lstStyle/>
-          <a:p>
-            <a:pPr indent="0" marL="0">
-              <a:buNone/>
-            </a:pPr>
-            <a:r>
-              <a:rPr lang="en-US" sz="1300" b="1" dirty="0">
-                <a:solidFill>
-                  <a:srgbClr val="1B2A4A"/>
-                </a:solidFill>
-                <a:latin typeface="Georgia" pitchFamily="34" charset="0"/>
-                <a:ea typeface="Georgia" pitchFamily="34" charset="-122"/>
-                <a:cs typeface="Georgia" pitchFamily="34" charset="-120"/>
-              </a:rPr>
-              <a:t>Reciprocal</a:t>
-            </a:r>
-            <a:endParaRPr lang="en-US" sz="1300" dirty="0"/>
-          </a:p>
-        </p:txBody>
-      </p:sp>
-      <p:sp>
-        <p:nvSpPr>
-          <p:cNvPr id="13" name="Text 11"/>
-          <p:cNvSpPr/>
-          <p:nvPr/>
-        </p:nvSpPr>
-        <p:spPr>
-          <a:xfrm>
-            <a:off x="6400800" y="1051560"/>
-            <a:ext cx="1920240" cy="658368"/>
-          </a:xfrm>
-          <a:prstGeom prst="rect">
-            <a:avLst/>
-          </a:prstGeom>
-          <a:noFill/>
-          <a:ln/>
-        </p:spPr>
-        <p:txBody>
-          <a:bodyPr wrap="square" lIns="0" tIns="0" rIns="0" bIns="0" rtlCol="0" anchor="ctr"/>
-          <a:lstStyle/>
-          <a:p>
-            <a:pPr indent="0" marL="0">
-              <a:buNone/>
-            </a:pPr>
-            <a:r>
-              <a:rPr lang="en-US" sz="1100" dirty="0">
-                <a:solidFill>
-                  <a:srgbClr val="6B6660"/>
-                </a:solidFill>
-                <a:latin typeface="Calibri" pitchFamily="34" charset="0"/>
-                <a:ea typeface="Calibri" pitchFamily="34" charset="-122"/>
-                <a:cs typeface="Calibri" pitchFamily="34" charset="-120"/>
-              </a:rPr>
-              <a:t>Flip the fraction upside down</a:t>
-            </a:r>
-            <a:endParaRPr lang="en-US" sz="1100" dirty="0"/>
-          </a:p>
-        </p:txBody>
-      </p:sp>
-      <p:sp>
-        <p:nvSpPr>
-          <p:cNvPr id="14" name="Shape 12"/>
-          <p:cNvSpPr/>
-          <p:nvPr/>
-        </p:nvSpPr>
-        <p:spPr>
-          <a:xfrm>
-            <a:off x="731520" y="1819656"/>
-            <a:ext cx="3657600" cy="658368"/>
-          </a:xfrm>
-          <a:prstGeom prst="rect">
-            <a:avLst/>
-          </a:prstGeom>
-          <a:solidFill>
-            <a:srgbClr val="FFFFFF"/>
-          </a:solidFill>
-          <a:ln/>
-          <a:effectLst>
-            <a:outerShdw sx="100000" sy="100000" kx="0" ky="0" algn="bl" rotWithShape="0" blurRad="50800" dist="25400" dir="8100000">
-              <a:srgbClr val="000000">
-                <a:alpha val="10000"/>
-              </a:srgbClr>
-            </a:outerShdw>
-          </a:effectLst>
-        </p:spPr>
-      </p:sp>
-      <p:sp>
-        <p:nvSpPr>
-          <p:cNvPr id="15" name="Shape 13"/>
-          <p:cNvSpPr/>
-          <p:nvPr/>
-        </p:nvSpPr>
-        <p:spPr>
-          <a:xfrm>
-            <a:off x="731520" y="1819656"/>
-            <a:ext cx="54864" cy="658368"/>
-          </a:xfrm>
-          <a:prstGeom prst="rect">
-            <a:avLst/>
-          </a:prstGeom>
-          <a:solidFill>
-            <a:srgbClr val="2A9D8F"/>
-          </a:solidFill>
-          <a:ln/>
-        </p:spPr>
-      </p:sp>
-      <p:sp>
-        <p:nvSpPr>
-          <p:cNvPr id="16" name="Text 14"/>
-          <p:cNvSpPr/>
-          <p:nvPr/>
-        </p:nvSpPr>
-        <p:spPr>
-          <a:xfrm>
-            <a:off x="914400" y="1819656"/>
-            <a:ext cx="1463040" cy="658368"/>
-          </a:xfrm>
-          <a:prstGeom prst="rect">
-            <a:avLst/>
-          </a:prstGeom>
-          <a:noFill/>
-          <a:ln/>
-        </p:spPr>
-        <p:txBody>
-          <a:bodyPr wrap="square" lIns="0" tIns="0" rIns="0" bIns="0" rtlCol="0" anchor="ctr"/>
-          <a:lstStyle/>
-          <a:p>
-            <a:pPr indent="0" marL="0">
-              <a:buNone/>
-            </a:pPr>
-            <a:r>
-              <a:rPr lang="en-US" sz="1300" b="1" dirty="0">
-                <a:solidFill>
-                  <a:srgbClr val="1B2A4A"/>
-                </a:solidFill>
-                <a:latin typeface="Georgia" pitchFamily="34" charset="0"/>
-                <a:ea typeface="Georgia" pitchFamily="34" charset="-122"/>
-                <a:cs typeface="Georgia" pitchFamily="34" charset="-120"/>
-              </a:rPr>
-              <a:t>Cancel</a:t>
-            </a:r>
-            <a:endParaRPr lang="en-US" sz="1300" dirty="0"/>
-          </a:p>
-        </p:txBody>
-      </p:sp>
-      <p:sp>
-        <p:nvSpPr>
-          <p:cNvPr id="17" name="Text 15"/>
-          <p:cNvSpPr/>
-          <p:nvPr/>
-        </p:nvSpPr>
-        <p:spPr>
-          <a:xfrm>
-            <a:off x="2377440" y="1819656"/>
-            <a:ext cx="1920240" cy="658368"/>
-          </a:xfrm>
-          <a:prstGeom prst="rect">
-            <a:avLst/>
-          </a:prstGeom>
-          <a:noFill/>
-          <a:ln/>
-        </p:spPr>
-        <p:txBody>
-          <a:bodyPr wrap="square" lIns="0" tIns="0" rIns="0" bIns="0" rtlCol="0" anchor="ctr"/>
-          <a:lstStyle/>
-          <a:p>
-            <a:pPr indent="0" marL="0">
-              <a:buNone/>
-            </a:pPr>
-            <a:r>
-              <a:rPr lang="en-US" sz="1100" dirty="0">
-                <a:solidFill>
-                  <a:srgbClr val="6B6660"/>
-                </a:solidFill>
-                <a:latin typeface="Calibri" pitchFamily="34" charset="0"/>
-                <a:ea typeface="Calibri" pitchFamily="34" charset="-122"/>
-                <a:cs typeface="Calibri" pitchFamily="34" charset="-120"/>
-              </a:rPr>
-              <a:t>Simplify before multiplying</a:t>
-            </a:r>
-            <a:endParaRPr lang="en-US" sz="1100" dirty="0"/>
-          </a:p>
-        </p:txBody>
-      </p:sp>
-      <p:sp>
-        <p:nvSpPr>
-          <p:cNvPr id="18" name="Shape 16"/>
-          <p:cNvSpPr/>
-          <p:nvPr/>
-        </p:nvSpPr>
-        <p:spPr>
-          <a:xfrm>
-            <a:off x="4754880" y="1819656"/>
-            <a:ext cx="3657600" cy="658368"/>
-          </a:xfrm>
-          <a:prstGeom prst="rect">
-            <a:avLst/>
-          </a:prstGeom>
-          <a:solidFill>
-            <a:srgbClr val="FFFFFF"/>
-          </a:solidFill>
-          <a:ln/>
-          <a:effectLst>
-            <a:outerShdw sx="100000" sy="100000" kx="0" ky="0" algn="bl" rotWithShape="0" blurRad="50800" dist="25400" dir="8100000">
-              <a:srgbClr val="000000">
-                <a:alpha val="10000"/>
-              </a:srgbClr>
-            </a:outerShdw>
-          </a:effectLst>
-        </p:spPr>
-      </p:sp>
-      <p:sp>
-        <p:nvSpPr>
-          <p:cNvPr id="19" name="Shape 17"/>
-          <p:cNvSpPr/>
-          <p:nvPr/>
-        </p:nvSpPr>
-        <p:spPr>
-          <a:xfrm>
-            <a:off x="4754880" y="1819656"/>
-            <a:ext cx="54864" cy="658368"/>
-          </a:xfrm>
-          <a:prstGeom prst="rect">
-            <a:avLst/>
-          </a:prstGeom>
-          <a:solidFill>
-            <a:srgbClr val="2A9D8F"/>
-          </a:solidFill>
-          <a:ln/>
-        </p:spPr>
-      </p:sp>
-      <p:sp>
-        <p:nvSpPr>
-          <p:cNvPr id="20" name="Text 18"/>
-          <p:cNvSpPr/>
-          <p:nvPr/>
-        </p:nvSpPr>
-        <p:spPr>
-          <a:xfrm>
-            <a:off x="4937760" y="1819656"/>
-            <a:ext cx="1463040" cy="658368"/>
-          </a:xfrm>
-          <a:prstGeom prst="rect">
-            <a:avLst/>
-          </a:prstGeom>
-          <a:noFill/>
-          <a:ln/>
-        </p:spPr>
-        <p:txBody>
-          <a:bodyPr wrap="square" lIns="0" tIns="0" rIns="0" bIns="0" rtlCol="0" anchor="ctr"/>
-          <a:lstStyle/>
-          <a:p>
-            <a:pPr indent="0" marL="0">
-              <a:buNone/>
-            </a:pPr>
-            <a:r>
-              <a:rPr lang="en-US" sz="1300" b="1" dirty="0">
-                <a:solidFill>
-                  <a:srgbClr val="1B2A4A"/>
-                </a:solidFill>
-                <a:latin typeface="Georgia" pitchFamily="34" charset="0"/>
-                <a:ea typeface="Georgia" pitchFamily="34" charset="-122"/>
-                <a:cs typeface="Georgia" pitchFamily="34" charset="-120"/>
-              </a:rPr>
-              <a:t>KFC</a:t>
-            </a:r>
-            <a:endParaRPr lang="en-US" sz="1300" dirty="0"/>
-          </a:p>
-        </p:txBody>
-      </p:sp>
-      <p:sp>
-        <p:nvSpPr>
-          <p:cNvPr id="21" name="Text 19"/>
-          <p:cNvSpPr/>
-          <p:nvPr/>
-        </p:nvSpPr>
-        <p:spPr>
-          <a:xfrm>
-            <a:off x="6400800" y="1819656"/>
-            <a:ext cx="1920240" cy="658368"/>
-          </a:xfrm>
-          <a:prstGeom prst="rect">
-            <a:avLst/>
-          </a:prstGeom>
-          <a:noFill/>
-          <a:ln/>
-        </p:spPr>
-        <p:txBody>
-          <a:bodyPr wrap="square" lIns="0" tIns="0" rIns="0" bIns="0" rtlCol="0" anchor="ctr"/>
-          <a:lstStyle/>
-          <a:p>
-            <a:pPr indent="0" marL="0">
-              <a:buNone/>
-            </a:pPr>
-            <a:r>
-              <a:rPr lang="en-US" sz="1100" dirty="0">
-                <a:solidFill>
-                  <a:srgbClr val="6B6660"/>
-                </a:solidFill>
-                <a:latin typeface="Calibri" pitchFamily="34" charset="0"/>
-                <a:ea typeface="Calibri" pitchFamily="34" charset="-122"/>
-                <a:cs typeface="Calibri" pitchFamily="34" charset="-120"/>
-              </a:rPr>
-              <a:t>Keep, Flip, Change — for division</a:t>
-            </a:r>
-            <a:endParaRPr lang="en-US" sz="1100" dirty="0"/>
+          <a:bodyPr wrap="square" rtlCol="0" anchor="t"/>
+          <a:lstStyle/>
+          <a:p>
+            <a:pPr>
+              <a:lnSpc>
+                <a:spcPct val="150000"/>
+              </a:lnSpc>
+              <a:spcAft>
+                <a:spcPts val="600"/>
+              </a:spcAft>
+            </a:pPr>
+            <a:r>
+              <a:rPr lang="en-US" sz="1500" dirty="0">
+                <a:solidFill>
+                  <a:srgbClr val="3D3A36"/>
+                </a:solidFill>
+                <a:latin typeface="Arial" pitchFamily="34" charset="0"/>
+                <a:ea typeface="Arial" pitchFamily="34" charset="-122"/>
+                <a:cs typeface="Arial" pitchFamily="34" charset="-120"/>
+              </a:rPr>
+              <a:t>Multiply the numerators together: top × top.</a:t>
+            </a:r>
+            <a:endParaRPr lang="en-US" sz="1500" dirty="0"/>
+          </a:p>
+          <a:p>
+            <a:pPr>
+              <a:lnSpc>
+                <a:spcPct val="150000"/>
+              </a:lnSpc>
+              <a:spcAft>
+                <a:spcPts val="600"/>
+              </a:spcAft>
+            </a:pPr>
+            <a:r>
+              <a:rPr lang="en-US" sz="1500" dirty="0">
+                <a:solidFill>
+                  <a:srgbClr val="3D3A36"/>
+                </a:solidFill>
+                <a:latin typeface="Arial" pitchFamily="34" charset="0"/>
+                <a:ea typeface="Arial" pitchFamily="34" charset="-122"/>
+                <a:cs typeface="Arial" pitchFamily="34" charset="-120"/>
+              </a:rPr>
+              <a:t>Multiply the denominators together: bottom × bottom.</a:t>
+            </a:r>
+            <a:endParaRPr lang="en-US" sz="1500" dirty="0"/>
+          </a:p>
+          <a:p>
+            <a:pPr>
+              <a:lnSpc>
+                <a:spcPct val="150000"/>
+              </a:lnSpc>
+              <a:spcAft>
+                <a:spcPts val="600"/>
+              </a:spcAft>
+            </a:pPr>
+            <a:r>
+              <a:rPr lang="en-US" sz="1500" dirty="0">
+                <a:solidFill>
+                  <a:srgbClr val="3D3A36"/>
+                </a:solidFill>
+                <a:latin typeface="Arial" pitchFamily="34" charset="0"/>
+                <a:ea typeface="Arial" pitchFamily="34" charset="-122"/>
+                <a:cs typeface="Arial" pitchFamily="34" charset="-120"/>
+              </a:rPr>
+              <a:t>²⁄₃ × ⁴⁄₅ = ⁸⁄₁₅</a:t>
+            </a:r>
+            <a:endParaRPr lang="en-US" sz="1500" dirty="0"/>
+          </a:p>
+          <a:p>
+            <a:pPr>
+              <a:lnSpc>
+                <a:spcPct val="150000"/>
+              </a:lnSpc>
+              <a:spcAft>
+                <a:spcPts val="600"/>
+              </a:spcAft>
+            </a:pPr>
+            <a:r>
+              <a:rPr lang="en-US" sz="1500" dirty="0">
+                <a:solidFill>
+                  <a:srgbClr val="3D3A36"/>
+                </a:solidFill>
+                <a:latin typeface="Arial" pitchFamily="34" charset="0"/>
+                <a:ea typeface="Arial" pitchFamily="34" charset="-122"/>
+                <a:cs typeface="Arial" pitchFamily="34" charset="-120"/>
+              </a:rPr>
+              <a:t>Simplify before multiplying if possible (cross-cancel).</a:t>
+            </a:r>
+            <a:endParaRPr lang="en-US" sz="1500" dirty="0"/>
+          </a:p>
+          <a:p>
+            <a:pPr>
+              <a:lnSpc>
+                <a:spcPct val="150000"/>
+              </a:lnSpc>
+              <a:spcAft>
+                <a:spcPts val="600"/>
+              </a:spcAft>
+            </a:pPr>
+            <a:r>
+              <a:rPr lang="en-US" sz="1500" dirty="0">
+                <a:solidFill>
+                  <a:srgbClr val="3D3A36"/>
+                </a:solidFill>
+                <a:latin typeface="Arial" pitchFamily="34" charset="0"/>
+                <a:ea typeface="Arial" pitchFamily="34" charset="-122"/>
+                <a:cs typeface="Arial" pitchFamily="34" charset="-120"/>
+              </a:rPr>
+              <a:t>Fraction × whole number: ²⁄₃ × 4 = ²⁄₃ × ⁴⁄₁ = ⁸⁄₃ = 2²⁄₃</a:t>
+            </a:r>
+            <a:endParaRPr lang="en-US" sz="1500" dirty="0"/>
           </a:p>
         </p:txBody>
       </p:sp>
@@ -2309,47 +1878,7 @@
         <p:spPr>
           <a:xfrm>
             <a:off x="0" y="0"/>
-            <a:ext cx="9144000" cy="822960"/>
-          </a:xfrm>
-          <a:prstGeom prst="rect">
-            <a:avLst/>
-          </a:prstGeom>
-          <a:solidFill>
-            <a:srgbClr val="FFFFFF"/>
-          </a:solidFill>
-          <a:ln/>
-        </p:spPr>
-      </p:sp>
-      <p:sp>
-        <p:nvSpPr>
-          <p:cNvPr id="3" name="Shape 1"/>
-          <p:cNvSpPr/>
-          <p:nvPr/>
-        </p:nvSpPr>
-        <p:spPr>
-          <a:xfrm>
-            <a:off x="0" y="804672"/>
-            <a:ext cx="9144000" cy="27432"/>
-          </a:xfrm>
-          <a:prstGeom prst="rect">
-            <a:avLst/>
-          </a:prstGeom>
-          <a:solidFill>
-            <a:srgbClr val="E5E2DC"/>
-          </a:solidFill>
-          <a:ln/>
-        </p:spPr>
-      </p:sp>
-      <p:sp>
-        <p:nvSpPr>
-          <p:cNvPr id="4" name="Shape 2"/>
-          <p:cNvSpPr/>
-          <p:nvPr/>
-        </p:nvSpPr>
-        <p:spPr>
-          <a:xfrm>
-            <a:off x="548640" y="201168"/>
-            <a:ext cx="54864" cy="420624"/>
+            <a:ext cx="73152" cy="5148072"/>
           </a:xfrm>
           <a:prstGeom prst="rect">
             <a:avLst/>
@@ -2362,14 +1891,14 @@
       </p:sp>
       <p:sp>
         <p:nvSpPr>
-          <p:cNvPr id="5" name="Text 3"/>
-          <p:cNvSpPr/>
-          <p:nvPr/>
-        </p:nvSpPr>
-        <p:spPr>
-          <a:xfrm>
-            <a:off x="777240" y="137160"/>
-            <a:ext cx="7772400" cy="548640"/>
+          <p:cNvPr id="3" name="Text 1"/>
+          <p:cNvSpPr/>
+          <p:nvPr/>
+        </p:nvSpPr>
+        <p:spPr>
+          <a:xfrm>
+            <a:off x="548640" y="274320"/>
+            <a:ext cx="9144000" cy="640080"/>
           </a:xfrm>
           <a:prstGeom prst="rect">
             <a:avLst/>
@@ -2378,14 +1907,14 @@
           <a:ln/>
         </p:spPr>
         <p:txBody>
-          <a:bodyPr wrap="square" lIns="0" tIns="0" rIns="0" bIns="0" rtlCol="0" anchor="ctr"/>
+          <a:bodyPr wrap="square" rtlCol="0" anchor="ctr"/>
           <a:lstStyle/>
           <a:p>
             <a:pPr indent="0" marL="0">
               <a:buNone/>
             </a:pPr>
             <a:r>
-              <a:rPr lang="en-US" sz="2000" b="1" dirty="0">
+              <a:rPr lang="en-US" sz="2400" b="1" dirty="0">
                 <a:solidFill>
                   <a:srgbClr val="1B2A4A"/>
                 </a:solidFill>
@@ -2393,49 +1922,22 @@
                 <a:ea typeface="Georgia" pitchFamily="34" charset="-122"/>
                 <a:cs typeface="Georgia" pitchFamily="34" charset="-120"/>
               </a:rPr>
-              <a:t>Multiplying vs Dividing</a:t>
-            </a:r>
-            <a:endParaRPr lang="en-US" sz="2000" dirty="0"/>
-          </a:p>
-        </p:txBody>
-      </p:sp>
-      <p:sp>
-        <p:nvSpPr>
-          <p:cNvPr id="6" name="Shape 4"/>
-          <p:cNvSpPr/>
-          <p:nvPr/>
-        </p:nvSpPr>
-        <p:spPr>
-          <a:xfrm>
-            <a:off x="548640" y="1051560"/>
-            <a:ext cx="3840480" cy="3474720"/>
-          </a:xfrm>
-          <a:prstGeom prst="rect">
-            <a:avLst/>
-          </a:prstGeom>
-          <a:solidFill>
-            <a:srgbClr val="FFFFFF"/>
-          </a:solidFill>
-          <a:ln/>
-          <a:effectLst>
-            <a:outerShdw sx="100000" sy="100000" kx="0" ky="0" algn="bl" rotWithShape="0" blurRad="50800" dist="25400" dir="8100000">
-              <a:srgbClr val="000000">
-                <a:alpha val="10000"/>
-              </a:srgbClr>
-            </a:outerShdw>
-          </a:effectLst>
-        </p:spPr>
-      </p:sp>
-      <p:sp>
-        <p:nvSpPr>
-          <p:cNvPr id="7" name="Shape 5"/>
-          <p:cNvSpPr/>
-          <p:nvPr/>
-        </p:nvSpPr>
-        <p:spPr>
-          <a:xfrm>
-            <a:off x="548640" y="1051560"/>
-            <a:ext cx="3840480" cy="54864"/>
+              <a:t>Dividing Fractions — KFC!</a:t>
+            </a:r>
+            <a:endParaRPr lang="en-US" sz="2400" dirty="0"/>
+          </a:p>
+        </p:txBody>
+      </p:sp>
+      <p:sp>
+        <p:nvSpPr>
+          <p:cNvPr id="4" name="Shape 2"/>
+          <p:cNvSpPr/>
+          <p:nvPr/>
+        </p:nvSpPr>
+        <p:spPr>
+          <a:xfrm>
+            <a:off x="548640" y="960120"/>
+            <a:ext cx="2286000" cy="36576"/>
           </a:xfrm>
           <a:prstGeom prst="rect">
             <a:avLst/>
@@ -2448,14 +1950,14 @@
       </p:sp>
       <p:sp>
         <p:nvSpPr>
-          <p:cNvPr id="8" name="Text 6"/>
-          <p:cNvSpPr/>
-          <p:nvPr/>
-        </p:nvSpPr>
-        <p:spPr>
-          <a:xfrm>
-            <a:off x="777240" y="1188720"/>
-            <a:ext cx="3383280" cy="457200"/>
+          <p:cNvPr id="5" name="Text 3"/>
+          <p:cNvSpPr/>
+          <p:nvPr/>
+        </p:nvSpPr>
+        <p:spPr>
+          <a:xfrm>
+            <a:off x="548640" y="1188720"/>
+            <a:ext cx="10058400" cy="3474720"/>
           </a:xfrm>
           <a:prstGeom prst="rect">
             <a:avLst/>
@@ -2464,364 +1966,117 @@
           <a:ln/>
         </p:spPr>
         <p:txBody>
-          <a:bodyPr wrap="square" lIns="0" tIns="0" rIns="0" bIns="0" rtlCol="0" anchor="ctr"/>
-          <a:lstStyle/>
-          <a:p>
-            <a:pPr indent="0" marL="0">
-              <a:buNone/>
-            </a:pPr>
-            <a:r>
-              <a:rPr lang="en-US" sz="1500" b="1" dirty="0">
-                <a:solidFill>
-                  <a:srgbClr val="1B2A4A"/>
-                </a:solidFill>
-                <a:latin typeface="Georgia" pitchFamily="34" charset="0"/>
-                <a:ea typeface="Georgia" pitchFamily="34" charset="-122"/>
-                <a:cs typeface="Georgia" pitchFamily="34" charset="-120"/>
-              </a:rPr>
-              <a:t>Multiplying Fractions</a:t>
-            </a:r>
-            <a:endParaRPr lang="en-US" sz="1500" dirty="0"/>
-          </a:p>
-        </p:txBody>
-      </p:sp>
-      <p:sp>
-        <p:nvSpPr>
-          <p:cNvPr id="9" name="Text 7"/>
-          <p:cNvSpPr/>
-          <p:nvPr/>
-        </p:nvSpPr>
-        <p:spPr>
-          <a:xfrm>
-            <a:off x="777240" y="1691640"/>
-            <a:ext cx="3383280" cy="2651760"/>
-          </a:xfrm>
-          <a:prstGeom prst="rect">
-            <a:avLst/>
-          </a:prstGeom>
-          <a:noFill/>
-          <a:ln/>
-        </p:spPr>
-        <p:txBody>
           <a:bodyPr wrap="square" rtlCol="0" anchor="t"/>
           <a:lstStyle/>
           <a:p>
-            <a:pPr marL="342900" indent="-342900">
+            <a:pPr>
+              <a:lnSpc>
+                <a:spcPct val="150000"/>
+              </a:lnSpc>
               <a:spcAft>
                 <a:spcPts val="600"/>
               </a:spcAft>
-              <a:buSzPct val="100000"/>
-              <a:buChar char="•"/>
-            </a:pPr>
-            <a:r>
-              <a:rPr lang="en-US" sz="1300" dirty="0">
+            </a:pPr>
+            <a:r>
+              <a:rPr lang="en-US" sz="1500" dirty="0">
                 <a:solidFill>
                   <a:srgbClr val="3D3A36"/>
                 </a:solidFill>
-                <a:latin typeface="Calibri" pitchFamily="34" charset="0"/>
-                <a:ea typeface="Calibri" pitchFamily="34" charset="-122"/>
-                <a:cs typeface="Calibri" pitchFamily="34" charset="-120"/>
-              </a:rPr>
-              <a:t>Multiply numerators together</a:t>
-            </a:r>
-            <a:endParaRPr lang="en-US" sz="1300" dirty="0"/>
-          </a:p>
-          <a:p>
-            <a:pPr marL="342900" indent="-342900">
+                <a:latin typeface="Arial" pitchFamily="34" charset="0"/>
+                <a:ea typeface="Arial" pitchFamily="34" charset="-122"/>
+                <a:cs typeface="Arial" pitchFamily="34" charset="-120"/>
+              </a:rPr>
+              <a:t>K — Keep the first fraction the same.</a:t>
+            </a:r>
+            <a:endParaRPr lang="en-US" sz="1500" dirty="0"/>
+          </a:p>
+          <a:p>
+            <a:pPr>
+              <a:lnSpc>
+                <a:spcPct val="150000"/>
+              </a:lnSpc>
               <a:spcAft>
                 <a:spcPts val="600"/>
               </a:spcAft>
-              <a:buSzPct val="100000"/>
-              <a:buChar char="•"/>
-            </a:pPr>
-            <a:r>
-              <a:rPr lang="en-US" sz="1300" dirty="0">
+            </a:pPr>
+            <a:r>
+              <a:rPr lang="en-US" sz="1500" dirty="0">
                 <a:solidFill>
                   <a:srgbClr val="3D3A36"/>
                 </a:solidFill>
-                <a:latin typeface="Calibri" pitchFamily="34" charset="0"/>
-                <a:ea typeface="Calibri" pitchFamily="34" charset="-122"/>
-                <a:cs typeface="Calibri" pitchFamily="34" charset="-120"/>
-              </a:rPr>
-              <a:t>Multiply denominators together</a:t>
-            </a:r>
-            <a:endParaRPr lang="en-US" sz="1300" dirty="0"/>
-          </a:p>
-          <a:p>
-            <a:pPr marL="342900" indent="-342900">
+                <a:latin typeface="Arial" pitchFamily="34" charset="0"/>
+                <a:ea typeface="Arial" pitchFamily="34" charset="-122"/>
+                <a:cs typeface="Arial" pitchFamily="34" charset="-120"/>
+              </a:rPr>
+              <a:t>F — Flip the second fraction (find the reciprocal).</a:t>
+            </a:r>
+            <a:endParaRPr lang="en-US" sz="1500" dirty="0"/>
+          </a:p>
+          <a:p>
+            <a:pPr>
+              <a:lnSpc>
+                <a:spcPct val="150000"/>
+              </a:lnSpc>
               <a:spcAft>
                 <a:spcPts val="600"/>
               </a:spcAft>
-              <a:buSzPct val="100000"/>
-              <a:buChar char="•"/>
-            </a:pPr>
-            <a:r>
-              <a:rPr lang="en-US" sz="1300" dirty="0">
+            </a:pPr>
+            <a:r>
+              <a:rPr lang="en-US" sz="1500" dirty="0">
                 <a:solidFill>
                   <a:srgbClr val="3D3A36"/>
                 </a:solidFill>
-                <a:latin typeface="Calibri" pitchFamily="34" charset="0"/>
-                <a:ea typeface="Calibri" pitchFamily="34" charset="-122"/>
-                <a:cs typeface="Calibri" pitchFamily="34" charset="-120"/>
-              </a:rPr>
-              <a:t>Simplify the answer</a:t>
-            </a:r>
-            <a:endParaRPr lang="en-US" sz="1300" dirty="0"/>
-          </a:p>
-          <a:p>
-            <a:pPr marL="342900" indent="-342900">
+                <a:latin typeface="Arial" pitchFamily="34" charset="0"/>
+                <a:ea typeface="Arial" pitchFamily="34" charset="-122"/>
+                <a:cs typeface="Arial" pitchFamily="34" charset="-120"/>
+              </a:rPr>
+              <a:t>C — Change ÷ to × (then multiply normally).</a:t>
+            </a:r>
+            <a:endParaRPr lang="en-US" sz="1500" dirty="0"/>
+          </a:p>
+          <a:p>
+            <a:pPr>
+              <a:lnSpc>
+                <a:spcPct val="150000"/>
+              </a:lnSpc>
               <a:spcAft>
                 <a:spcPts val="600"/>
               </a:spcAft>
-              <a:buSzPct val="100000"/>
-              <a:buChar char="•"/>
-            </a:pPr>
-            <a:r>
-              <a:rPr lang="en-US" sz="1300" dirty="0">
+            </a:pPr>
+            <a:r>
+              <a:rPr lang="en-US" sz="1500" dirty="0">
                 <a:solidFill>
                   <a:srgbClr val="3D3A36"/>
                 </a:solidFill>
-                <a:latin typeface="Calibri" pitchFamily="34" charset="0"/>
-                <a:ea typeface="Calibri" pitchFamily="34" charset="-122"/>
-                <a:cs typeface="Calibri" pitchFamily="34" charset="-120"/>
-              </a:rPr>
-              <a:t>Example: ¾ × ⅖ = 6/20 = 3/10</a:t>
-            </a:r>
-            <a:endParaRPr lang="en-US" sz="1300" dirty="0"/>
-          </a:p>
-          <a:p>
-            <a:pPr marL="342900" indent="-342900">
+                <a:latin typeface="Arial" pitchFamily="34" charset="0"/>
+                <a:ea typeface="Arial" pitchFamily="34" charset="-122"/>
+                <a:cs typeface="Arial" pitchFamily="34" charset="-120"/>
+              </a:rPr>
+              <a:t>²⁄₃ ÷ ⁴⁄₅ → ²⁄₃ × ⁵⁄₄ = ¹⁰⁄₁₂ = ⁵⁄₆</a:t>
+            </a:r>
+            <a:endParaRPr lang="en-US" sz="1500" dirty="0"/>
+          </a:p>
+          <a:p>
+            <a:pPr>
+              <a:lnSpc>
+                <a:spcPct val="150000"/>
+              </a:lnSpc>
               <a:spcAft>
                 <a:spcPts val="600"/>
               </a:spcAft>
-              <a:buSzPct val="100000"/>
-              <a:buChar char="•"/>
-            </a:pPr>
-            <a:r>
-              <a:rPr lang="en-US" sz="1300" dirty="0">
+            </a:pPr>
+            <a:r>
+              <a:rPr lang="en-US" sz="1500" dirty="0">
                 <a:solidFill>
                   <a:srgbClr val="3D3A36"/>
                 </a:solidFill>
-                <a:latin typeface="Calibri" pitchFamily="34" charset="0"/>
-                <a:ea typeface="Calibri" pitchFamily="34" charset="-122"/>
-                <a:cs typeface="Calibri" pitchFamily="34" charset="-120"/>
-              </a:rPr>
-              <a:t>No need for common denominator!</a:t>
-            </a:r>
-            <a:endParaRPr lang="en-US" sz="1300" dirty="0"/>
-          </a:p>
-        </p:txBody>
-      </p:sp>
-      <p:sp>
-        <p:nvSpPr>
-          <p:cNvPr id="10" name="Shape 8"/>
-          <p:cNvSpPr/>
-          <p:nvPr/>
-        </p:nvSpPr>
-        <p:spPr>
-          <a:xfrm>
-            <a:off x="4754880" y="1051560"/>
-            <a:ext cx="3840480" cy="3474720"/>
-          </a:xfrm>
-          <a:prstGeom prst="rect">
-            <a:avLst/>
-          </a:prstGeom>
-          <a:solidFill>
-            <a:srgbClr val="FFFFFF"/>
-          </a:solidFill>
-          <a:ln/>
-          <a:effectLst>
-            <a:outerShdw sx="100000" sy="100000" kx="0" ky="0" algn="bl" rotWithShape="0" blurRad="50800" dist="25400" dir="8100000">
-              <a:srgbClr val="000000">
-                <a:alpha val="10000"/>
-              </a:srgbClr>
-            </a:outerShdw>
-          </a:effectLst>
-        </p:spPr>
-      </p:sp>
-      <p:sp>
-        <p:nvSpPr>
-          <p:cNvPr id="11" name="Shape 9"/>
-          <p:cNvSpPr/>
-          <p:nvPr/>
-        </p:nvSpPr>
-        <p:spPr>
-          <a:xfrm>
-            <a:off x="4754880" y="1051560"/>
-            <a:ext cx="3840480" cy="54864"/>
-          </a:xfrm>
-          <a:prstGeom prst="rect">
-            <a:avLst/>
-          </a:prstGeom>
-          <a:solidFill>
-            <a:srgbClr val="E9C46A"/>
-          </a:solidFill>
-          <a:ln/>
-        </p:spPr>
-      </p:sp>
-      <p:sp>
-        <p:nvSpPr>
-          <p:cNvPr id="12" name="Text 10"/>
-          <p:cNvSpPr/>
-          <p:nvPr/>
-        </p:nvSpPr>
-        <p:spPr>
-          <a:xfrm>
-            <a:off x="4983480" y="1188720"/>
-            <a:ext cx="3383280" cy="457200"/>
-          </a:xfrm>
-          <a:prstGeom prst="rect">
-            <a:avLst/>
-          </a:prstGeom>
-          <a:noFill/>
-          <a:ln/>
-        </p:spPr>
-        <p:txBody>
-          <a:bodyPr wrap="square" lIns="0" tIns="0" rIns="0" bIns="0" rtlCol="0" anchor="ctr"/>
-          <a:lstStyle/>
-          <a:p>
-            <a:pPr indent="0" marL="0">
-              <a:buNone/>
-            </a:pPr>
-            <a:r>
-              <a:rPr lang="en-US" sz="1500" b="1" dirty="0">
-                <a:solidFill>
-                  <a:srgbClr val="1B2A4A"/>
-                </a:solidFill>
-                <a:latin typeface="Georgia" pitchFamily="34" charset="0"/>
-                <a:ea typeface="Georgia" pitchFamily="34" charset="-122"/>
-                <a:cs typeface="Georgia" pitchFamily="34" charset="-120"/>
-              </a:rPr>
-              <a:t>Dividing Fractions (KFC)</a:t>
+                <a:latin typeface="Arial" pitchFamily="34" charset="0"/>
+                <a:ea typeface="Arial" pitchFamily="34" charset="-122"/>
+                <a:cs typeface="Arial" pitchFamily="34" charset="-120"/>
+              </a:rPr>
+              <a:t>The reciprocal of ⁴⁄₅ is ⁵⁄₄ (flip top and bottom).</a:t>
             </a:r>
             <a:endParaRPr lang="en-US" sz="1500" dirty="0"/>
-          </a:p>
-        </p:txBody>
-      </p:sp>
-      <p:sp>
-        <p:nvSpPr>
-          <p:cNvPr id="13" name="Text 11"/>
-          <p:cNvSpPr/>
-          <p:nvPr/>
-        </p:nvSpPr>
-        <p:spPr>
-          <a:xfrm>
-            <a:off x="4983480" y="1691640"/>
-            <a:ext cx="3383280" cy="2651760"/>
-          </a:xfrm>
-          <a:prstGeom prst="rect">
-            <a:avLst/>
-          </a:prstGeom>
-          <a:noFill/>
-          <a:ln/>
-        </p:spPr>
-        <p:txBody>
-          <a:bodyPr wrap="square" rtlCol="0" anchor="t"/>
-          <a:lstStyle/>
-          <a:p>
-            <a:pPr marL="342900" indent="-342900">
-              <a:spcAft>
-                <a:spcPts val="600"/>
-              </a:spcAft>
-              <a:buSzPct val="100000"/>
-              <a:buChar char="•"/>
-            </a:pPr>
-            <a:r>
-              <a:rPr lang="en-US" sz="1300" dirty="0">
-                <a:solidFill>
-                  <a:srgbClr val="3D3A36"/>
-                </a:solidFill>
-                <a:latin typeface="Calibri" pitchFamily="34" charset="0"/>
-                <a:ea typeface="Calibri" pitchFamily="34" charset="-122"/>
-                <a:cs typeface="Calibri" pitchFamily="34" charset="-120"/>
-              </a:rPr>
-              <a:t>KEEP the first fraction</a:t>
-            </a:r>
-            <a:endParaRPr lang="en-US" sz="1300" dirty="0"/>
-          </a:p>
-          <a:p>
-            <a:pPr marL="342900" indent="-342900">
-              <a:spcAft>
-                <a:spcPts val="600"/>
-              </a:spcAft>
-              <a:buSzPct val="100000"/>
-              <a:buChar char="•"/>
-            </a:pPr>
-            <a:r>
-              <a:rPr lang="en-US" sz="1300" dirty="0">
-                <a:solidFill>
-                  <a:srgbClr val="3D3A36"/>
-                </a:solidFill>
-                <a:latin typeface="Calibri" pitchFamily="34" charset="0"/>
-                <a:ea typeface="Calibri" pitchFamily="34" charset="-122"/>
-                <a:cs typeface="Calibri" pitchFamily="34" charset="-120"/>
-              </a:rPr>
-              <a:t>FLIP the second fraction (reciprocal)</a:t>
-            </a:r>
-            <a:endParaRPr lang="en-US" sz="1300" dirty="0"/>
-          </a:p>
-          <a:p>
-            <a:pPr marL="342900" indent="-342900">
-              <a:spcAft>
-                <a:spcPts val="600"/>
-              </a:spcAft>
-              <a:buSzPct val="100000"/>
-              <a:buChar char="•"/>
-            </a:pPr>
-            <a:r>
-              <a:rPr lang="en-US" sz="1300" dirty="0">
-                <a:solidFill>
-                  <a:srgbClr val="3D3A36"/>
-                </a:solidFill>
-                <a:latin typeface="Calibri" pitchFamily="34" charset="0"/>
-                <a:ea typeface="Calibri" pitchFamily="34" charset="-122"/>
-                <a:cs typeface="Calibri" pitchFamily="34" charset="-120"/>
-              </a:rPr>
-              <a:t>CHANGE ÷ to ×</a:t>
-            </a:r>
-            <a:endParaRPr lang="en-US" sz="1300" dirty="0"/>
-          </a:p>
-          <a:p>
-            <a:pPr marL="342900" indent="-342900">
-              <a:spcAft>
-                <a:spcPts val="600"/>
-              </a:spcAft>
-              <a:buSzPct val="100000"/>
-              <a:buChar char="•"/>
-            </a:pPr>
-            <a:r>
-              <a:rPr lang="en-US" sz="1300" dirty="0">
-                <a:solidFill>
-                  <a:srgbClr val="3D3A36"/>
-                </a:solidFill>
-                <a:latin typeface="Calibri" pitchFamily="34" charset="0"/>
-                <a:ea typeface="Calibri" pitchFamily="34" charset="-122"/>
-                <a:cs typeface="Calibri" pitchFamily="34" charset="-120"/>
-              </a:rPr>
-              <a:t>Example: ¾ ÷ ⅖ = ¾ × 5/2 = 15/8 = 1⅞</a:t>
-            </a:r>
-            <a:endParaRPr lang="en-US" sz="1300" dirty="0"/>
-          </a:p>
-          <a:p>
-            <a:pPr marL="342900" indent="-342900">
-              <a:spcAft>
-                <a:spcPts val="600"/>
-              </a:spcAft>
-              <a:buSzPct val="100000"/>
-              <a:buChar char="•"/>
-            </a:pPr>
-            <a:r>
-              <a:rPr lang="en-US" sz="1300" dirty="0">
-                <a:solidFill>
-                  <a:srgbClr val="3D3A36"/>
-                </a:solidFill>
-                <a:latin typeface="Calibri" pitchFamily="34" charset="0"/>
-                <a:ea typeface="Calibri" pitchFamily="34" charset="-122"/>
-                <a:cs typeface="Calibri" pitchFamily="34" charset="-120"/>
-              </a:rPr>
-              <a:t>Then multiply as normal</a:t>
-            </a:r>
-            <a:endParaRPr lang="en-US" sz="1300" dirty="0"/>
           </a:p>
         </p:txBody>
       </p:sp>
@@ -2866,47 +2121,7 @@
         <p:spPr>
           <a:xfrm>
             <a:off x="0" y="0"/>
-            <a:ext cx="9144000" cy="822960"/>
-          </a:xfrm>
-          <a:prstGeom prst="rect">
-            <a:avLst/>
-          </a:prstGeom>
-          <a:solidFill>
-            <a:srgbClr val="FFFFFF"/>
-          </a:solidFill>
-          <a:ln/>
-        </p:spPr>
-      </p:sp>
-      <p:sp>
-        <p:nvSpPr>
-          <p:cNvPr id="3" name="Shape 1"/>
-          <p:cNvSpPr/>
-          <p:nvPr/>
-        </p:nvSpPr>
-        <p:spPr>
-          <a:xfrm>
-            <a:off x="0" y="804672"/>
-            <a:ext cx="9144000" cy="27432"/>
-          </a:xfrm>
-          <a:prstGeom prst="rect">
-            <a:avLst/>
-          </a:prstGeom>
-          <a:solidFill>
-            <a:srgbClr val="E5E2DC"/>
-          </a:solidFill>
-          <a:ln/>
-        </p:spPr>
-      </p:sp>
-      <p:sp>
-        <p:nvSpPr>
-          <p:cNvPr id="4" name="Shape 2"/>
-          <p:cNvSpPr/>
-          <p:nvPr/>
-        </p:nvSpPr>
-        <p:spPr>
-          <a:xfrm>
-            <a:off x="548640" y="201168"/>
-            <a:ext cx="54864" cy="420624"/>
+            <a:ext cx="73152" cy="5148072"/>
           </a:xfrm>
           <a:prstGeom prst="rect">
             <a:avLst/>
@@ -2919,14 +2134,75 @@
       </p:sp>
       <p:sp>
         <p:nvSpPr>
+          <p:cNvPr id="3" name="Shape 1"/>
+          <p:cNvSpPr/>
+          <p:nvPr/>
+        </p:nvSpPr>
+        <p:spPr>
+          <a:xfrm>
+            <a:off x="548640" y="274320"/>
+            <a:ext cx="2011680" cy="320040"/>
+          </a:xfrm>
+          <a:prstGeom prst="roundRect">
+            <a:avLst>
+              <a:gd name="adj" fmla="val 17143"/>
+            </a:avLst>
+          </a:prstGeom>
+          <a:solidFill>
+            <a:srgbClr val="2A9D8F"/>
+          </a:solidFill>
+          <a:ln/>
+        </p:spPr>
+      </p:sp>
+      <p:sp>
+        <p:nvSpPr>
+          <p:cNvPr id="4" name="Text 2"/>
+          <p:cNvSpPr/>
+          <p:nvPr/>
+        </p:nvSpPr>
+        <p:spPr>
+          <a:xfrm>
+            <a:off x="548640" y="274320"/>
+            <a:ext cx="2011680" cy="320040"/>
+          </a:xfrm>
+          <a:prstGeom prst="rect">
+            <a:avLst/>
+          </a:prstGeom>
+          <a:noFill/>
+          <a:ln/>
+        </p:spPr>
+        <p:txBody>
+          <a:bodyPr wrap="square" rtlCol="0" anchor="ctr"/>
+          <a:lstStyle/>
+          <a:p>
+            <a:pPr algn="ctr" indent="0" marL="0">
+              <a:buNone/>
+            </a:pPr>
+            <a:r>
+              <a:rPr lang="en-US" sz="1000" b="1" dirty="0">
+                <a:solidFill>
+                  <a:srgbClr val="FFFFFF"/>
+                </a:solidFill>
+                <a:latin typeface="Arial" pitchFamily="34" charset="0"/>
+                <a:ea typeface="Arial" pitchFamily="34" charset="-122"/>
+                <a:cs typeface="Arial" pitchFamily="34" charset="-120"/>
+              </a:rPr>
+              <a:t>WORKED EXAMPLE</a:t>
+            </a:r>
+            <a:endParaRPr lang="en-US" sz="1000" dirty="0"/>
+          </a:p>
+        </p:txBody>
+      </p:sp>
+      <p:sp>
+        <p:nvSpPr>
           <p:cNvPr id="5" name="Text 3"/>
           <p:cNvSpPr/>
           <p:nvPr/>
         </p:nvSpPr>
         <p:spPr>
           <a:xfrm>
-            <a:off x="777240" y="137160"/>
-            <a:ext cx="7772400" cy="548640"/>
+            <a:off x="2743200" y="274320"/>
+            <a:ext cx="7315200" cy="457200"/>
           </a:xfrm>
           <a:prstGeom prst="rect">
             <a:avLst/>
@@ -2935,7 +2211,7 @@
           <a:ln/>
         </p:spPr>
         <p:txBody>
-          <a:bodyPr wrap="square" lIns="0" tIns="0" rIns="0" bIns="0" rtlCol="0" anchor="ctr"/>
+          <a:bodyPr wrap="square" rtlCol="0" anchor="ctr"/>
           <a:lstStyle/>
           <a:p>
             <a:pPr indent="0" marL="0">
@@ -2950,7 +2226,7 @@
                 <a:ea typeface="Georgia" pitchFamily="34" charset="-122"/>
                 <a:cs typeface="Georgia" pitchFamily="34" charset="-120"/>
               </a:rPr>
-              <a:t>Cross-Cancelling (Shortcut)</a:t>
+              <a:t>³⁄₄ ÷ ²⁄₅</a:t>
             </a:r>
             <a:endParaRPr lang="en-US" sz="2000" dirty="0"/>
           </a:p>
@@ -2958,14 +2234,34 @@
       </p:sp>
       <p:sp>
         <p:nvSpPr>
-          <p:cNvPr id="6" name="Text 4"/>
-          <p:cNvSpPr/>
-          <p:nvPr/>
-        </p:nvSpPr>
-        <p:spPr>
-          <a:xfrm>
-            <a:off x="731520" y="1051560"/>
-            <a:ext cx="7680960" cy="3108960"/>
+          <p:cNvPr id="6" name="Shape 4"/>
+          <p:cNvSpPr/>
+          <p:nvPr/>
+        </p:nvSpPr>
+        <p:spPr>
+          <a:xfrm>
+            <a:off x="548640" y="1051560"/>
+            <a:ext cx="365760" cy="365760"/>
+          </a:xfrm>
+          <a:prstGeom prst="ellipse">
+            <a:avLst/>
+          </a:prstGeom>
+          <a:solidFill>
+            <a:srgbClr val="111D35"/>
+          </a:solidFill>
+          <a:ln/>
+        </p:spPr>
+      </p:sp>
+      <p:sp>
+        <p:nvSpPr>
+          <p:cNvPr id="7" name="Text 5"/>
+          <p:cNvSpPr/>
+          <p:nvPr/>
+        </p:nvSpPr>
+        <p:spPr>
+          <a:xfrm>
+            <a:off x="548640" y="1051560"/>
+            <a:ext cx="365760" cy="365760"/>
           </a:xfrm>
           <a:prstGeom prst="rect">
             <a:avLst/>
@@ -2974,141 +2270,26 @@
           <a:ln/>
         </p:spPr>
         <p:txBody>
-          <a:bodyPr wrap="square" rtlCol="0" anchor="t"/>
-          <a:lstStyle/>
-          <a:p>
-            <a:pPr marL="342900" indent="-342900">
-              <a:spcAft>
-                <a:spcPts val="800"/>
-              </a:spcAft>
-              <a:buSzPct val="100000"/>
-              <a:buChar char="•"/>
-            </a:pPr>
-            <a:r>
-              <a:rPr lang="en-US" sz="1500" dirty="0">
-                <a:solidFill>
-                  <a:srgbClr val="3D3A36"/>
-                </a:solidFill>
-                <a:latin typeface="Calibri" pitchFamily="34" charset="0"/>
-                <a:ea typeface="Calibri" pitchFamily="34" charset="-122"/>
-                <a:cs typeface="Calibri" pitchFamily="34" charset="-120"/>
-              </a:rPr>
-              <a:t>Before multiplying, you can cancel diagonally.</a:t>
-            </a:r>
-            <a:endParaRPr lang="en-US" sz="1500" dirty="0"/>
-          </a:p>
-          <a:p>
-            <a:pPr marL="342900" indent="-342900">
-              <a:spcAft>
-                <a:spcPts val="800"/>
-              </a:spcAft>
-              <a:buSzPct val="100000"/>
-              <a:buChar char="•"/>
-            </a:pPr>
-            <a:r>
-              <a:rPr lang="en-US" sz="1500" dirty="0">
-                <a:solidFill>
-                  <a:srgbClr val="3D3A36"/>
-                </a:solidFill>
-                <a:latin typeface="Calibri" pitchFamily="34" charset="0"/>
-                <a:ea typeface="Calibri" pitchFamily="34" charset="-122"/>
-                <a:cs typeface="Calibri" pitchFamily="34" charset="-120"/>
-              </a:rPr>
-              <a:t>If a numerator and a denominator share a common factor, divide both.</a:t>
-            </a:r>
-            <a:endParaRPr lang="en-US" sz="1500" dirty="0"/>
-          </a:p>
-          <a:p>
-            <a:pPr marL="342900" indent="-342900">
-              <a:spcAft>
-                <a:spcPts val="800"/>
-              </a:spcAft>
-              <a:buSzPct val="100000"/>
-              <a:buChar char="•"/>
-            </a:pPr>
-            <a:r>
-              <a:rPr lang="en-US" sz="1500" dirty="0">
-                <a:solidFill>
-                  <a:srgbClr val="3D3A36"/>
-                </a:solidFill>
-                <a:latin typeface="Calibri" pitchFamily="34" charset="0"/>
-                <a:ea typeface="Calibri" pitchFamily="34" charset="-122"/>
-                <a:cs typeface="Calibri" pitchFamily="34" charset="-120"/>
-              </a:rPr>
-              <a:t>This makes the numbers smaller BEFORE you multiply.</a:t>
-            </a:r>
-            <a:endParaRPr lang="en-US" sz="1500" dirty="0"/>
-          </a:p>
-          <a:p>
-            <a:pPr marL="342900" indent="-342900">
-              <a:spcAft>
-                <a:spcPts val="800"/>
-              </a:spcAft>
-              <a:buSzPct val="100000"/>
-              <a:buChar char="•"/>
-            </a:pPr>
-            <a:r>
-              <a:rPr lang="en-US" sz="1500" dirty="0">
-                <a:solidFill>
-                  <a:srgbClr val="3D3A36"/>
-                </a:solidFill>
-                <a:latin typeface="Calibri" pitchFamily="34" charset="0"/>
-                <a:ea typeface="Calibri" pitchFamily="34" charset="-122"/>
-                <a:cs typeface="Calibri" pitchFamily="34" charset="-120"/>
-              </a:rPr>
-              <a:t>Example: 4/9 × 3/8 → cancel 4 and 8 (÷4) and 3 and 9 (÷3) → 1/3 × 1/2 = 1/6.</a:t>
-            </a:r>
-            <a:endParaRPr lang="en-US" sz="1500" dirty="0"/>
-          </a:p>
-          <a:p>
-            <a:pPr marL="342900" indent="-342900">
-              <a:spcAft>
-                <a:spcPts val="800"/>
-              </a:spcAft>
-              <a:buSzPct val="100000"/>
-              <a:buChar char="•"/>
-            </a:pPr>
-            <a:r>
-              <a:rPr lang="en-US" sz="1500" dirty="0">
-                <a:solidFill>
-                  <a:srgbClr val="3D3A36"/>
-                </a:solidFill>
-                <a:latin typeface="Calibri" pitchFamily="34" charset="0"/>
-                <a:ea typeface="Calibri" pitchFamily="34" charset="-122"/>
-                <a:cs typeface="Calibri" pitchFamily="34" charset="-120"/>
-              </a:rPr>
-              <a:t>Cross-cancelling gives the same answer but avoids big numbers.</a:t>
-            </a:r>
-            <a:endParaRPr lang="en-US" sz="1500" dirty="0"/>
-          </a:p>
-        </p:txBody>
-      </p:sp>
-      <p:sp>
-        <p:nvSpPr>
-          <p:cNvPr id="7" name="Shape 5"/>
-          <p:cNvSpPr/>
-          <p:nvPr/>
-        </p:nvSpPr>
-        <p:spPr>
-          <a:xfrm>
-            <a:off x="731520" y="4206240"/>
-            <a:ext cx="7680960" cy="640080"/>
-          </a:xfrm>
-          <a:prstGeom prst="rect">
-            <a:avLst/>
-          </a:prstGeom>
-          <a:solidFill>
-            <a:srgbClr val="E8F5F3"/>
-          </a:solidFill>
-          <a:ln/>
-          <a:effectLst>
-            <a:outerShdw sx="100000" sy="100000" kx="0" ky="0" algn="bl" rotWithShape="0" blurRad="50800" dist="25400" dir="8100000">
-              <a:srgbClr val="000000">
-                <a:alpha val="10000"/>
-              </a:srgbClr>
-            </a:outerShdw>
-          </a:effectLst>
-        </p:spPr>
+          <a:bodyPr wrap="square" rtlCol="0" anchor="ctr"/>
+          <a:lstStyle/>
+          <a:p>
+            <a:pPr algn="ctr" indent="0" marL="0">
+              <a:buNone/>
+            </a:pPr>
+            <a:r>
+              <a:rPr lang="en-US" sz="1300" b="1" dirty="0">
+                <a:solidFill>
+                  <a:srgbClr val="FFFFFF"/>
+                </a:solidFill>
+                <a:latin typeface="Arial" pitchFamily="34" charset="0"/>
+                <a:ea typeface="Arial" pitchFamily="34" charset="-122"/>
+                <a:cs typeface="Arial" pitchFamily="34" charset="-120"/>
+              </a:rPr>
+              <a:t>1</a:t>
+            </a:r>
+            <a:endParaRPr lang="en-US" sz="1300" dirty="0"/>
+          </a:p>
+        </p:txBody>
       </p:sp>
       <p:sp>
         <p:nvSpPr>
@@ -3118,8 +2299,8 @@
         </p:nvSpPr>
         <p:spPr>
           <a:xfrm>
-            <a:off x="914400" y="4251960"/>
-            <a:ext cx="7315200" cy="548640"/>
+            <a:off x="1097280" y="1005840"/>
+            <a:ext cx="9601200" cy="502920"/>
           </a:xfrm>
           <a:prstGeom prst="rect">
             <a:avLst/>
@@ -3135,31 +2316,409 @@
               <a:buNone/>
             </a:pPr>
             <a:r>
-              <a:rPr lang="en-US" sz="1200" b="1" dirty="0">
-                <a:solidFill>
-                  <a:srgbClr val="2A9D8F"/>
-                </a:solidFill>
-                <a:latin typeface="Calibri" pitchFamily="34" charset="0"/>
-                <a:ea typeface="Calibri" pitchFamily="34" charset="-122"/>
-                <a:cs typeface="Calibri" pitchFamily="34" charset="-120"/>
-              </a:rPr>
-              <a:t>Key Idea: </a:t>
-            </a:r>
+              <a:rPr lang="en-US" sz="1500" dirty="0">
+                <a:solidFill>
+                  <a:srgbClr val="3D3A36"/>
+                </a:solidFill>
+                <a:latin typeface="Arial" pitchFamily="34" charset="0"/>
+                <a:ea typeface="Arial" pitchFamily="34" charset="-122"/>
+                <a:cs typeface="Arial" pitchFamily="34" charset="-120"/>
+              </a:rPr>
+              <a:t>Keep: ³⁄₄</a:t>
+            </a:r>
+            <a:endParaRPr lang="en-US" sz="1500" dirty="0"/>
+          </a:p>
+        </p:txBody>
+      </p:sp>
+      <p:sp>
+        <p:nvSpPr>
+          <p:cNvPr id="9" name="Shape 7"/>
+          <p:cNvSpPr/>
+          <p:nvPr/>
+        </p:nvSpPr>
+        <p:spPr>
+          <a:xfrm>
+            <a:off x="548640" y="1783080"/>
+            <a:ext cx="365760" cy="365760"/>
+          </a:xfrm>
+          <a:prstGeom prst="ellipse">
+            <a:avLst/>
+          </a:prstGeom>
+          <a:solidFill>
+            <a:srgbClr val="111D35"/>
+          </a:solidFill>
+          <a:ln/>
+        </p:spPr>
+      </p:sp>
+      <p:sp>
+        <p:nvSpPr>
+          <p:cNvPr id="10" name="Text 8"/>
+          <p:cNvSpPr/>
+          <p:nvPr/>
+        </p:nvSpPr>
+        <p:spPr>
+          <a:xfrm>
+            <a:off x="548640" y="1783080"/>
+            <a:ext cx="365760" cy="365760"/>
+          </a:xfrm>
+          <a:prstGeom prst="rect">
+            <a:avLst/>
+          </a:prstGeom>
+          <a:noFill/>
+          <a:ln/>
+        </p:spPr>
+        <p:txBody>
+          <a:bodyPr wrap="square" rtlCol="0" anchor="ctr"/>
+          <a:lstStyle/>
+          <a:p>
+            <a:pPr algn="ctr" indent="0" marL="0">
+              <a:buNone/>
+            </a:pPr>
+            <a:r>
+              <a:rPr lang="en-US" sz="1300" b="1" dirty="0">
+                <a:solidFill>
+                  <a:srgbClr val="FFFFFF"/>
+                </a:solidFill>
+                <a:latin typeface="Arial" pitchFamily="34" charset="0"/>
+                <a:ea typeface="Arial" pitchFamily="34" charset="-122"/>
+                <a:cs typeface="Arial" pitchFamily="34" charset="-120"/>
+              </a:rPr>
+              <a:t>2</a:t>
+            </a:r>
+            <a:endParaRPr lang="en-US" sz="1300" dirty="0"/>
+          </a:p>
+        </p:txBody>
+      </p:sp>
+      <p:sp>
+        <p:nvSpPr>
+          <p:cNvPr id="11" name="Text 9"/>
+          <p:cNvSpPr/>
+          <p:nvPr/>
+        </p:nvSpPr>
+        <p:spPr>
+          <a:xfrm>
+            <a:off x="1097280" y="1737360"/>
+            <a:ext cx="9601200" cy="502920"/>
+          </a:xfrm>
+          <a:prstGeom prst="rect">
+            <a:avLst/>
+          </a:prstGeom>
+          <a:noFill/>
+          <a:ln/>
+        </p:spPr>
+        <p:txBody>
+          <a:bodyPr wrap="square" rtlCol="0" anchor="ctr"/>
+          <a:lstStyle/>
+          <a:p>
             <a:pPr indent="0" marL="0">
               <a:buNone/>
             </a:pPr>
             <a:r>
-              <a:rPr lang="en-US" sz="1200" i="1" dirty="0">
+              <a:rPr lang="en-US" sz="1500" dirty="0">
                 <a:solidFill>
                   <a:srgbClr val="3D3A36"/>
                 </a:solidFill>
-                <a:latin typeface="Calibri" pitchFamily="34" charset="0"/>
-                <a:ea typeface="Calibri" pitchFamily="34" charset="-122"/>
-                <a:cs typeface="Calibri" pitchFamily="34" charset="-120"/>
-              </a:rPr>
-              <a:t>Cross-cancel first, then multiply — easier numbers, less simplifying at the end.</a:t>
-            </a:r>
-            <a:endParaRPr lang="en-US" sz="1200" dirty="0"/>
+                <a:latin typeface="Arial" pitchFamily="34" charset="0"/>
+                <a:ea typeface="Arial" pitchFamily="34" charset="-122"/>
+                <a:cs typeface="Arial" pitchFamily="34" charset="-120"/>
+              </a:rPr>
+              <a:t>Flip: ²⁄₅ becomes ⁵⁄₂</a:t>
+            </a:r>
+            <a:endParaRPr lang="en-US" sz="1500" dirty="0"/>
+          </a:p>
+        </p:txBody>
+      </p:sp>
+      <p:sp>
+        <p:nvSpPr>
+          <p:cNvPr id="12" name="Shape 10"/>
+          <p:cNvSpPr/>
+          <p:nvPr/>
+        </p:nvSpPr>
+        <p:spPr>
+          <a:xfrm>
+            <a:off x="548640" y="2514600"/>
+            <a:ext cx="365760" cy="365760"/>
+          </a:xfrm>
+          <a:prstGeom prst="ellipse">
+            <a:avLst/>
+          </a:prstGeom>
+          <a:solidFill>
+            <a:srgbClr val="111D35"/>
+          </a:solidFill>
+          <a:ln/>
+        </p:spPr>
+      </p:sp>
+      <p:sp>
+        <p:nvSpPr>
+          <p:cNvPr id="13" name="Text 11"/>
+          <p:cNvSpPr/>
+          <p:nvPr/>
+        </p:nvSpPr>
+        <p:spPr>
+          <a:xfrm>
+            <a:off x="548640" y="2514600"/>
+            <a:ext cx="365760" cy="365760"/>
+          </a:xfrm>
+          <a:prstGeom prst="rect">
+            <a:avLst/>
+          </a:prstGeom>
+          <a:noFill/>
+          <a:ln/>
+        </p:spPr>
+        <p:txBody>
+          <a:bodyPr wrap="square" rtlCol="0" anchor="ctr"/>
+          <a:lstStyle/>
+          <a:p>
+            <a:pPr algn="ctr" indent="0" marL="0">
+              <a:buNone/>
+            </a:pPr>
+            <a:r>
+              <a:rPr lang="en-US" sz="1300" b="1" dirty="0">
+                <a:solidFill>
+                  <a:srgbClr val="FFFFFF"/>
+                </a:solidFill>
+                <a:latin typeface="Arial" pitchFamily="34" charset="0"/>
+                <a:ea typeface="Arial" pitchFamily="34" charset="-122"/>
+                <a:cs typeface="Arial" pitchFamily="34" charset="-120"/>
+              </a:rPr>
+              <a:t>3</a:t>
+            </a:r>
+            <a:endParaRPr lang="en-US" sz="1300" dirty="0"/>
+          </a:p>
+        </p:txBody>
+      </p:sp>
+      <p:sp>
+        <p:nvSpPr>
+          <p:cNvPr id="14" name="Text 12"/>
+          <p:cNvSpPr/>
+          <p:nvPr/>
+        </p:nvSpPr>
+        <p:spPr>
+          <a:xfrm>
+            <a:off x="1097280" y="2468880"/>
+            <a:ext cx="9601200" cy="502920"/>
+          </a:xfrm>
+          <a:prstGeom prst="rect">
+            <a:avLst/>
+          </a:prstGeom>
+          <a:noFill/>
+          <a:ln/>
+        </p:spPr>
+        <p:txBody>
+          <a:bodyPr wrap="square" rtlCol="0" anchor="ctr"/>
+          <a:lstStyle/>
+          <a:p>
+            <a:pPr indent="0" marL="0">
+              <a:buNone/>
+            </a:pPr>
+            <a:r>
+              <a:rPr lang="en-US" sz="1500" dirty="0">
+                <a:solidFill>
+                  <a:srgbClr val="3D3A36"/>
+                </a:solidFill>
+                <a:latin typeface="Arial" pitchFamily="34" charset="0"/>
+                <a:ea typeface="Arial" pitchFamily="34" charset="-122"/>
+                <a:cs typeface="Arial" pitchFamily="34" charset="-120"/>
+              </a:rPr>
+              <a:t>Change: ÷ becomes ×</a:t>
+            </a:r>
+            <a:endParaRPr lang="en-US" sz="1500" dirty="0"/>
+          </a:p>
+        </p:txBody>
+      </p:sp>
+      <p:sp>
+        <p:nvSpPr>
+          <p:cNvPr id="15" name="Shape 13"/>
+          <p:cNvSpPr/>
+          <p:nvPr/>
+        </p:nvSpPr>
+        <p:spPr>
+          <a:xfrm>
+            <a:off x="548640" y="3246120"/>
+            <a:ext cx="365760" cy="365760"/>
+          </a:xfrm>
+          <a:prstGeom prst="ellipse">
+            <a:avLst/>
+          </a:prstGeom>
+          <a:solidFill>
+            <a:srgbClr val="111D35"/>
+          </a:solidFill>
+          <a:ln/>
+        </p:spPr>
+      </p:sp>
+      <p:sp>
+        <p:nvSpPr>
+          <p:cNvPr id="16" name="Text 14"/>
+          <p:cNvSpPr/>
+          <p:nvPr/>
+        </p:nvSpPr>
+        <p:spPr>
+          <a:xfrm>
+            <a:off x="548640" y="3246120"/>
+            <a:ext cx="365760" cy="365760"/>
+          </a:xfrm>
+          <a:prstGeom prst="rect">
+            <a:avLst/>
+          </a:prstGeom>
+          <a:noFill/>
+          <a:ln/>
+        </p:spPr>
+        <p:txBody>
+          <a:bodyPr wrap="square" rtlCol="0" anchor="ctr"/>
+          <a:lstStyle/>
+          <a:p>
+            <a:pPr algn="ctr" indent="0" marL="0">
+              <a:buNone/>
+            </a:pPr>
+            <a:r>
+              <a:rPr lang="en-US" sz="1300" b="1" dirty="0">
+                <a:solidFill>
+                  <a:srgbClr val="FFFFFF"/>
+                </a:solidFill>
+                <a:latin typeface="Arial" pitchFamily="34" charset="0"/>
+                <a:ea typeface="Arial" pitchFamily="34" charset="-122"/>
+                <a:cs typeface="Arial" pitchFamily="34" charset="-120"/>
+              </a:rPr>
+              <a:t>4</a:t>
+            </a:r>
+            <a:endParaRPr lang="en-US" sz="1300" dirty="0"/>
+          </a:p>
+        </p:txBody>
+      </p:sp>
+      <p:sp>
+        <p:nvSpPr>
+          <p:cNvPr id="17" name="Text 15"/>
+          <p:cNvSpPr/>
+          <p:nvPr/>
+        </p:nvSpPr>
+        <p:spPr>
+          <a:xfrm>
+            <a:off x="1097280" y="3200400"/>
+            <a:ext cx="9601200" cy="502920"/>
+          </a:xfrm>
+          <a:prstGeom prst="rect">
+            <a:avLst/>
+          </a:prstGeom>
+          <a:noFill/>
+          <a:ln/>
+        </p:spPr>
+        <p:txBody>
+          <a:bodyPr wrap="square" rtlCol="0" anchor="ctr"/>
+          <a:lstStyle/>
+          <a:p>
+            <a:pPr indent="0" marL="0">
+              <a:buNone/>
+            </a:pPr>
+            <a:r>
+              <a:rPr lang="en-US" sz="1500" dirty="0">
+                <a:solidFill>
+                  <a:srgbClr val="3D3A36"/>
+                </a:solidFill>
+                <a:latin typeface="Arial" pitchFamily="34" charset="0"/>
+                <a:ea typeface="Arial" pitchFamily="34" charset="-122"/>
+                <a:cs typeface="Arial" pitchFamily="34" charset="-120"/>
+              </a:rPr>
+              <a:t>Calculate: ³⁄₄ × ⁵⁄₂ = ¹⁵⁄₈</a:t>
+            </a:r>
+            <a:endParaRPr lang="en-US" sz="1500" dirty="0"/>
+          </a:p>
+        </p:txBody>
+      </p:sp>
+      <p:sp>
+        <p:nvSpPr>
+          <p:cNvPr id="18" name="Shape 16"/>
+          <p:cNvSpPr/>
+          <p:nvPr/>
+        </p:nvSpPr>
+        <p:spPr>
+          <a:xfrm>
+            <a:off x="548640" y="3977640"/>
+            <a:ext cx="365760" cy="365760"/>
+          </a:xfrm>
+          <a:prstGeom prst="ellipse">
+            <a:avLst/>
+          </a:prstGeom>
+          <a:solidFill>
+            <a:srgbClr val="2A9D8F"/>
+          </a:solidFill>
+          <a:ln/>
+        </p:spPr>
+      </p:sp>
+      <p:sp>
+        <p:nvSpPr>
+          <p:cNvPr id="19" name="Text 17"/>
+          <p:cNvSpPr/>
+          <p:nvPr/>
+        </p:nvSpPr>
+        <p:spPr>
+          <a:xfrm>
+            <a:off x="548640" y="3977640"/>
+            <a:ext cx="365760" cy="365760"/>
+          </a:xfrm>
+          <a:prstGeom prst="rect">
+            <a:avLst/>
+          </a:prstGeom>
+          <a:noFill/>
+          <a:ln/>
+        </p:spPr>
+        <p:txBody>
+          <a:bodyPr wrap="square" rtlCol="0" anchor="ctr"/>
+          <a:lstStyle/>
+          <a:p>
+            <a:pPr algn="ctr" indent="0" marL="0">
+              <a:buNone/>
+            </a:pPr>
+            <a:r>
+              <a:rPr lang="en-US" sz="1300" b="1" dirty="0">
+                <a:solidFill>
+                  <a:srgbClr val="FFFFFF"/>
+                </a:solidFill>
+                <a:latin typeface="Arial" pitchFamily="34" charset="0"/>
+                <a:ea typeface="Arial" pitchFamily="34" charset="-122"/>
+                <a:cs typeface="Arial" pitchFamily="34" charset="-120"/>
+              </a:rPr>
+              <a:t>5</a:t>
+            </a:r>
+            <a:endParaRPr lang="en-US" sz="1300" dirty="0"/>
+          </a:p>
+        </p:txBody>
+      </p:sp>
+      <p:sp>
+        <p:nvSpPr>
+          <p:cNvPr id="20" name="Text 18"/>
+          <p:cNvSpPr/>
+          <p:nvPr/>
+        </p:nvSpPr>
+        <p:spPr>
+          <a:xfrm>
+            <a:off x="1097280" y="3931920"/>
+            <a:ext cx="9601200" cy="502920"/>
+          </a:xfrm>
+          <a:prstGeom prst="rect">
+            <a:avLst/>
+          </a:prstGeom>
+          <a:noFill/>
+          <a:ln/>
+        </p:spPr>
+        <p:txBody>
+          <a:bodyPr wrap="square" rtlCol="0" anchor="ctr"/>
+          <a:lstStyle/>
+          <a:p>
+            <a:pPr indent="0" marL="0">
+              <a:buNone/>
+            </a:pPr>
+            <a:r>
+              <a:rPr lang="en-US" sz="1500" b="1" dirty="0">
+                <a:solidFill>
+                  <a:srgbClr val="2A9D8F"/>
+                </a:solidFill>
+                <a:latin typeface="Arial" pitchFamily="34" charset="0"/>
+                <a:ea typeface="Arial" pitchFamily="34" charset="-122"/>
+                <a:cs typeface="Arial" pitchFamily="34" charset="-120"/>
+              </a:rPr>
+              <a:t>Convert: ¹⁵⁄₈ = 1⁷⁄₈</a:t>
+            </a:r>
+            <a:endParaRPr lang="en-US" sz="1500" dirty="0"/>
           </a:p>
         </p:txBody>
       </p:sp>
@@ -3204,47 +2763,7 @@
         <p:spPr>
           <a:xfrm>
             <a:off x="0" y="0"/>
-            <a:ext cx="9144000" cy="822960"/>
-          </a:xfrm>
-          <a:prstGeom prst="rect">
-            <a:avLst/>
-          </a:prstGeom>
-          <a:solidFill>
-            <a:srgbClr val="FFFFFF"/>
-          </a:solidFill>
-          <a:ln/>
-        </p:spPr>
-      </p:sp>
-      <p:sp>
-        <p:nvSpPr>
-          <p:cNvPr id="3" name="Shape 1"/>
-          <p:cNvSpPr/>
-          <p:nvPr/>
-        </p:nvSpPr>
-        <p:spPr>
-          <a:xfrm>
-            <a:off x="0" y="804672"/>
-            <a:ext cx="9144000" cy="27432"/>
-          </a:xfrm>
-          <a:prstGeom prst="rect">
-            <a:avLst/>
-          </a:prstGeom>
-          <a:solidFill>
-            <a:srgbClr val="E5E2DC"/>
-          </a:solidFill>
-          <a:ln/>
-        </p:spPr>
-      </p:sp>
-      <p:sp>
-        <p:nvSpPr>
-          <p:cNvPr id="4" name="Shape 2"/>
-          <p:cNvSpPr/>
-          <p:nvPr/>
-        </p:nvSpPr>
-        <p:spPr>
-          <a:xfrm>
-            <a:off x="548640" y="201168"/>
-            <a:ext cx="54864" cy="420624"/>
+            <a:ext cx="73152" cy="5148072"/>
           </a:xfrm>
           <a:prstGeom prst="rect">
             <a:avLst/>
@@ -3257,14 +2776,14 @@
       </p:sp>
       <p:sp>
         <p:nvSpPr>
-          <p:cNvPr id="5" name="Text 3"/>
-          <p:cNvSpPr/>
-          <p:nvPr/>
-        </p:nvSpPr>
-        <p:spPr>
-          <a:xfrm>
-            <a:off x="777240" y="137160"/>
-            <a:ext cx="7772400" cy="548640"/>
+          <p:cNvPr id="3" name="Text 1"/>
+          <p:cNvSpPr/>
+          <p:nvPr/>
+        </p:nvSpPr>
+        <p:spPr>
+          <a:xfrm>
+            <a:off x="548640" y="274320"/>
+            <a:ext cx="9144000" cy="640080"/>
           </a:xfrm>
           <a:prstGeom prst="rect">
             <a:avLst/>
@@ -3273,14 +2792,14 @@
           <a:ln/>
         </p:spPr>
         <p:txBody>
-          <a:bodyPr wrap="square" lIns="0" tIns="0" rIns="0" bIns="0" rtlCol="0" anchor="ctr"/>
+          <a:bodyPr wrap="square" rtlCol="0" anchor="ctr"/>
           <a:lstStyle/>
           <a:p>
             <a:pPr indent="0" marL="0">
               <a:buNone/>
             </a:pPr>
             <a:r>
-              <a:rPr lang="en-US" sz="2000" b="1" dirty="0">
+              <a:rPr lang="en-US" sz="2400" b="1" dirty="0">
                 <a:solidFill>
                   <a:srgbClr val="1B2A4A"/>
                 </a:solidFill>
@@ -3288,22 +2807,42 @@
                 <a:ea typeface="Georgia" pitchFamily="34" charset="-122"/>
                 <a:cs typeface="Georgia" pitchFamily="34" charset="-120"/>
               </a:rPr>
-              <a:t>Multiplying &amp; Dividing Mixed Numbers</a:t>
-            </a:r>
-            <a:endParaRPr lang="en-US" sz="2000" dirty="0"/>
-          </a:p>
-        </p:txBody>
-      </p:sp>
-      <p:sp>
-        <p:nvSpPr>
-          <p:cNvPr id="6" name="Text 4"/>
-          <p:cNvSpPr/>
-          <p:nvPr/>
-        </p:nvSpPr>
-        <p:spPr>
-          <a:xfrm>
-            <a:off x="731520" y="1051560"/>
-            <a:ext cx="7680960" cy="3108960"/>
+              <a:t>Finding a Fraction of an Amount</a:t>
+            </a:r>
+            <a:endParaRPr lang="en-US" sz="2400" dirty="0"/>
+          </a:p>
+        </p:txBody>
+      </p:sp>
+      <p:sp>
+        <p:nvSpPr>
+          <p:cNvPr id="4" name="Shape 2"/>
+          <p:cNvSpPr/>
+          <p:nvPr/>
+        </p:nvSpPr>
+        <p:spPr>
+          <a:xfrm>
+            <a:off x="548640" y="960120"/>
+            <a:ext cx="2286000" cy="36576"/>
+          </a:xfrm>
+          <a:prstGeom prst="rect">
+            <a:avLst/>
+          </a:prstGeom>
+          <a:solidFill>
+            <a:srgbClr val="2A9D8F"/>
+          </a:solidFill>
+          <a:ln/>
+        </p:spPr>
+      </p:sp>
+      <p:sp>
+        <p:nvSpPr>
+          <p:cNvPr id="5" name="Text 3"/>
+          <p:cNvSpPr/>
+          <p:nvPr/>
+        </p:nvSpPr>
+        <p:spPr>
+          <a:xfrm>
+            <a:off x="548640" y="1188720"/>
+            <a:ext cx="10058400" cy="3474720"/>
           </a:xfrm>
           <a:prstGeom prst="rect">
             <a:avLst/>
@@ -3315,107 +2854,112 @@
           <a:bodyPr wrap="square" rtlCol="0" anchor="t"/>
           <a:lstStyle/>
           <a:p>
-            <a:pPr marL="342900" indent="-342900">
+            <a:pPr>
+              <a:lnSpc>
+                <a:spcPct val="150000"/>
+              </a:lnSpc>
               <a:spcAft>
-                <a:spcPts val="800"/>
+                <a:spcPts val="600"/>
               </a:spcAft>
-              <a:buSzPct val="100000"/>
-              <a:buChar char="•"/>
             </a:pPr>
             <a:r>
               <a:rPr lang="en-US" sz="1500" dirty="0">
                 <a:solidFill>
                   <a:srgbClr val="3D3A36"/>
                 </a:solidFill>
-                <a:latin typeface="Calibri" pitchFamily="34" charset="0"/>
-                <a:ea typeface="Calibri" pitchFamily="34" charset="-122"/>
-                <a:cs typeface="Calibri" pitchFamily="34" charset="-120"/>
-              </a:rPr>
-              <a:t>Step 1: Convert mixed numbers to IMPROPER fractions.</a:t>
+                <a:latin typeface="Arial" pitchFamily="34" charset="0"/>
+                <a:ea typeface="Arial" pitchFamily="34" charset="-122"/>
+                <a:cs typeface="Arial" pitchFamily="34" charset="-120"/>
+              </a:rPr>
+              <a:t>'Of' means multiply! ³⁄₅ of 40.</a:t>
             </a:r>
             <a:endParaRPr lang="en-US" sz="1500" dirty="0"/>
           </a:p>
           <a:p>
-            <a:pPr marL="342900" indent="-342900">
+            <a:pPr>
+              <a:lnSpc>
+                <a:spcPct val="150000"/>
+              </a:lnSpc>
               <a:spcAft>
-                <a:spcPts val="800"/>
+                <a:spcPts val="600"/>
               </a:spcAft>
-              <a:buSzPct val="100000"/>
-              <a:buChar char="•"/>
             </a:pPr>
             <a:r>
               <a:rPr lang="en-US" sz="1500" dirty="0">
                 <a:solidFill>
                   <a:srgbClr val="3D3A36"/>
                 </a:solidFill>
-                <a:latin typeface="Calibri" pitchFamily="34" charset="0"/>
-                <a:ea typeface="Calibri" pitchFamily="34" charset="-122"/>
-                <a:cs typeface="Calibri" pitchFamily="34" charset="-120"/>
-              </a:rPr>
-              <a:t>Step 2: Multiply or divide as normal (KFC for division).</a:t>
+                <a:latin typeface="Arial" pitchFamily="34" charset="0"/>
+                <a:ea typeface="Arial" pitchFamily="34" charset="-122"/>
+                <a:cs typeface="Arial" pitchFamily="34" charset="-120"/>
+              </a:rPr>
+              <a:t>Divide by denominator: 40 ÷ 5 = 8 (one fifth).</a:t>
             </a:r>
             <a:endParaRPr lang="en-US" sz="1500" dirty="0"/>
           </a:p>
           <a:p>
-            <a:pPr marL="342900" indent="-342900">
+            <a:pPr>
+              <a:lnSpc>
+                <a:spcPct val="150000"/>
+              </a:lnSpc>
               <a:spcAft>
-                <a:spcPts val="800"/>
+                <a:spcPts val="600"/>
               </a:spcAft>
-              <a:buSzPct val="100000"/>
-              <a:buChar char="•"/>
             </a:pPr>
             <a:r>
               <a:rPr lang="en-US" sz="1500" dirty="0">
                 <a:solidFill>
                   <a:srgbClr val="3D3A36"/>
                 </a:solidFill>
-                <a:latin typeface="Calibri" pitchFamily="34" charset="0"/>
-                <a:ea typeface="Calibri" pitchFamily="34" charset="-122"/>
-                <a:cs typeface="Calibri" pitchFamily="34" charset="-120"/>
-              </a:rPr>
-              <a:t>Step 3: Simplify and convert back to a mixed number.</a:t>
+                <a:latin typeface="Arial" pitchFamily="34" charset="0"/>
+                <a:ea typeface="Arial" pitchFamily="34" charset="-122"/>
+                <a:cs typeface="Arial" pitchFamily="34" charset="-120"/>
+              </a:rPr>
+              <a:t>Multiply by numerator: 8 × 3 = 24 (three fifths).</a:t>
             </a:r>
             <a:endParaRPr lang="en-US" sz="1500" dirty="0"/>
           </a:p>
           <a:p>
-            <a:pPr marL="342900" indent="-342900">
+            <a:pPr>
+              <a:lnSpc>
+                <a:spcPct val="150000"/>
+              </a:lnSpc>
               <a:spcAft>
-                <a:spcPts val="800"/>
+                <a:spcPts val="600"/>
               </a:spcAft>
-              <a:buSzPct val="100000"/>
-              <a:buChar char="•"/>
             </a:pPr>
             <a:r>
               <a:rPr lang="en-US" sz="1500" dirty="0">
                 <a:solidFill>
                   <a:srgbClr val="3D3A36"/>
                 </a:solidFill>
-                <a:latin typeface="Calibri" pitchFamily="34" charset="0"/>
-                <a:ea typeface="Calibri" pitchFamily="34" charset="-122"/>
-                <a:cs typeface="Calibri" pitchFamily="34" charset="-120"/>
-              </a:rPr>
-              <a:t>Example: 2½ × 1⅓ = 5/2 × 4/3 = 20/6 = 10/3 = 3⅓.</a:t>
+                <a:latin typeface="Arial" pitchFamily="34" charset="0"/>
+                <a:ea typeface="Arial" pitchFamily="34" charset="-122"/>
+                <a:cs typeface="Arial" pitchFamily="34" charset="-120"/>
+              </a:rPr>
+              <a:t>Answer: ³⁄₅ of 40 = 24.</a:t>
             </a:r>
             <a:endParaRPr lang="en-US" sz="1500" dirty="0"/>
           </a:p>
           <a:p>
-            <a:pPr marL="342900" indent="-342900">
+            <a:pPr>
+              <a:lnSpc>
+                <a:spcPct val="150000"/>
+              </a:lnSpc>
               <a:spcAft>
-                <a:spcPts val="800"/>
+                <a:spcPts val="600"/>
               </a:spcAft>
-              <a:buSzPct val="100000"/>
-              <a:buChar char="•"/>
             </a:pPr>
             <a:r>
               <a:rPr lang="en-US" sz="1500" dirty="0">
                 <a:solidFill>
                   <a:srgbClr val="3D3A36"/>
                 </a:solidFill>
-                <a:latin typeface="Calibri" pitchFamily="34" charset="0"/>
-                <a:ea typeface="Calibri" pitchFamily="34" charset="-122"/>
-                <a:cs typeface="Calibri" pitchFamily="34" charset="-120"/>
-              </a:rPr>
-              <a:t>NEVER try to multiply whole numbers and fractions separately — convert first.</a:t>
+                <a:latin typeface="Arial" pitchFamily="34" charset="0"/>
+                <a:ea typeface="Arial" pitchFamily="34" charset="-122"/>
+                <a:cs typeface="Arial" pitchFamily="34" charset="-120"/>
+              </a:rPr>
+              <a:t>Real life: ¼ of a 120cm ribbon = 120 ÷ 4 = 30cm.</a:t>
             </a:r>
             <a:endParaRPr lang="en-US" sz="1500" dirty="0"/>
           </a:p>
@@ -3462,47 +3006,7 @@
         <p:spPr>
           <a:xfrm>
             <a:off x="0" y="0"/>
-            <a:ext cx="9144000" cy="822960"/>
-          </a:xfrm>
-          <a:prstGeom prst="rect">
-            <a:avLst/>
-          </a:prstGeom>
-          <a:solidFill>
-            <a:srgbClr val="FFFFFF"/>
-          </a:solidFill>
-          <a:ln/>
-        </p:spPr>
-      </p:sp>
-      <p:sp>
-        <p:nvSpPr>
-          <p:cNvPr id="3" name="Shape 1"/>
-          <p:cNvSpPr/>
-          <p:nvPr/>
-        </p:nvSpPr>
-        <p:spPr>
-          <a:xfrm>
-            <a:off x="0" y="804672"/>
-            <a:ext cx="9144000" cy="27432"/>
-          </a:xfrm>
-          <a:prstGeom prst="rect">
-            <a:avLst/>
-          </a:prstGeom>
-          <a:solidFill>
-            <a:srgbClr val="E5E2DC"/>
-          </a:solidFill>
-          <a:ln/>
-        </p:spPr>
-      </p:sp>
-      <p:sp>
-        <p:nvSpPr>
-          <p:cNvPr id="4" name="Shape 2"/>
-          <p:cNvSpPr/>
-          <p:nvPr/>
-        </p:nvSpPr>
-        <p:spPr>
-          <a:xfrm>
-            <a:off x="548640" y="201168"/>
-            <a:ext cx="54864" cy="420624"/>
+            <a:ext cx="73152" cy="5148072"/>
           </a:xfrm>
           <a:prstGeom prst="rect">
             <a:avLst/>
@@ -3515,14 +3019,14 @@
       </p:sp>
       <p:sp>
         <p:nvSpPr>
-          <p:cNvPr id="5" name="Text 3"/>
-          <p:cNvSpPr/>
-          <p:nvPr/>
-        </p:nvSpPr>
-        <p:spPr>
-          <a:xfrm>
-            <a:off x="777240" y="137160"/>
-            <a:ext cx="7772400" cy="548640"/>
+          <p:cNvPr id="3" name="Text 1"/>
+          <p:cNvSpPr/>
+          <p:nvPr/>
+        </p:nvSpPr>
+        <p:spPr>
+          <a:xfrm>
+            <a:off x="548640" y="274320"/>
+            <a:ext cx="9144000" cy="640080"/>
           </a:xfrm>
           <a:prstGeom prst="rect">
             <a:avLst/>
@@ -3531,14 +3035,14 @@
           <a:ln/>
         </p:spPr>
         <p:txBody>
-          <a:bodyPr wrap="square" lIns="0" tIns="0" rIns="0" bIns="0" rtlCol="0" anchor="ctr"/>
+          <a:bodyPr wrap="square" rtlCol="0" anchor="ctr"/>
           <a:lstStyle/>
           <a:p>
             <a:pPr indent="0" marL="0">
               <a:buNone/>
             </a:pPr>
             <a:r>
-              <a:rPr lang="en-US" sz="2000" b="1" dirty="0">
+              <a:rPr lang="en-US" sz="2400" b="1" dirty="0">
                 <a:solidFill>
                   <a:srgbClr val="1B2A4A"/>
                 </a:solidFill>
@@ -3548,40 +3052,40 @@
               </a:rPr>
               <a:t>Check Your Understanding</a:t>
             </a:r>
-            <a:endParaRPr lang="en-US" sz="2000" dirty="0"/>
-          </a:p>
-        </p:txBody>
-      </p:sp>
-      <p:sp>
-        <p:nvSpPr>
-          <p:cNvPr id="6" name="Shape 4"/>
-          <p:cNvSpPr/>
-          <p:nvPr/>
-        </p:nvSpPr>
-        <p:spPr>
-          <a:xfrm>
-            <a:off x="731520" y="1051560"/>
-            <a:ext cx="7680960" cy="438912"/>
+            <a:endParaRPr lang="en-US" sz="2400" dirty="0"/>
+          </a:p>
+        </p:txBody>
+      </p:sp>
+      <p:sp>
+        <p:nvSpPr>
+          <p:cNvPr id="4" name="Shape 2"/>
+          <p:cNvSpPr/>
+          <p:nvPr/>
+        </p:nvSpPr>
+        <p:spPr>
+          <a:xfrm>
+            <a:off x="548640" y="960120"/>
+            <a:ext cx="2286000" cy="36576"/>
           </a:xfrm>
           <a:prstGeom prst="rect">
             <a:avLst/>
           </a:prstGeom>
           <a:solidFill>
-            <a:srgbClr val="FFFFFF"/>
+            <a:srgbClr val="2A9D8F"/>
           </a:solidFill>
           <a:ln/>
         </p:spPr>
       </p:sp>
       <p:sp>
         <p:nvSpPr>
-          <p:cNvPr id="7" name="Text 5"/>
-          <p:cNvSpPr/>
-          <p:nvPr/>
-        </p:nvSpPr>
-        <p:spPr>
-          <a:xfrm>
-            <a:off x="868680" y="1051560"/>
-            <a:ext cx="320040" cy="438912"/>
+          <p:cNvPr id="5" name="Text 3"/>
+          <p:cNvSpPr/>
+          <p:nvPr/>
+        </p:nvSpPr>
+        <p:spPr>
+          <a:xfrm>
+            <a:off x="548640" y="1188720"/>
+            <a:ext cx="365760" cy="457200"/>
           </a:xfrm>
           <a:prstGeom prst="rect">
             <a:avLst/>
@@ -3597,12 +3101,57 @@
               <a:buNone/>
             </a:pPr>
             <a:r>
+              <a:rPr lang="en-US" sz="1600" dirty="0">
+                <a:solidFill>
+                  <a:srgbClr val="2A9D8F"/>
+                </a:solidFill>
+                <a:latin typeface="Arial" pitchFamily="34" charset="0"/>
+                <a:ea typeface="Arial" pitchFamily="34" charset="-122"/>
+                <a:cs typeface="Arial" pitchFamily="34" charset="-120"/>
+              </a:rPr>
+              <a:t>☐</a:t>
+            </a:r>
+            <a:endParaRPr lang="en-US" sz="1600" dirty="0"/>
+          </a:p>
+        </p:txBody>
+      </p:sp>
+      <p:sp>
+        <p:nvSpPr>
+          <p:cNvPr id="6" name="Text 4"/>
+          <p:cNvSpPr/>
+          <p:nvPr/>
+        </p:nvSpPr>
+        <p:spPr>
+          <a:xfrm>
+            <a:off x="1005840" y="1188720"/>
+            <a:ext cx="9601200" cy="457200"/>
+          </a:xfrm>
+          <a:prstGeom prst="rect">
+            <a:avLst/>
+          </a:prstGeom>
+          <a:noFill/>
+          <a:ln/>
+        </p:spPr>
+        <p:txBody>
+          <a:bodyPr wrap="square" rtlCol="0" anchor="ctr"/>
+          <a:lstStyle/>
+          <a:p>
+            <a:pPr indent="0" marL="0">
+              <a:lnSpc>
+                <a:spcPct val="130000"/>
+              </a:lnSpc>
+              <a:buNone/>
+            </a:pPr>
+            <a:r>
               <a:rPr lang="en-US" sz="1400" dirty="0">
                 <a:solidFill>
-                  <a:srgbClr val="2A9D8F"/>
-                </a:solidFill>
-              </a:rPr>
-              <a:t>☐</a:t>
+                  <a:srgbClr val="3D3A36"/>
+                </a:solidFill>
+                <a:latin typeface="Arial" pitchFamily="34" charset="0"/>
+                <a:ea typeface="Arial" pitchFamily="34" charset="-122"/>
+                <a:cs typeface="Arial" pitchFamily="34" charset="-120"/>
+              </a:rPr>
+              <a:t>I can multiply two fractions together.</a:t>
             </a:r>
             <a:endParaRPr lang="en-US" sz="1400" dirty="0"/>
           </a:p>
@@ -3610,14 +3159,14 @@
       </p:sp>
       <p:sp>
         <p:nvSpPr>
-          <p:cNvPr id="8" name="Text 6"/>
-          <p:cNvSpPr/>
-          <p:nvPr/>
-        </p:nvSpPr>
-        <p:spPr>
-          <a:xfrm>
-            <a:off x="1234440" y="1051560"/>
-            <a:ext cx="6949440" cy="438912"/>
+          <p:cNvPr id="7" name="Text 5"/>
+          <p:cNvSpPr/>
+          <p:nvPr/>
+        </p:nvSpPr>
+        <p:spPr>
+          <a:xfrm>
+            <a:off x="548640" y="1783080"/>
+            <a:ext cx="365760" cy="457200"/>
           </a:xfrm>
           <a:prstGeom prst="rect">
             <a:avLst/>
@@ -3633,50 +3182,72 @@
               <a:buNone/>
             </a:pPr>
             <a:r>
-              <a:rPr lang="en-US" sz="1300" dirty="0">
+              <a:rPr lang="en-US" sz="1600" dirty="0">
+                <a:solidFill>
+                  <a:srgbClr val="2A9D8F"/>
+                </a:solidFill>
+                <a:latin typeface="Arial" pitchFamily="34" charset="0"/>
+                <a:ea typeface="Arial" pitchFamily="34" charset="-122"/>
+                <a:cs typeface="Arial" pitchFamily="34" charset="-120"/>
+              </a:rPr>
+              <a:t>☐</a:t>
+            </a:r>
+            <a:endParaRPr lang="en-US" sz="1600" dirty="0"/>
+          </a:p>
+        </p:txBody>
+      </p:sp>
+      <p:sp>
+        <p:nvSpPr>
+          <p:cNvPr id="8" name="Text 6"/>
+          <p:cNvSpPr/>
+          <p:nvPr/>
+        </p:nvSpPr>
+        <p:spPr>
+          <a:xfrm>
+            <a:off x="1005840" y="1783080"/>
+            <a:ext cx="9601200" cy="457200"/>
+          </a:xfrm>
+          <a:prstGeom prst="rect">
+            <a:avLst/>
+          </a:prstGeom>
+          <a:noFill/>
+          <a:ln/>
+        </p:spPr>
+        <p:txBody>
+          <a:bodyPr wrap="square" rtlCol="0" anchor="ctr"/>
+          <a:lstStyle/>
+          <a:p>
+            <a:pPr indent="0" marL="0">
+              <a:lnSpc>
+                <a:spcPct val="130000"/>
+              </a:lnSpc>
+              <a:buNone/>
+            </a:pPr>
+            <a:r>
+              <a:rPr lang="en-US" sz="1400" dirty="0">
                 <a:solidFill>
                   <a:srgbClr val="3D3A36"/>
                 </a:solidFill>
-                <a:latin typeface="Calibri" pitchFamily="34" charset="0"/>
-                <a:ea typeface="Calibri" pitchFamily="34" charset="-122"/>
-                <a:cs typeface="Calibri" pitchFamily="34" charset="-120"/>
-              </a:rPr>
-              <a:t>I can multiply fractions (multiply tops, multiply bottoms)</a:t>
-            </a:r>
-            <a:endParaRPr lang="en-US" sz="1300" dirty="0"/>
-          </a:p>
-        </p:txBody>
-      </p:sp>
-      <p:sp>
-        <p:nvSpPr>
-          <p:cNvPr id="9" name="Shape 7"/>
-          <p:cNvSpPr/>
-          <p:nvPr/>
-        </p:nvSpPr>
-        <p:spPr>
-          <a:xfrm>
-            <a:off x="731520" y="1554480"/>
-            <a:ext cx="7680960" cy="438912"/>
-          </a:xfrm>
-          <a:prstGeom prst="rect">
-            <a:avLst/>
-          </a:prstGeom>
-          <a:solidFill>
-            <a:srgbClr val="F8F6F3"/>
-          </a:solidFill>
-          <a:ln/>
-        </p:spPr>
-      </p:sp>
-      <p:sp>
-        <p:nvSpPr>
-          <p:cNvPr id="10" name="Text 8"/>
-          <p:cNvSpPr/>
-          <p:nvPr/>
-        </p:nvSpPr>
-        <p:spPr>
-          <a:xfrm>
-            <a:off x="868680" y="1554480"/>
-            <a:ext cx="320040" cy="438912"/>
+                <a:latin typeface="Arial" pitchFamily="34" charset="0"/>
+                <a:ea typeface="Arial" pitchFamily="34" charset="-122"/>
+                <a:cs typeface="Arial" pitchFamily="34" charset="-120"/>
+              </a:rPr>
+              <a:t>I can divide fractions using KFC (Keep, Flip, Change).</a:t>
+            </a:r>
+            <a:endParaRPr lang="en-US" sz="1400" dirty="0"/>
+          </a:p>
+        </p:txBody>
+      </p:sp>
+      <p:sp>
+        <p:nvSpPr>
+          <p:cNvPr id="9" name="Text 7"/>
+          <p:cNvSpPr/>
+          <p:nvPr/>
+        </p:nvSpPr>
+        <p:spPr>
+          <a:xfrm>
+            <a:off x="548640" y="2377440"/>
+            <a:ext cx="365760" cy="457200"/>
           </a:xfrm>
           <a:prstGeom prst="rect">
             <a:avLst/>
@@ -3692,12 +3263,57 @@
               <a:buNone/>
             </a:pPr>
             <a:r>
+              <a:rPr lang="en-US" sz="1600" dirty="0">
+                <a:solidFill>
+                  <a:srgbClr val="2A9D8F"/>
+                </a:solidFill>
+                <a:latin typeface="Arial" pitchFamily="34" charset="0"/>
+                <a:ea typeface="Arial" pitchFamily="34" charset="-122"/>
+                <a:cs typeface="Arial" pitchFamily="34" charset="-120"/>
+              </a:rPr>
+              <a:t>☐</a:t>
+            </a:r>
+            <a:endParaRPr lang="en-US" sz="1600" dirty="0"/>
+          </a:p>
+        </p:txBody>
+      </p:sp>
+      <p:sp>
+        <p:nvSpPr>
+          <p:cNvPr id="10" name="Text 8"/>
+          <p:cNvSpPr/>
+          <p:nvPr/>
+        </p:nvSpPr>
+        <p:spPr>
+          <a:xfrm>
+            <a:off x="1005840" y="2377440"/>
+            <a:ext cx="9601200" cy="457200"/>
+          </a:xfrm>
+          <a:prstGeom prst="rect">
+            <a:avLst/>
+          </a:prstGeom>
+          <a:noFill/>
+          <a:ln/>
+        </p:spPr>
+        <p:txBody>
+          <a:bodyPr wrap="square" rtlCol="0" anchor="ctr"/>
+          <a:lstStyle/>
+          <a:p>
+            <a:pPr indent="0" marL="0">
+              <a:lnSpc>
+                <a:spcPct val="130000"/>
+              </a:lnSpc>
+              <a:buNone/>
+            </a:pPr>
+            <a:r>
               <a:rPr lang="en-US" sz="1400" dirty="0">
                 <a:solidFill>
-                  <a:srgbClr val="2A9D8F"/>
-                </a:solidFill>
-              </a:rPr>
-              <a:t>☐</a:t>
+                  <a:srgbClr val="3D3A36"/>
+                </a:solidFill>
+                <a:latin typeface="Arial" pitchFamily="34" charset="0"/>
+                <a:ea typeface="Arial" pitchFamily="34" charset="-122"/>
+                <a:cs typeface="Arial" pitchFamily="34" charset="-120"/>
+              </a:rPr>
+              <a:t>I can find a fraction of an amount.</a:t>
             </a:r>
             <a:endParaRPr lang="en-US" sz="1400" dirty="0"/>
           </a:p>
@@ -3711,8 +3327,8 @@
         </p:nvSpPr>
         <p:spPr>
           <a:xfrm>
-            <a:off x="1234440" y="1554480"/>
-            <a:ext cx="6949440" cy="438912"/>
+            <a:off x="548640" y="2971800"/>
+            <a:ext cx="365760" cy="457200"/>
           </a:xfrm>
           <a:prstGeom prst="rect">
             <a:avLst/>
@@ -3728,382 +3344,59 @@
               <a:buNone/>
             </a:pPr>
             <a:r>
-              <a:rPr lang="en-US" sz="1300" dirty="0">
+              <a:rPr lang="en-US" sz="1600" dirty="0">
+                <a:solidFill>
+                  <a:srgbClr val="2A9D8F"/>
+                </a:solidFill>
+                <a:latin typeface="Arial" pitchFamily="34" charset="0"/>
+                <a:ea typeface="Arial" pitchFamily="34" charset="-122"/>
+                <a:cs typeface="Arial" pitchFamily="34" charset="-120"/>
+              </a:rPr>
+              <a:t>☐</a:t>
+            </a:r>
+            <a:endParaRPr lang="en-US" sz="1600" dirty="0"/>
+          </a:p>
+        </p:txBody>
+      </p:sp>
+      <p:sp>
+        <p:nvSpPr>
+          <p:cNvPr id="12" name="Text 10"/>
+          <p:cNvSpPr/>
+          <p:nvPr/>
+        </p:nvSpPr>
+        <p:spPr>
+          <a:xfrm>
+            <a:off x="1005840" y="2971800"/>
+            <a:ext cx="9601200" cy="457200"/>
+          </a:xfrm>
+          <a:prstGeom prst="rect">
+            <a:avLst/>
+          </a:prstGeom>
+          <a:noFill/>
+          <a:ln/>
+        </p:spPr>
+        <p:txBody>
+          <a:bodyPr wrap="square" rtlCol="0" anchor="ctr"/>
+          <a:lstStyle/>
+          <a:p>
+            <a:pPr indent="0" marL="0">
+              <a:lnSpc>
+                <a:spcPct val="130000"/>
+              </a:lnSpc>
+              <a:buNone/>
+            </a:pPr>
+            <a:r>
+              <a:rPr lang="en-US" sz="1400" dirty="0">
                 <a:solidFill>
                   <a:srgbClr val="3D3A36"/>
                 </a:solidFill>
-                <a:latin typeface="Calibri" pitchFamily="34" charset="0"/>
-                <a:ea typeface="Calibri" pitchFamily="34" charset="-122"/>
-                <a:cs typeface="Calibri" pitchFamily="34" charset="-120"/>
-              </a:rPr>
-              <a:t>I can divide fractions using KFC (Keep, Flip, Change)</a:t>
-            </a:r>
-            <a:endParaRPr lang="en-US" sz="1300" dirty="0"/>
-          </a:p>
-        </p:txBody>
-      </p:sp>
-      <p:sp>
-        <p:nvSpPr>
-          <p:cNvPr id="12" name="Shape 10"/>
-          <p:cNvSpPr/>
-          <p:nvPr/>
-        </p:nvSpPr>
-        <p:spPr>
-          <a:xfrm>
-            <a:off x="731520" y="2057400"/>
-            <a:ext cx="7680960" cy="438912"/>
-          </a:xfrm>
-          <a:prstGeom prst="rect">
-            <a:avLst/>
-          </a:prstGeom>
-          <a:solidFill>
-            <a:srgbClr val="FFFFFF"/>
-          </a:solidFill>
-          <a:ln/>
-        </p:spPr>
-      </p:sp>
-      <p:sp>
-        <p:nvSpPr>
-          <p:cNvPr id="13" name="Text 11"/>
-          <p:cNvSpPr/>
-          <p:nvPr/>
-        </p:nvSpPr>
-        <p:spPr>
-          <a:xfrm>
-            <a:off x="868680" y="2057400"/>
-            <a:ext cx="320040" cy="438912"/>
-          </a:xfrm>
-          <a:prstGeom prst="rect">
-            <a:avLst/>
-          </a:prstGeom>
-          <a:noFill/>
-          <a:ln/>
-        </p:spPr>
-        <p:txBody>
-          <a:bodyPr wrap="square" rtlCol="0" anchor="ctr"/>
-          <a:lstStyle/>
-          <a:p>
-            <a:pPr indent="0" marL="0">
-              <a:buNone/>
-            </a:pPr>
-            <a:r>
-              <a:rPr lang="en-US" sz="1400" dirty="0">
-                <a:solidFill>
-                  <a:srgbClr val="2A9D8F"/>
-                </a:solidFill>
-              </a:rPr>
-              <a:t>☐</a:t>
+                <a:latin typeface="Arial" pitchFamily="34" charset="0"/>
+                <a:ea typeface="Arial" pitchFamily="34" charset="-122"/>
+                <a:cs typeface="Arial" pitchFamily="34" charset="-120"/>
+              </a:rPr>
+              <a:t>I can simplify my answer after multiplying or dividing.</a:t>
             </a:r>
             <a:endParaRPr lang="en-US" sz="1400" dirty="0"/>
-          </a:p>
-        </p:txBody>
-      </p:sp>
-      <p:sp>
-        <p:nvSpPr>
-          <p:cNvPr id="14" name="Text 12"/>
-          <p:cNvSpPr/>
-          <p:nvPr/>
-        </p:nvSpPr>
-        <p:spPr>
-          <a:xfrm>
-            <a:off x="1234440" y="2057400"/>
-            <a:ext cx="6949440" cy="438912"/>
-          </a:xfrm>
-          <a:prstGeom prst="rect">
-            <a:avLst/>
-          </a:prstGeom>
-          <a:noFill/>
-          <a:ln/>
-        </p:spPr>
-        <p:txBody>
-          <a:bodyPr wrap="square" rtlCol="0" anchor="ctr"/>
-          <a:lstStyle/>
-          <a:p>
-            <a:pPr indent="0" marL="0">
-              <a:buNone/>
-            </a:pPr>
-            <a:r>
-              <a:rPr lang="en-US" sz="1300" dirty="0">
-                <a:solidFill>
-                  <a:srgbClr val="3D3A36"/>
-                </a:solidFill>
-                <a:latin typeface="Calibri" pitchFamily="34" charset="0"/>
-                <a:ea typeface="Calibri" pitchFamily="34" charset="-122"/>
-                <a:cs typeface="Calibri" pitchFamily="34" charset="-120"/>
-              </a:rPr>
-              <a:t>I can use cross-cancelling to simplify before multiplying</a:t>
-            </a:r>
-            <a:endParaRPr lang="en-US" sz="1300" dirty="0"/>
-          </a:p>
-        </p:txBody>
-      </p:sp>
-      <p:sp>
-        <p:nvSpPr>
-          <p:cNvPr id="15" name="Shape 13"/>
-          <p:cNvSpPr/>
-          <p:nvPr/>
-        </p:nvSpPr>
-        <p:spPr>
-          <a:xfrm>
-            <a:off x="731520" y="2560320"/>
-            <a:ext cx="7680960" cy="438912"/>
-          </a:xfrm>
-          <a:prstGeom prst="rect">
-            <a:avLst/>
-          </a:prstGeom>
-          <a:solidFill>
-            <a:srgbClr val="F8F6F3"/>
-          </a:solidFill>
-          <a:ln/>
-        </p:spPr>
-      </p:sp>
-      <p:sp>
-        <p:nvSpPr>
-          <p:cNvPr id="16" name="Text 14"/>
-          <p:cNvSpPr/>
-          <p:nvPr/>
-        </p:nvSpPr>
-        <p:spPr>
-          <a:xfrm>
-            <a:off x="868680" y="2560320"/>
-            <a:ext cx="320040" cy="438912"/>
-          </a:xfrm>
-          <a:prstGeom prst="rect">
-            <a:avLst/>
-          </a:prstGeom>
-          <a:noFill/>
-          <a:ln/>
-        </p:spPr>
-        <p:txBody>
-          <a:bodyPr wrap="square" rtlCol="0" anchor="ctr"/>
-          <a:lstStyle/>
-          <a:p>
-            <a:pPr indent="0" marL="0">
-              <a:buNone/>
-            </a:pPr>
-            <a:r>
-              <a:rPr lang="en-US" sz="1400" dirty="0">
-                <a:solidFill>
-                  <a:srgbClr val="2A9D8F"/>
-                </a:solidFill>
-              </a:rPr>
-              <a:t>☐</a:t>
-            </a:r>
-            <a:endParaRPr lang="en-US" sz="1400" dirty="0"/>
-          </a:p>
-        </p:txBody>
-      </p:sp>
-      <p:sp>
-        <p:nvSpPr>
-          <p:cNvPr id="17" name="Text 15"/>
-          <p:cNvSpPr/>
-          <p:nvPr/>
-        </p:nvSpPr>
-        <p:spPr>
-          <a:xfrm>
-            <a:off x="1234440" y="2560320"/>
-            <a:ext cx="6949440" cy="438912"/>
-          </a:xfrm>
-          <a:prstGeom prst="rect">
-            <a:avLst/>
-          </a:prstGeom>
-          <a:noFill/>
-          <a:ln/>
-        </p:spPr>
-        <p:txBody>
-          <a:bodyPr wrap="square" rtlCol="0" anchor="ctr"/>
-          <a:lstStyle/>
-          <a:p>
-            <a:pPr indent="0" marL="0">
-              <a:buNone/>
-            </a:pPr>
-            <a:r>
-              <a:rPr lang="en-US" sz="1300" dirty="0">
-                <a:solidFill>
-                  <a:srgbClr val="3D3A36"/>
-                </a:solidFill>
-                <a:latin typeface="Calibri" pitchFamily="34" charset="0"/>
-                <a:ea typeface="Calibri" pitchFamily="34" charset="-122"/>
-                <a:cs typeface="Calibri" pitchFamily="34" charset="-120"/>
-              </a:rPr>
-              <a:t>I can multiply and divide mixed numbers</a:t>
-            </a:r>
-            <a:endParaRPr lang="en-US" sz="1300" dirty="0"/>
-          </a:p>
-        </p:txBody>
-      </p:sp>
-      <p:sp>
-        <p:nvSpPr>
-          <p:cNvPr id="18" name="Shape 16"/>
-          <p:cNvSpPr/>
-          <p:nvPr/>
-        </p:nvSpPr>
-        <p:spPr>
-          <a:xfrm>
-            <a:off x="731520" y="3063240"/>
-            <a:ext cx="7680960" cy="438912"/>
-          </a:xfrm>
-          <a:prstGeom prst="rect">
-            <a:avLst/>
-          </a:prstGeom>
-          <a:solidFill>
-            <a:srgbClr val="FFFFFF"/>
-          </a:solidFill>
-          <a:ln/>
-        </p:spPr>
-      </p:sp>
-      <p:sp>
-        <p:nvSpPr>
-          <p:cNvPr id="19" name="Text 17"/>
-          <p:cNvSpPr/>
-          <p:nvPr/>
-        </p:nvSpPr>
-        <p:spPr>
-          <a:xfrm>
-            <a:off x="868680" y="3063240"/>
-            <a:ext cx="320040" cy="438912"/>
-          </a:xfrm>
-          <a:prstGeom prst="rect">
-            <a:avLst/>
-          </a:prstGeom>
-          <a:noFill/>
-          <a:ln/>
-        </p:spPr>
-        <p:txBody>
-          <a:bodyPr wrap="square" rtlCol="0" anchor="ctr"/>
-          <a:lstStyle/>
-          <a:p>
-            <a:pPr indent="0" marL="0">
-              <a:buNone/>
-            </a:pPr>
-            <a:r>
-              <a:rPr lang="en-US" sz="1400" dirty="0">
-                <a:solidFill>
-                  <a:srgbClr val="2A9D8F"/>
-                </a:solidFill>
-              </a:rPr>
-              <a:t>☐</a:t>
-            </a:r>
-            <a:endParaRPr lang="en-US" sz="1400" dirty="0"/>
-          </a:p>
-        </p:txBody>
-      </p:sp>
-      <p:sp>
-        <p:nvSpPr>
-          <p:cNvPr id="20" name="Text 18"/>
-          <p:cNvSpPr/>
-          <p:nvPr/>
-        </p:nvSpPr>
-        <p:spPr>
-          <a:xfrm>
-            <a:off x="1234440" y="3063240"/>
-            <a:ext cx="6949440" cy="438912"/>
-          </a:xfrm>
-          <a:prstGeom prst="rect">
-            <a:avLst/>
-          </a:prstGeom>
-          <a:noFill/>
-          <a:ln/>
-        </p:spPr>
-        <p:txBody>
-          <a:bodyPr wrap="square" rtlCol="0" anchor="ctr"/>
-          <a:lstStyle/>
-          <a:p>
-            <a:pPr indent="0" marL="0">
-              <a:buNone/>
-            </a:pPr>
-            <a:r>
-              <a:rPr lang="en-US" sz="1300" dirty="0">
-                <a:solidFill>
-                  <a:srgbClr val="3D3A36"/>
-                </a:solidFill>
-                <a:latin typeface="Calibri" pitchFamily="34" charset="0"/>
-                <a:ea typeface="Calibri" pitchFamily="34" charset="-122"/>
-                <a:cs typeface="Calibri" pitchFamily="34" charset="-120"/>
-              </a:rPr>
-              <a:t>I always simplify my final answer</a:t>
-            </a:r>
-            <a:endParaRPr lang="en-US" sz="1300" dirty="0"/>
-          </a:p>
-        </p:txBody>
-      </p:sp>
-      <p:sp>
-        <p:nvSpPr>
-          <p:cNvPr id="21" name="Shape 19"/>
-          <p:cNvSpPr/>
-          <p:nvPr/>
-        </p:nvSpPr>
-        <p:spPr>
-          <a:xfrm>
-            <a:off x="731520" y="3749040"/>
-            <a:ext cx="7680960" cy="594360"/>
-          </a:xfrm>
-          <a:prstGeom prst="rect">
-            <a:avLst/>
-          </a:prstGeom>
-          <a:solidFill>
-            <a:srgbClr val="E8F5F3"/>
-          </a:solidFill>
-          <a:ln/>
-          <a:effectLst>
-            <a:outerShdw sx="100000" sy="100000" kx="0" ky="0" algn="bl" rotWithShape="0" blurRad="50800" dist="25400" dir="8100000">
-              <a:srgbClr val="000000">
-                <a:alpha val="10000"/>
-              </a:srgbClr>
-            </a:outerShdw>
-          </a:effectLst>
-        </p:spPr>
-      </p:sp>
-      <p:sp>
-        <p:nvSpPr>
-          <p:cNvPr id="22" name="Text 20"/>
-          <p:cNvSpPr/>
-          <p:nvPr/>
-        </p:nvSpPr>
-        <p:spPr>
-          <a:xfrm>
-            <a:off x="914400" y="3749040"/>
-            <a:ext cx="7315200" cy="594360"/>
-          </a:xfrm>
-          <a:prstGeom prst="rect">
-            <a:avLst/>
-          </a:prstGeom>
-          <a:noFill/>
-          <a:ln/>
-        </p:spPr>
-        <p:txBody>
-          <a:bodyPr wrap="square" rtlCol="0" anchor="ctr"/>
-          <a:lstStyle/>
-          <a:p>
-            <a:pPr indent="0" marL="0">
-              <a:buNone/>
-            </a:pPr>
-            <a:r>
-              <a:rPr lang="en-US" sz="1200" b="1" dirty="0">
-                <a:solidFill>
-                  <a:srgbClr val="2A9D8F"/>
-                </a:solidFill>
-                <a:latin typeface="Calibri" pitchFamily="34" charset="0"/>
-                <a:ea typeface="Calibri" pitchFamily="34" charset="-122"/>
-                <a:cs typeface="Calibri" pitchFamily="34" charset="-120"/>
-              </a:rPr>
-              <a:t>Key Idea: </a:t>
-            </a:r>
-            <a:pPr indent="0" marL="0">
-              <a:buNone/>
-            </a:pPr>
-            <a:r>
-              <a:rPr lang="en-US" sz="1200" i="1" dirty="0">
-                <a:solidFill>
-                  <a:srgbClr val="3D3A36"/>
-                </a:solidFill>
-                <a:latin typeface="Calibri" pitchFamily="34" charset="0"/>
-                <a:ea typeface="Calibri" pitchFamily="34" charset="-122"/>
-                <a:cs typeface="Calibri" pitchFamily="34" charset="-120"/>
-              </a:rPr>
-              <a:t>To multiply: tops × tops, bottoms × bottoms. To divide: Keep, Flip, Change!</a:t>
-            </a:r>
-            <a:endParaRPr lang="en-US" sz="1200" dirty="0"/>
           </a:p>
         </p:txBody>
       </p:sp>
@@ -4118,6 +3411,13 @@
 <file path=ppt/slides/slide7.xml><?xml version="1.0" encoding="utf-8"?>
 <p:sld xmlns:a="http://schemas.openxmlformats.org/drawingml/2006/main" xmlns:r="http://schemas.openxmlformats.org/officeDocument/2006/relationships" xmlns:p="http://schemas.openxmlformats.org/presentationml/2006/main">
   <p:cSld name="Slide 7">
+    <p:bg>
+      <p:bgPr>
+        <a:solidFill>
+          <a:srgbClr val="111D35"/>
+        </a:solidFill>
+      </p:bgPr>
+    </p:bg>
     <p:spTree>
       <p:nvGrpSpPr>
         <p:cNvPr id="1" name=""/>
@@ -4134,76 +3434,14 @@
       </p:grpSpPr>
       <p:sp>
         <p:nvSpPr>
-          <p:cNvPr id="2" name="Shape 0"/>
-          <p:cNvSpPr/>
-          <p:nvPr/>
-        </p:nvSpPr>
-        <p:spPr>
-          <a:xfrm>
-            <a:off x="0" y="0"/>
-            <a:ext cx="9144000" cy="5143500"/>
-          </a:xfrm>
-          <a:prstGeom prst="rect">
-            <a:avLst/>
-          </a:prstGeom>
-          <a:solidFill>
-            <a:srgbClr val="1B2A4A"/>
-          </a:solidFill>
-          <a:ln/>
-        </p:spPr>
-      </p:sp>
-      <p:sp>
-        <p:nvSpPr>
-          <p:cNvPr id="3" name="Shape 1"/>
-          <p:cNvSpPr/>
-          <p:nvPr/>
-        </p:nvSpPr>
-        <p:spPr>
-          <a:xfrm>
-            <a:off x="0" y="4777740"/>
-            <a:ext cx="9144000" cy="365760"/>
-          </a:xfrm>
-          <a:prstGeom prst="rect">
-            <a:avLst/>
-          </a:prstGeom>
-          <a:solidFill>
-            <a:srgbClr val="2A9D8F"/>
-          </a:solidFill>
-          <a:ln/>
-        </p:spPr>
-      </p:sp>
-      <p:sp>
-        <p:nvSpPr>
-          <p:cNvPr id="4" name="Shape 2"/>
-          <p:cNvSpPr/>
-          <p:nvPr/>
-        </p:nvSpPr>
-        <p:spPr>
-          <a:xfrm>
-            <a:off x="-914400" y="-914400"/>
-            <a:ext cx="3657600" cy="3657600"/>
-          </a:xfrm>
-          <a:prstGeom prst="ellipse">
-            <a:avLst/>
-          </a:prstGeom>
-          <a:solidFill>
-            <a:srgbClr val="2A9D8F">
-              <a:alpha val="10000"/>
-            </a:srgbClr>
-          </a:solidFill>
-          <a:ln/>
-        </p:spPr>
-      </p:sp>
-      <p:sp>
-        <p:nvSpPr>
-          <p:cNvPr id="5" name="Text 3"/>
-          <p:cNvSpPr/>
-          <p:nvPr/>
-        </p:nvSpPr>
-        <p:spPr>
-          <a:xfrm>
-            <a:off x="731520" y="1463040"/>
-            <a:ext cx="7680960" cy="822960"/>
+          <p:cNvPr id="2" name="Text 0"/>
+          <p:cNvSpPr/>
+          <p:nvPr/>
+        </p:nvSpPr>
+        <p:spPr>
+          <a:xfrm>
+            <a:off x="731520" y="1371600"/>
+            <a:ext cx="9144000" cy="914400"/>
           </a:xfrm>
           <a:prstGeom prst="rect">
             <a:avLst/>
@@ -4215,11 +3453,11 @@
           <a:bodyPr wrap="square" rtlCol="0" anchor="ctr"/>
           <a:lstStyle/>
           <a:p>
-            <a:pPr algn="ctr" indent="0" marL="0">
+            <a:pPr indent="0" marL="0">
               <a:buNone/>
             </a:pPr>
             <a:r>
-              <a:rPr lang="en-US" sz="3400" b="1" dirty="0">
+              <a:rPr lang="en-US" sz="3200" b="1" dirty="0">
                 <a:solidFill>
                   <a:srgbClr val="FFFFFF"/>
                 </a:solidFill>
@@ -4229,20 +3467,20 @@
               </a:rPr>
               <a:t>Review &amp; Practise</a:t>
             </a:r>
-            <a:endParaRPr lang="en-US" sz="3400" dirty="0"/>
-          </a:p>
-        </p:txBody>
-      </p:sp>
-      <p:sp>
-        <p:nvSpPr>
-          <p:cNvPr id="6" name="Text 4"/>
-          <p:cNvSpPr/>
-          <p:nvPr/>
-        </p:nvSpPr>
-        <p:spPr>
-          <a:xfrm>
-            <a:off x="731520" y="2468880"/>
-            <a:ext cx="7680960" cy="457200"/>
+            <a:endParaRPr lang="en-US" sz="3200" dirty="0"/>
+          </a:p>
+        </p:txBody>
+      </p:sp>
+      <p:sp>
+        <p:nvSpPr>
+          <p:cNvPr id="3" name="Text 1"/>
+          <p:cNvSpPr/>
+          <p:nvPr/>
+        </p:nvSpPr>
+        <p:spPr>
+          <a:xfrm>
+            <a:off x="731520" y="2377440"/>
+            <a:ext cx="7315200" cy="548640"/>
           </a:xfrm>
           <a:prstGeom prst="rect">
             <a:avLst/>
@@ -4254,60 +3492,62 @@
           <a:bodyPr wrap="square" rtlCol="0" anchor="ctr"/>
           <a:lstStyle/>
           <a:p>
-            <a:pPr algn="ctr" indent="0" marL="0">
+            <a:pPr indent="0" marL="0">
               <a:buNone/>
             </a:pPr>
             <a:r>
-              <a:rPr lang="en-US" sz="1800" dirty="0">
-                <a:solidFill>
-                  <a:srgbClr val="2A9D8F"/>
-                </a:solidFill>
-                <a:latin typeface="Calibri" pitchFamily="34" charset="0"/>
-                <a:ea typeface="Calibri" pitchFamily="34" charset="-122"/>
-                <a:cs typeface="Calibri" pitchFamily="34" charset="-120"/>
+              <a:rPr lang="en-US" sz="1500" dirty="0">
+                <a:solidFill>
+                  <a:srgbClr val="FFFFFF">
+                    <a:alpha val="60000"/>
+                  </a:srgbClr>
+                </a:solidFill>
+                <a:latin typeface="Arial" pitchFamily="34" charset="0"/>
+                <a:ea typeface="Arial" pitchFamily="34" charset="-122"/>
+                <a:cs typeface="Arial" pitchFamily="34" charset="-120"/>
+              </a:rPr>
+              <a:t>Use the Self-Quiz, Review Games, and Practice Builder to test yourself.</a:t>
+            </a:r>
+            <a:endParaRPr lang="en-US" sz="1500" dirty="0"/>
+          </a:p>
+        </p:txBody>
+      </p:sp>
+      <p:sp>
+        <p:nvSpPr>
+          <p:cNvPr id="4" name="Text 2"/>
+          <p:cNvSpPr/>
+          <p:nvPr/>
+        </p:nvSpPr>
+        <p:spPr>
+          <a:xfrm>
+            <a:off x="731520" y="3291840"/>
+            <a:ext cx="3657600" cy="457200"/>
+          </a:xfrm>
+          <a:prstGeom prst="rect">
+            <a:avLst/>
+          </a:prstGeom>
+          <a:noFill/>
+          <a:ln/>
+        </p:spPr>
+        <p:txBody>
+          <a:bodyPr wrap="square" rtlCol="0" anchor="ctr"/>
+          <a:lstStyle/>
+          <a:p>
+            <a:pPr indent="0" marL="0">
+              <a:buNone/>
+            </a:pPr>
+            <a:r>
+              <a:rPr lang="en-US" sz="1800" b="1" dirty="0">
+                <a:solidFill>
+                  <a:srgbClr val="E9C46A"/>
+                </a:solidFill>
+                <a:latin typeface="Georgia" pitchFamily="34" charset="0"/>
+                <a:ea typeface="Georgia" pitchFamily="34" charset="-122"/>
+                <a:cs typeface="Georgia" pitchFamily="34" charset="-120"/>
               </a:rPr>
               <a:t>mrzocchi.com</a:t>
             </a:r>
             <a:endParaRPr lang="en-US" sz="1800" dirty="0"/>
-          </a:p>
-        </p:txBody>
-      </p:sp>
-      <p:sp>
-        <p:nvSpPr>
-          <p:cNvPr id="7" name="Text 5"/>
-          <p:cNvSpPr/>
-          <p:nvPr/>
-        </p:nvSpPr>
-        <p:spPr>
-          <a:xfrm>
-            <a:off x="731520" y="3108960"/>
-            <a:ext cx="7680960" cy="457200"/>
-          </a:xfrm>
-          <a:prstGeom prst="rect">
-            <a:avLst/>
-          </a:prstGeom>
-          <a:noFill/>
-          <a:ln/>
-        </p:spPr>
-        <p:txBody>
-          <a:bodyPr wrap="square" rtlCol="0" anchor="ctr"/>
-          <a:lstStyle/>
-          <a:p>
-            <a:pPr algn="ctr" indent="0" marL="0">
-              <a:buNone/>
-            </a:pPr>
-            <a:r>
-              <a:rPr lang="en-US" sz="1300" dirty="0">
-                <a:solidFill>
-                  <a:srgbClr val="9B9690"/>
-                </a:solidFill>
-                <a:latin typeface="Calibri" pitchFamily="34" charset="0"/>
-                <a:ea typeface="Calibri" pitchFamily="34" charset="-122"/>
-                <a:cs typeface="Calibri" pitchFamily="34" charset="-120"/>
-              </a:rPr>
-              <a:t>Use the Self-Quiz, Review Games, and Practice Builder to test yourself.</a:t>
-            </a:r>
-            <a:endParaRPr lang="en-US" sz="1300" dirty="0"/>
           </a:p>
         </p:txBody>
       </p:sp>
